--- a/native/HDDS_기초분석시사점_V1.0.pptx
+++ b/native/HDDS_기초분석시사점_V1.0.pptx
@@ -4045,42 +4045,77 @@
         </p:nvSpPr>
         <p:spPr>
           <a:xfrm>
-            <a:off x="365750" y="274320"/>
-            <a:ext cx="10972525" cy="480060"/>
-          </a:xfrm>
-          <a:prstGeom prst="rect">
-            <a:avLst/>
-          </a:prstGeom>
-          <a:noFill/>
-        </p:spPr>
-        <p:txBody>
-          <a:bodyPr wrap="square" lIns="36000" rIns="36000" tIns="18000" bIns="18000">
-            <a:spAutoFit/>
-          </a:bodyPr>
-          <a:lstStyle/>
-          <a:p>
-            <a:pPr algn="l"/>
-            <a:r>
-              <a:rPr sz="1700" b="1">
+            <a:off x="487667" y="137160"/>
+            <a:ext cx="7315017" cy="274320"/>
+          </a:xfrm>
+          <a:prstGeom prst="rect">
+            <a:avLst/>
+          </a:prstGeom>
+          <a:noFill/>
+        </p:spPr>
+        <p:txBody>
+          <a:bodyPr wrap="square" lIns="36000" rIns="36000" tIns="18000" bIns="18000">
+            <a:spAutoFit/>
+          </a:bodyPr>
+          <a:lstStyle/>
+          <a:p>
+            <a:pPr algn="l"/>
+            <a:r>
+              <a:rPr sz="900" b="0">
+                <a:solidFill>
+                  <a:srgbClr val="767676"/>
+                </a:solidFill>
+                <a:latin typeface="Pretendard"/>
+              </a:rPr>
+              <a:t>기초분석 시사점</a:t>
+            </a:r>
+          </a:p>
+        </p:txBody>
+      </p:sp>
+      <p:sp>
+        <p:nvSpPr>
+          <p:cNvPr id="3" name="TextBox 2"/>
+          <p:cNvSpPr txBox="1"/>
+          <p:nvPr/>
+        </p:nvSpPr>
+        <p:spPr>
+          <a:xfrm>
+            <a:off x="487667" y="548640"/>
+            <a:ext cx="11216359" cy="548640"/>
+          </a:xfrm>
+          <a:prstGeom prst="rect">
+            <a:avLst/>
+          </a:prstGeom>
+          <a:noFill/>
+        </p:spPr>
+        <p:txBody>
+          <a:bodyPr wrap="square" lIns="36000" rIns="36000" tIns="18000" bIns="18000">
+            <a:spAutoFit/>
+          </a:bodyPr>
+          <a:lstStyle/>
+          <a:p>
+            <a:pPr algn="l"/>
+            <a:r>
+              <a:rPr sz="2400" b="1">
                 <a:solidFill>
                   <a:srgbClr val="1A1A1A"/>
                 </a:solidFill>
                 <a:latin typeface="Pretendard"/>
               </a:rPr>
-              <a:t>1. 개요</a:t>
-            </a:r>
-          </a:p>
-        </p:txBody>
-      </p:sp>
-      <p:sp>
-        <p:nvSpPr>
-          <p:cNvPr id="3" name="Rectangle 2"/>
+              <a:t>개요</a:t>
+            </a:r>
+          </a:p>
+        </p:txBody>
+      </p:sp>
+      <p:sp>
+        <p:nvSpPr>
+          <p:cNvPr id="4" name="Rectangle 3"/>
           <p:cNvSpPr/>
           <p:nvPr/>
         </p:nvSpPr>
         <p:spPr>
           <a:xfrm>
-            <a:off x="365750" y="891540"/>
+            <a:off x="487667" y="1234440"/>
             <a:ext cx="3169840" cy="377190"/>
           </a:xfrm>
           <a:prstGeom prst="rect">
@@ -4120,13 +4155,13 @@
       </p:sp>
       <p:sp>
         <p:nvSpPr>
-          <p:cNvPr id="4" name="TextBox 3"/>
-          <p:cNvSpPr txBox="1"/>
-          <p:nvPr/>
-        </p:nvSpPr>
-        <p:spPr>
-          <a:xfrm>
-            <a:off x="365750" y="946404"/>
+          <p:cNvPr id="5" name="TextBox 4"/>
+          <p:cNvSpPr txBox="1"/>
+          <p:nvPr/>
+        </p:nvSpPr>
+        <p:spPr>
+          <a:xfrm>
+            <a:off x="487667" y="1289304"/>
             <a:ext cx="3169840" cy="301752"/>
           </a:xfrm>
           <a:prstGeom prst="rect">
@@ -4155,13 +4190,13 @@
       </p:sp>
       <p:sp>
         <p:nvSpPr>
-          <p:cNvPr id="5" name="Rectangle 4"/>
+          <p:cNvPr id="6" name="Rectangle 5"/>
           <p:cNvSpPr/>
           <p:nvPr/>
         </p:nvSpPr>
         <p:spPr>
           <a:xfrm>
-            <a:off x="3535591" y="891540"/>
+            <a:off x="3657508" y="1234440"/>
             <a:ext cx="8290352" cy="377190"/>
           </a:xfrm>
           <a:prstGeom prst="rect">
@@ -4201,13 +4236,13 @@
       </p:sp>
       <p:sp>
         <p:nvSpPr>
-          <p:cNvPr id="6" name="TextBox 5"/>
-          <p:cNvSpPr txBox="1"/>
-          <p:nvPr/>
-        </p:nvSpPr>
-        <p:spPr>
-          <a:xfrm>
-            <a:off x="3535591" y="946404"/>
+          <p:cNvPr id="7" name="TextBox 6"/>
+          <p:cNvSpPr txBox="1"/>
+          <p:nvPr/>
+        </p:nvSpPr>
+        <p:spPr>
+          <a:xfrm>
+            <a:off x="3657508" y="1289304"/>
             <a:ext cx="8290352" cy="301752"/>
           </a:xfrm>
           <a:prstGeom prst="rect">
@@ -4236,13 +4271,13 @@
       </p:sp>
       <p:sp>
         <p:nvSpPr>
-          <p:cNvPr id="7" name="Rectangle 6"/>
+          <p:cNvPr id="8" name="Rectangle 7"/>
           <p:cNvSpPr/>
           <p:nvPr/>
         </p:nvSpPr>
         <p:spPr>
           <a:xfrm>
-            <a:off x="365750" y="1268730"/>
+            <a:off x="487667" y="1611630"/>
             <a:ext cx="3169840" cy="864108"/>
           </a:xfrm>
           <a:prstGeom prst="rect">
@@ -4282,13 +4317,13 @@
       </p:sp>
       <p:sp>
         <p:nvSpPr>
-          <p:cNvPr id="8" name="TextBox 7"/>
-          <p:cNvSpPr txBox="1"/>
-          <p:nvPr/>
-        </p:nvSpPr>
-        <p:spPr>
-          <a:xfrm>
-            <a:off x="365750" y="1296161"/>
+          <p:cNvPr id="9" name="TextBox 8"/>
+          <p:cNvSpPr txBox="1"/>
+          <p:nvPr/>
+        </p:nvSpPr>
+        <p:spPr>
+          <a:xfrm>
+            <a:off x="487667" y="1639062"/>
             <a:ext cx="3169840" cy="809244"/>
           </a:xfrm>
           <a:prstGeom prst="rect">
@@ -4304,7 +4339,7 @@
           <a:p>
             <a:pPr algn="l"/>
             <a:r>
-              <a:rPr sz="750" b="0">
+              <a:rPr sz="800" b="0">
                 <a:solidFill>
                   <a:srgbClr val="1A1A1A"/>
                 </a:solidFill>
@@ -4317,13 +4352,13 @@
       </p:sp>
       <p:sp>
         <p:nvSpPr>
-          <p:cNvPr id="9" name="Rectangle 8"/>
+          <p:cNvPr id="10" name="Rectangle 9"/>
           <p:cNvSpPr/>
           <p:nvPr/>
         </p:nvSpPr>
         <p:spPr>
           <a:xfrm>
-            <a:off x="3535591" y="1268730"/>
+            <a:off x="3657508" y="1611630"/>
             <a:ext cx="8290352" cy="864108"/>
           </a:xfrm>
           <a:prstGeom prst="rect">
@@ -4363,13 +4398,13 @@
       </p:sp>
       <p:sp>
         <p:nvSpPr>
-          <p:cNvPr id="10" name="TextBox 9"/>
-          <p:cNvSpPr txBox="1"/>
-          <p:nvPr/>
-        </p:nvSpPr>
-        <p:spPr>
-          <a:xfrm>
-            <a:off x="3535591" y="1296161"/>
+          <p:cNvPr id="11" name="TextBox 10"/>
+          <p:cNvSpPr txBox="1"/>
+          <p:nvPr/>
+        </p:nvSpPr>
+        <p:spPr>
+          <a:xfrm>
+            <a:off x="3657508" y="1639062"/>
             <a:ext cx="8290352" cy="809244"/>
           </a:xfrm>
           <a:prstGeom prst="rect">
@@ -4385,7 +4420,7 @@
           <a:p>
             <a:pPr algn="l"/>
             <a:r>
-              <a:rPr sz="750" b="0">
+              <a:rPr sz="800" b="0">
                 <a:solidFill>
                   <a:srgbClr val="1A1A1A"/>
                 </a:solidFill>
@@ -4398,13 +4433,13 @@
       </p:sp>
       <p:sp>
         <p:nvSpPr>
-          <p:cNvPr id="11" name="Rectangle 10"/>
+          <p:cNvPr id="12" name="Rectangle 11"/>
           <p:cNvSpPr/>
           <p:nvPr/>
         </p:nvSpPr>
         <p:spPr>
           <a:xfrm>
-            <a:off x="365750" y="2132838"/>
+            <a:off x="487667" y="2475738"/>
             <a:ext cx="3169840" cy="699516"/>
           </a:xfrm>
           <a:prstGeom prst="rect">
@@ -4444,13 +4479,13 @@
       </p:sp>
       <p:sp>
         <p:nvSpPr>
-          <p:cNvPr id="12" name="TextBox 11"/>
-          <p:cNvSpPr txBox="1"/>
-          <p:nvPr/>
-        </p:nvSpPr>
-        <p:spPr>
-          <a:xfrm>
-            <a:off x="365750" y="2160270"/>
+          <p:cNvPr id="13" name="TextBox 12"/>
+          <p:cNvSpPr txBox="1"/>
+          <p:nvPr/>
+        </p:nvSpPr>
+        <p:spPr>
+          <a:xfrm>
+            <a:off x="487667" y="2503170"/>
             <a:ext cx="3169840" cy="644651"/>
           </a:xfrm>
           <a:prstGeom prst="rect">
@@ -4466,7 +4501,7 @@
           <a:p>
             <a:pPr algn="l"/>
             <a:r>
-              <a:rPr sz="750" b="0">
+              <a:rPr sz="800" b="0">
                 <a:solidFill>
                   <a:srgbClr val="1A1A1A"/>
                 </a:solidFill>
@@ -4479,13 +4514,13 @@
       </p:sp>
       <p:sp>
         <p:nvSpPr>
-          <p:cNvPr id="13" name="Rectangle 12"/>
+          <p:cNvPr id="14" name="Rectangle 13"/>
           <p:cNvSpPr/>
           <p:nvPr/>
         </p:nvSpPr>
         <p:spPr>
           <a:xfrm>
-            <a:off x="3535591" y="2132838"/>
+            <a:off x="3657508" y="2475738"/>
             <a:ext cx="8290352" cy="699516"/>
           </a:xfrm>
           <a:prstGeom prst="rect">
@@ -4525,13 +4560,13 @@
       </p:sp>
       <p:sp>
         <p:nvSpPr>
-          <p:cNvPr id="14" name="TextBox 13"/>
-          <p:cNvSpPr txBox="1"/>
-          <p:nvPr/>
-        </p:nvSpPr>
-        <p:spPr>
-          <a:xfrm>
-            <a:off x="3535591" y="2160270"/>
+          <p:cNvPr id="15" name="TextBox 14"/>
+          <p:cNvSpPr txBox="1"/>
+          <p:nvPr/>
+        </p:nvSpPr>
+        <p:spPr>
+          <a:xfrm>
+            <a:off x="3657508" y="2503170"/>
             <a:ext cx="8290352" cy="644651"/>
           </a:xfrm>
           <a:prstGeom prst="rect">
@@ -4547,7 +4582,7 @@
           <a:p>
             <a:pPr algn="l"/>
             <a:r>
-              <a:rPr sz="750" b="0">
+              <a:rPr sz="800" b="0">
                 <a:solidFill>
                   <a:srgbClr val="1A1A1A"/>
                 </a:solidFill>
@@ -4560,13 +4595,13 @@
       </p:sp>
       <p:sp>
         <p:nvSpPr>
-          <p:cNvPr id="15" name="Rectangle 14"/>
+          <p:cNvPr id="16" name="Rectangle 15"/>
           <p:cNvSpPr/>
           <p:nvPr/>
         </p:nvSpPr>
         <p:spPr>
           <a:xfrm>
-            <a:off x="365750" y="2832354"/>
+            <a:off x="487667" y="3175254"/>
             <a:ext cx="3169840" cy="534924"/>
           </a:xfrm>
           <a:prstGeom prst="rect">
@@ -4606,13 +4641,13 @@
       </p:sp>
       <p:sp>
         <p:nvSpPr>
-          <p:cNvPr id="16" name="TextBox 15"/>
-          <p:cNvSpPr txBox="1"/>
-          <p:nvPr/>
-        </p:nvSpPr>
-        <p:spPr>
-          <a:xfrm>
-            <a:off x="365750" y="2859786"/>
+          <p:cNvPr id="17" name="TextBox 16"/>
+          <p:cNvSpPr txBox="1"/>
+          <p:nvPr/>
+        </p:nvSpPr>
+        <p:spPr>
+          <a:xfrm>
+            <a:off x="487667" y="3202686"/>
             <a:ext cx="3169840" cy="480060"/>
           </a:xfrm>
           <a:prstGeom prst="rect">
@@ -4628,7 +4663,7 @@
           <a:p>
             <a:pPr algn="l"/>
             <a:r>
-              <a:rPr sz="750" b="0">
+              <a:rPr sz="800" b="0">
                 <a:solidFill>
                   <a:srgbClr val="1A1A1A"/>
                 </a:solidFill>
@@ -4641,13 +4676,13 @@
       </p:sp>
       <p:sp>
         <p:nvSpPr>
-          <p:cNvPr id="17" name="Rectangle 16"/>
+          <p:cNvPr id="18" name="Rectangle 17"/>
           <p:cNvSpPr/>
           <p:nvPr/>
         </p:nvSpPr>
         <p:spPr>
           <a:xfrm>
-            <a:off x="3535591" y="2832354"/>
+            <a:off x="3657508" y="3175254"/>
             <a:ext cx="8290352" cy="534924"/>
           </a:xfrm>
           <a:prstGeom prst="rect">
@@ -4687,13 +4722,13 @@
       </p:sp>
       <p:sp>
         <p:nvSpPr>
-          <p:cNvPr id="18" name="TextBox 17"/>
-          <p:cNvSpPr txBox="1"/>
-          <p:nvPr/>
-        </p:nvSpPr>
-        <p:spPr>
-          <a:xfrm>
-            <a:off x="3535591" y="2859786"/>
+          <p:cNvPr id="19" name="TextBox 18"/>
+          <p:cNvSpPr txBox="1"/>
+          <p:nvPr/>
+        </p:nvSpPr>
+        <p:spPr>
+          <a:xfrm>
+            <a:off x="3657508" y="3202686"/>
             <a:ext cx="8290352" cy="480060"/>
           </a:xfrm>
           <a:prstGeom prst="rect">
@@ -4709,7 +4744,7 @@
           <a:p>
             <a:pPr algn="l"/>
             <a:r>
-              <a:rPr sz="750" b="0">
+              <a:rPr sz="800" b="0">
                 <a:solidFill>
                   <a:srgbClr val="1A1A1A"/>
                 </a:solidFill>
@@ -4722,13 +4757,13 @@
       </p:sp>
       <p:sp>
         <p:nvSpPr>
-          <p:cNvPr id="19" name="Rectangle 18"/>
+          <p:cNvPr id="20" name="Rectangle 19"/>
           <p:cNvSpPr/>
           <p:nvPr/>
         </p:nvSpPr>
         <p:spPr>
           <a:xfrm>
-            <a:off x="365750" y="3367277"/>
+            <a:off x="487667" y="3710177"/>
             <a:ext cx="3169840" cy="699516"/>
           </a:xfrm>
           <a:prstGeom prst="rect">
@@ -4768,13 +4803,13 @@
       </p:sp>
       <p:sp>
         <p:nvSpPr>
-          <p:cNvPr id="20" name="TextBox 19"/>
-          <p:cNvSpPr txBox="1"/>
-          <p:nvPr/>
-        </p:nvSpPr>
-        <p:spPr>
-          <a:xfrm>
-            <a:off x="365750" y="3394709"/>
+          <p:cNvPr id="21" name="TextBox 20"/>
+          <p:cNvSpPr txBox="1"/>
+          <p:nvPr/>
+        </p:nvSpPr>
+        <p:spPr>
+          <a:xfrm>
+            <a:off x="487667" y="3737609"/>
             <a:ext cx="3169840" cy="644651"/>
           </a:xfrm>
           <a:prstGeom prst="rect">
@@ -4790,7 +4825,7 @@
           <a:p>
             <a:pPr algn="l"/>
             <a:r>
-              <a:rPr sz="750" b="0">
+              <a:rPr sz="800" b="0">
                 <a:solidFill>
                   <a:srgbClr val="1A1A1A"/>
                 </a:solidFill>
@@ -4803,13 +4838,13 @@
       </p:sp>
       <p:sp>
         <p:nvSpPr>
-          <p:cNvPr id="21" name="Rectangle 20"/>
+          <p:cNvPr id="22" name="Rectangle 21"/>
           <p:cNvSpPr/>
           <p:nvPr/>
         </p:nvSpPr>
         <p:spPr>
           <a:xfrm>
-            <a:off x="3535591" y="3367277"/>
+            <a:off x="3657508" y="3710177"/>
             <a:ext cx="8290352" cy="699516"/>
           </a:xfrm>
           <a:prstGeom prst="rect">
@@ -4849,13 +4884,13 @@
       </p:sp>
       <p:sp>
         <p:nvSpPr>
-          <p:cNvPr id="22" name="TextBox 21"/>
-          <p:cNvSpPr txBox="1"/>
-          <p:nvPr/>
-        </p:nvSpPr>
-        <p:spPr>
-          <a:xfrm>
-            <a:off x="3535591" y="3394709"/>
+          <p:cNvPr id="23" name="TextBox 22"/>
+          <p:cNvSpPr txBox="1"/>
+          <p:nvPr/>
+        </p:nvSpPr>
+        <p:spPr>
+          <a:xfrm>
+            <a:off x="3657508" y="3737609"/>
             <a:ext cx="8290352" cy="644651"/>
           </a:xfrm>
           <a:prstGeom prst="rect">
@@ -4871,7 +4906,7 @@
           <a:p>
             <a:pPr algn="l"/>
             <a:r>
-              <a:rPr sz="750" b="0">
+              <a:rPr sz="800" b="0">
                 <a:solidFill>
                   <a:srgbClr val="1A1A1A"/>
                 </a:solidFill>
@@ -4884,7 +4919,7 @@
       </p:sp>
       <p:sp>
         <p:nvSpPr>
-          <p:cNvPr id="23" name="TextBox 22"/>
+          <p:cNvPr id="24" name="TextBox 23"/>
           <p:cNvSpPr txBox="1"/>
           <p:nvPr/>
         </p:nvSpPr>
@@ -4919,7 +4954,7 @@
       </p:sp>
       <p:sp>
         <p:nvSpPr>
-          <p:cNvPr id="24" name="TextBox 23"/>
+          <p:cNvPr id="25" name="TextBox 24"/>
           <p:cNvSpPr txBox="1"/>
           <p:nvPr/>
         </p:nvSpPr>
@@ -4978,42 +5013,77 @@
         </p:nvSpPr>
         <p:spPr>
           <a:xfrm>
-            <a:off x="365750" y="274320"/>
-            <a:ext cx="10972525" cy="480060"/>
-          </a:xfrm>
-          <a:prstGeom prst="rect">
-            <a:avLst/>
-          </a:prstGeom>
-          <a:noFill/>
-        </p:spPr>
-        <p:txBody>
-          <a:bodyPr wrap="square" lIns="36000" rIns="36000" tIns="18000" bIns="18000">
-            <a:spAutoFit/>
-          </a:bodyPr>
-          <a:lstStyle/>
-          <a:p>
-            <a:pPr algn="l"/>
-            <a:r>
-              <a:rPr sz="1700" b="1">
+            <a:off x="487667" y="137160"/>
+            <a:ext cx="7315017" cy="274320"/>
+          </a:xfrm>
+          <a:prstGeom prst="rect">
+            <a:avLst/>
+          </a:prstGeom>
+          <a:noFill/>
+        </p:spPr>
+        <p:txBody>
+          <a:bodyPr wrap="square" lIns="36000" rIns="36000" tIns="18000" bIns="18000">
+            <a:spAutoFit/>
+          </a:bodyPr>
+          <a:lstStyle/>
+          <a:p>
+            <a:pPr algn="l"/>
+            <a:r>
+              <a:rPr sz="900" b="0">
+                <a:solidFill>
+                  <a:srgbClr val="767676"/>
+                </a:solidFill>
+                <a:latin typeface="Pretendard"/>
+              </a:rPr>
+              <a:t>기초분석 시사점</a:t>
+            </a:r>
+          </a:p>
+        </p:txBody>
+      </p:sp>
+      <p:sp>
+        <p:nvSpPr>
+          <p:cNvPr id="3" name="TextBox 2"/>
+          <p:cNvSpPr txBox="1"/>
+          <p:nvPr/>
+        </p:nvSpPr>
+        <p:spPr>
+          <a:xfrm>
+            <a:off x="487667" y="548640"/>
+            <a:ext cx="11216359" cy="548640"/>
+          </a:xfrm>
+          <a:prstGeom prst="rect">
+            <a:avLst/>
+          </a:prstGeom>
+          <a:noFill/>
+        </p:spPr>
+        <p:txBody>
+          <a:bodyPr wrap="square" lIns="36000" rIns="36000" tIns="18000" bIns="18000">
+            <a:spAutoFit/>
+          </a:bodyPr>
+          <a:lstStyle/>
+          <a:p>
+            <a:pPr algn="l"/>
+            <a:r>
+              <a:rPr sz="2400" b="1">
                 <a:solidFill>
                   <a:srgbClr val="1A1A1A"/>
                 </a:solidFill>
                 <a:latin typeface="Pretendard"/>
               </a:rPr>
-              <a:t>2. 테마별 시사점 (affinity 군집)</a:t>
-            </a:r>
-          </a:p>
-        </p:txBody>
-      </p:sp>
-      <p:sp>
-        <p:nvSpPr>
-          <p:cNvPr id="3" name="Rectangle 2"/>
+              <a:t>테마별 시사점 (affinity 군집)</a:t>
+            </a:r>
+          </a:p>
+        </p:txBody>
+      </p:sp>
+      <p:sp>
+        <p:nvSpPr>
+          <p:cNvPr id="4" name="Rectangle 3"/>
           <p:cNvSpPr/>
           <p:nvPr/>
         </p:nvSpPr>
         <p:spPr>
           <a:xfrm>
-            <a:off x="365750" y="891540"/>
+            <a:off x="487667" y="1234440"/>
             <a:ext cx="3169840" cy="377190"/>
           </a:xfrm>
           <a:prstGeom prst="rect">
@@ -5053,13 +5123,13 @@
       </p:sp>
       <p:sp>
         <p:nvSpPr>
-          <p:cNvPr id="4" name="TextBox 3"/>
-          <p:cNvSpPr txBox="1"/>
-          <p:nvPr/>
-        </p:nvSpPr>
-        <p:spPr>
-          <a:xfrm>
-            <a:off x="365750" y="946404"/>
+          <p:cNvPr id="5" name="TextBox 4"/>
+          <p:cNvSpPr txBox="1"/>
+          <p:nvPr/>
+        </p:nvSpPr>
+        <p:spPr>
+          <a:xfrm>
+            <a:off x="487667" y="1289304"/>
             <a:ext cx="3169840" cy="301752"/>
           </a:xfrm>
           <a:prstGeom prst="rect">
@@ -5088,13 +5158,13 @@
       </p:sp>
       <p:sp>
         <p:nvSpPr>
-          <p:cNvPr id="5" name="Rectangle 4"/>
+          <p:cNvPr id="6" name="Rectangle 5"/>
           <p:cNvSpPr/>
           <p:nvPr/>
         </p:nvSpPr>
         <p:spPr>
           <a:xfrm>
-            <a:off x="3535591" y="891540"/>
+            <a:off x="3657508" y="1234440"/>
             <a:ext cx="8290352" cy="377190"/>
           </a:xfrm>
           <a:prstGeom prst="rect">
@@ -5134,13 +5204,13 @@
       </p:sp>
       <p:sp>
         <p:nvSpPr>
-          <p:cNvPr id="6" name="TextBox 5"/>
-          <p:cNvSpPr txBox="1"/>
-          <p:nvPr/>
-        </p:nvSpPr>
-        <p:spPr>
-          <a:xfrm>
-            <a:off x="3535591" y="946404"/>
+          <p:cNvPr id="7" name="TextBox 6"/>
+          <p:cNvSpPr txBox="1"/>
+          <p:nvPr/>
+        </p:nvSpPr>
+        <p:spPr>
+          <a:xfrm>
+            <a:off x="3657508" y="1289304"/>
             <a:ext cx="8290352" cy="301752"/>
           </a:xfrm>
           <a:prstGeom prst="rect">
@@ -5169,13 +5239,13 @@
       </p:sp>
       <p:sp>
         <p:nvSpPr>
-          <p:cNvPr id="7" name="Rectangle 6"/>
+          <p:cNvPr id="8" name="Rectangle 7"/>
           <p:cNvSpPr/>
           <p:nvPr/>
         </p:nvSpPr>
         <p:spPr>
           <a:xfrm>
-            <a:off x="365750" y="1268730"/>
+            <a:off x="487667" y="1611630"/>
             <a:ext cx="3169840" cy="534924"/>
           </a:xfrm>
           <a:prstGeom prst="rect">
@@ -5215,13 +5285,13 @@
       </p:sp>
       <p:sp>
         <p:nvSpPr>
-          <p:cNvPr id="8" name="TextBox 7"/>
-          <p:cNvSpPr txBox="1"/>
-          <p:nvPr/>
-        </p:nvSpPr>
-        <p:spPr>
-          <a:xfrm>
-            <a:off x="365750" y="1296161"/>
+          <p:cNvPr id="9" name="TextBox 8"/>
+          <p:cNvSpPr txBox="1"/>
+          <p:nvPr/>
+        </p:nvSpPr>
+        <p:spPr>
+          <a:xfrm>
+            <a:off x="487667" y="1639062"/>
             <a:ext cx="3169840" cy="480060"/>
           </a:xfrm>
           <a:prstGeom prst="rect">
@@ -5237,7 +5307,7 @@
           <a:p>
             <a:pPr algn="l"/>
             <a:r>
-              <a:rPr sz="750" b="0">
+              <a:rPr sz="800" b="0">
                 <a:solidFill>
                   <a:srgbClr val="1A1A1A"/>
                 </a:solidFill>
@@ -5250,13 +5320,13 @@
       </p:sp>
       <p:sp>
         <p:nvSpPr>
-          <p:cNvPr id="9" name="Rectangle 8"/>
+          <p:cNvPr id="10" name="Rectangle 9"/>
           <p:cNvSpPr/>
           <p:nvPr/>
         </p:nvSpPr>
         <p:spPr>
           <a:xfrm>
-            <a:off x="3535591" y="1268730"/>
+            <a:off x="3657508" y="1611630"/>
             <a:ext cx="8290352" cy="534924"/>
           </a:xfrm>
           <a:prstGeom prst="rect">
@@ -5296,13 +5366,13 @@
       </p:sp>
       <p:sp>
         <p:nvSpPr>
-          <p:cNvPr id="10" name="TextBox 9"/>
-          <p:cNvSpPr txBox="1"/>
-          <p:nvPr/>
-        </p:nvSpPr>
-        <p:spPr>
-          <a:xfrm>
-            <a:off x="3535591" y="1296161"/>
+          <p:cNvPr id="11" name="TextBox 10"/>
+          <p:cNvSpPr txBox="1"/>
+          <p:nvPr/>
+        </p:nvSpPr>
+        <p:spPr>
+          <a:xfrm>
+            <a:off x="3657508" y="1639062"/>
             <a:ext cx="8290352" cy="480060"/>
           </a:xfrm>
           <a:prstGeom prst="rect">
@@ -5318,7 +5388,7 @@
           <a:p>
             <a:pPr algn="l"/>
             <a:r>
-              <a:rPr sz="750" b="0">
+              <a:rPr sz="800" b="0">
                 <a:solidFill>
                   <a:srgbClr val="1A1A1A"/>
                 </a:solidFill>
@@ -5331,13 +5401,13 @@
       </p:sp>
       <p:sp>
         <p:nvSpPr>
-          <p:cNvPr id="11" name="Rectangle 10"/>
+          <p:cNvPr id="12" name="Rectangle 11"/>
           <p:cNvSpPr/>
           <p:nvPr/>
         </p:nvSpPr>
         <p:spPr>
           <a:xfrm>
-            <a:off x="365750" y="1803654"/>
+            <a:off x="487667" y="2146554"/>
             <a:ext cx="3169840" cy="534924"/>
           </a:xfrm>
           <a:prstGeom prst="rect">
@@ -5377,13 +5447,13 @@
       </p:sp>
       <p:sp>
         <p:nvSpPr>
-          <p:cNvPr id="12" name="TextBox 11"/>
-          <p:cNvSpPr txBox="1"/>
-          <p:nvPr/>
-        </p:nvSpPr>
-        <p:spPr>
-          <a:xfrm>
-            <a:off x="365750" y="1831086"/>
+          <p:cNvPr id="13" name="TextBox 12"/>
+          <p:cNvSpPr txBox="1"/>
+          <p:nvPr/>
+        </p:nvSpPr>
+        <p:spPr>
+          <a:xfrm>
+            <a:off x="487667" y="2173986"/>
             <a:ext cx="3169840" cy="480060"/>
           </a:xfrm>
           <a:prstGeom prst="rect">
@@ -5399,7 +5469,7 @@
           <a:p>
             <a:pPr algn="l"/>
             <a:r>
-              <a:rPr sz="750" b="0">
+              <a:rPr sz="800" b="0">
                 <a:solidFill>
                   <a:srgbClr val="1A1A1A"/>
                 </a:solidFill>
@@ -5412,13 +5482,13 @@
       </p:sp>
       <p:sp>
         <p:nvSpPr>
-          <p:cNvPr id="13" name="Rectangle 12"/>
+          <p:cNvPr id="14" name="Rectangle 13"/>
           <p:cNvSpPr/>
           <p:nvPr/>
         </p:nvSpPr>
         <p:spPr>
           <a:xfrm>
-            <a:off x="3535591" y="1803654"/>
+            <a:off x="3657508" y="2146554"/>
             <a:ext cx="8290352" cy="534924"/>
           </a:xfrm>
           <a:prstGeom prst="rect">
@@ -5458,13 +5528,13 @@
       </p:sp>
       <p:sp>
         <p:nvSpPr>
-          <p:cNvPr id="14" name="TextBox 13"/>
-          <p:cNvSpPr txBox="1"/>
-          <p:nvPr/>
-        </p:nvSpPr>
-        <p:spPr>
-          <a:xfrm>
-            <a:off x="3535591" y="1831086"/>
+          <p:cNvPr id="15" name="TextBox 14"/>
+          <p:cNvSpPr txBox="1"/>
+          <p:nvPr/>
+        </p:nvSpPr>
+        <p:spPr>
+          <a:xfrm>
+            <a:off x="3657508" y="2173986"/>
             <a:ext cx="8290352" cy="480060"/>
           </a:xfrm>
           <a:prstGeom prst="rect">
@@ -5480,7 +5550,7 @@
           <a:p>
             <a:pPr algn="l"/>
             <a:r>
-              <a:rPr sz="750" b="0">
+              <a:rPr sz="800" b="0">
                 <a:solidFill>
                   <a:srgbClr val="1A1A1A"/>
                 </a:solidFill>
@@ -5493,13 +5563,13 @@
       </p:sp>
       <p:sp>
         <p:nvSpPr>
-          <p:cNvPr id="15" name="Rectangle 14"/>
+          <p:cNvPr id="16" name="Rectangle 15"/>
           <p:cNvSpPr/>
           <p:nvPr/>
         </p:nvSpPr>
         <p:spPr>
           <a:xfrm>
-            <a:off x="365750" y="2338578"/>
+            <a:off x="487667" y="2681478"/>
             <a:ext cx="3169840" cy="534924"/>
           </a:xfrm>
           <a:prstGeom prst="rect">
@@ -5539,13 +5609,13 @@
       </p:sp>
       <p:sp>
         <p:nvSpPr>
-          <p:cNvPr id="16" name="TextBox 15"/>
-          <p:cNvSpPr txBox="1"/>
-          <p:nvPr/>
-        </p:nvSpPr>
-        <p:spPr>
-          <a:xfrm>
-            <a:off x="365750" y="2366010"/>
+          <p:cNvPr id="17" name="TextBox 16"/>
+          <p:cNvSpPr txBox="1"/>
+          <p:nvPr/>
+        </p:nvSpPr>
+        <p:spPr>
+          <a:xfrm>
+            <a:off x="487667" y="2708910"/>
             <a:ext cx="3169840" cy="480060"/>
           </a:xfrm>
           <a:prstGeom prst="rect">
@@ -5561,7 +5631,7 @@
           <a:p>
             <a:pPr algn="l"/>
             <a:r>
-              <a:rPr sz="750" b="0">
+              <a:rPr sz="800" b="0">
                 <a:solidFill>
                   <a:srgbClr val="1A1A1A"/>
                 </a:solidFill>
@@ -5574,13 +5644,13 @@
       </p:sp>
       <p:sp>
         <p:nvSpPr>
-          <p:cNvPr id="17" name="Rectangle 16"/>
+          <p:cNvPr id="18" name="Rectangle 17"/>
           <p:cNvSpPr/>
           <p:nvPr/>
         </p:nvSpPr>
         <p:spPr>
           <a:xfrm>
-            <a:off x="3535591" y="2338578"/>
+            <a:off x="3657508" y="2681478"/>
             <a:ext cx="8290352" cy="534924"/>
           </a:xfrm>
           <a:prstGeom prst="rect">
@@ -5620,13 +5690,13 @@
       </p:sp>
       <p:sp>
         <p:nvSpPr>
-          <p:cNvPr id="18" name="TextBox 17"/>
-          <p:cNvSpPr txBox="1"/>
-          <p:nvPr/>
-        </p:nvSpPr>
-        <p:spPr>
-          <a:xfrm>
-            <a:off x="3535591" y="2366010"/>
+          <p:cNvPr id="19" name="TextBox 18"/>
+          <p:cNvSpPr txBox="1"/>
+          <p:nvPr/>
+        </p:nvSpPr>
+        <p:spPr>
+          <a:xfrm>
+            <a:off x="3657508" y="2708910"/>
             <a:ext cx="8290352" cy="480060"/>
           </a:xfrm>
           <a:prstGeom prst="rect">
@@ -5642,7 +5712,7 @@
           <a:p>
             <a:pPr algn="l"/>
             <a:r>
-              <a:rPr sz="750" b="0">
+              <a:rPr sz="800" b="0">
                 <a:solidFill>
                   <a:srgbClr val="1A1A1A"/>
                 </a:solidFill>
@@ -5655,13 +5725,13 @@
       </p:sp>
       <p:sp>
         <p:nvSpPr>
-          <p:cNvPr id="19" name="Rectangle 18"/>
+          <p:cNvPr id="20" name="Rectangle 19"/>
           <p:cNvSpPr/>
           <p:nvPr/>
         </p:nvSpPr>
         <p:spPr>
           <a:xfrm>
-            <a:off x="365750" y="2873502"/>
+            <a:off x="487667" y="3216402"/>
             <a:ext cx="3169840" cy="534924"/>
           </a:xfrm>
           <a:prstGeom prst="rect">
@@ -5701,13 +5771,13 @@
       </p:sp>
       <p:sp>
         <p:nvSpPr>
-          <p:cNvPr id="20" name="TextBox 19"/>
-          <p:cNvSpPr txBox="1"/>
-          <p:nvPr/>
-        </p:nvSpPr>
-        <p:spPr>
-          <a:xfrm>
-            <a:off x="365750" y="2900934"/>
+          <p:cNvPr id="21" name="TextBox 20"/>
+          <p:cNvSpPr txBox="1"/>
+          <p:nvPr/>
+        </p:nvSpPr>
+        <p:spPr>
+          <a:xfrm>
+            <a:off x="487667" y="3243834"/>
             <a:ext cx="3169840" cy="480060"/>
           </a:xfrm>
           <a:prstGeom prst="rect">
@@ -5723,7 +5793,7 @@
           <a:p>
             <a:pPr algn="l"/>
             <a:r>
-              <a:rPr sz="750" b="0">
+              <a:rPr sz="800" b="0">
                 <a:solidFill>
                   <a:srgbClr val="1A1A1A"/>
                 </a:solidFill>
@@ -5736,13 +5806,13 @@
       </p:sp>
       <p:sp>
         <p:nvSpPr>
-          <p:cNvPr id="21" name="Rectangle 20"/>
+          <p:cNvPr id="22" name="Rectangle 21"/>
           <p:cNvSpPr/>
           <p:nvPr/>
         </p:nvSpPr>
         <p:spPr>
           <a:xfrm>
-            <a:off x="3535591" y="2873502"/>
+            <a:off x="3657508" y="3216402"/>
             <a:ext cx="8290352" cy="534924"/>
           </a:xfrm>
           <a:prstGeom prst="rect">
@@ -5782,13 +5852,13 @@
       </p:sp>
       <p:sp>
         <p:nvSpPr>
-          <p:cNvPr id="22" name="TextBox 21"/>
-          <p:cNvSpPr txBox="1"/>
-          <p:nvPr/>
-        </p:nvSpPr>
-        <p:spPr>
-          <a:xfrm>
-            <a:off x="3535591" y="2900934"/>
+          <p:cNvPr id="23" name="TextBox 22"/>
+          <p:cNvSpPr txBox="1"/>
+          <p:nvPr/>
+        </p:nvSpPr>
+        <p:spPr>
+          <a:xfrm>
+            <a:off x="3657508" y="3243834"/>
             <a:ext cx="8290352" cy="480060"/>
           </a:xfrm>
           <a:prstGeom prst="rect">
@@ -5804,7 +5874,7 @@
           <a:p>
             <a:pPr algn="l"/>
             <a:r>
-              <a:rPr sz="750" b="0">
+              <a:rPr sz="800" b="0">
                 <a:solidFill>
                   <a:srgbClr val="1A1A1A"/>
                 </a:solidFill>
@@ -5817,13 +5887,13 @@
       </p:sp>
       <p:sp>
         <p:nvSpPr>
-          <p:cNvPr id="23" name="Rectangle 22"/>
+          <p:cNvPr id="24" name="Rectangle 23"/>
           <p:cNvSpPr/>
           <p:nvPr/>
         </p:nvSpPr>
         <p:spPr>
           <a:xfrm>
-            <a:off x="365750" y="3408426"/>
+            <a:off x="487667" y="3751326"/>
             <a:ext cx="3169840" cy="411480"/>
           </a:xfrm>
           <a:prstGeom prst="rect">
@@ -5863,13 +5933,13 @@
       </p:sp>
       <p:sp>
         <p:nvSpPr>
-          <p:cNvPr id="24" name="TextBox 23"/>
-          <p:cNvSpPr txBox="1"/>
-          <p:nvPr/>
-        </p:nvSpPr>
-        <p:spPr>
-          <a:xfrm>
-            <a:off x="365750" y="3435857"/>
+          <p:cNvPr id="25" name="TextBox 24"/>
+          <p:cNvSpPr txBox="1"/>
+          <p:nvPr/>
+        </p:nvSpPr>
+        <p:spPr>
+          <a:xfrm>
+            <a:off x="487667" y="3778757"/>
             <a:ext cx="3169840" cy="356616"/>
           </a:xfrm>
           <a:prstGeom prst="rect">
@@ -5885,7 +5955,7 @@
           <a:p>
             <a:pPr algn="l"/>
             <a:r>
-              <a:rPr sz="750" b="0">
+              <a:rPr sz="800" b="0">
                 <a:solidFill>
                   <a:srgbClr val="1A1A1A"/>
                 </a:solidFill>
@@ -5898,13 +5968,13 @@
       </p:sp>
       <p:sp>
         <p:nvSpPr>
-          <p:cNvPr id="25" name="Rectangle 24"/>
+          <p:cNvPr id="26" name="Rectangle 25"/>
           <p:cNvSpPr/>
           <p:nvPr/>
         </p:nvSpPr>
         <p:spPr>
           <a:xfrm>
-            <a:off x="3535591" y="3408426"/>
+            <a:off x="3657508" y="3751326"/>
             <a:ext cx="8290352" cy="411480"/>
           </a:xfrm>
           <a:prstGeom prst="rect">
@@ -5944,13 +6014,13 @@
       </p:sp>
       <p:sp>
         <p:nvSpPr>
-          <p:cNvPr id="26" name="TextBox 25"/>
-          <p:cNvSpPr txBox="1"/>
-          <p:nvPr/>
-        </p:nvSpPr>
-        <p:spPr>
-          <a:xfrm>
-            <a:off x="3535591" y="3435857"/>
+          <p:cNvPr id="27" name="TextBox 26"/>
+          <p:cNvSpPr txBox="1"/>
+          <p:nvPr/>
+        </p:nvSpPr>
+        <p:spPr>
+          <a:xfrm>
+            <a:off x="3657508" y="3778757"/>
             <a:ext cx="8290352" cy="356616"/>
           </a:xfrm>
           <a:prstGeom prst="rect">
@@ -5966,7 +6036,7 @@
           <a:p>
             <a:pPr algn="l"/>
             <a:r>
-              <a:rPr sz="750" b="0">
+              <a:rPr sz="800" b="0">
                 <a:solidFill>
                   <a:srgbClr val="1A1A1A"/>
                 </a:solidFill>
@@ -5979,13 +6049,13 @@
       </p:sp>
       <p:sp>
         <p:nvSpPr>
-          <p:cNvPr id="27" name="Rectangle 26"/>
+          <p:cNvPr id="28" name="Rectangle 27"/>
           <p:cNvSpPr/>
           <p:nvPr/>
         </p:nvSpPr>
         <p:spPr>
           <a:xfrm>
-            <a:off x="365750" y="3819906"/>
+            <a:off x="487667" y="4162806"/>
             <a:ext cx="3169840" cy="699516"/>
           </a:xfrm>
           <a:prstGeom prst="rect">
@@ -6025,13 +6095,13 @@
       </p:sp>
       <p:sp>
         <p:nvSpPr>
-          <p:cNvPr id="28" name="TextBox 27"/>
-          <p:cNvSpPr txBox="1"/>
-          <p:nvPr/>
-        </p:nvSpPr>
-        <p:spPr>
-          <a:xfrm>
-            <a:off x="365750" y="3847337"/>
+          <p:cNvPr id="29" name="TextBox 28"/>
+          <p:cNvSpPr txBox="1"/>
+          <p:nvPr/>
+        </p:nvSpPr>
+        <p:spPr>
+          <a:xfrm>
+            <a:off x="487667" y="4190237"/>
             <a:ext cx="3169840" cy="644651"/>
           </a:xfrm>
           <a:prstGeom prst="rect">
@@ -6047,7 +6117,7 @@
           <a:p>
             <a:pPr algn="l"/>
             <a:r>
-              <a:rPr sz="750" b="0">
+              <a:rPr sz="800" b="0">
                 <a:solidFill>
                   <a:srgbClr val="1A1A1A"/>
                 </a:solidFill>
@@ -6060,13 +6130,13 @@
       </p:sp>
       <p:sp>
         <p:nvSpPr>
-          <p:cNvPr id="29" name="Rectangle 28"/>
+          <p:cNvPr id="30" name="Rectangle 29"/>
           <p:cNvSpPr/>
           <p:nvPr/>
         </p:nvSpPr>
         <p:spPr>
           <a:xfrm>
-            <a:off x="3535591" y="3819906"/>
+            <a:off x="3657508" y="4162806"/>
             <a:ext cx="8290352" cy="699516"/>
           </a:xfrm>
           <a:prstGeom prst="rect">
@@ -6106,13 +6176,13 @@
       </p:sp>
       <p:sp>
         <p:nvSpPr>
-          <p:cNvPr id="30" name="TextBox 29"/>
-          <p:cNvSpPr txBox="1"/>
-          <p:nvPr/>
-        </p:nvSpPr>
-        <p:spPr>
-          <a:xfrm>
-            <a:off x="3535591" y="3847337"/>
+          <p:cNvPr id="31" name="TextBox 30"/>
+          <p:cNvSpPr txBox="1"/>
+          <p:nvPr/>
+        </p:nvSpPr>
+        <p:spPr>
+          <a:xfrm>
+            <a:off x="3657508" y="4190237"/>
             <a:ext cx="8290352" cy="644651"/>
           </a:xfrm>
           <a:prstGeom prst="rect">
@@ -6128,7 +6198,7 @@
           <a:p>
             <a:pPr algn="l"/>
             <a:r>
-              <a:rPr sz="750" b="0">
+              <a:rPr sz="800" b="0">
                 <a:solidFill>
                   <a:srgbClr val="1A1A1A"/>
                 </a:solidFill>
@@ -6141,13 +6211,13 @@
       </p:sp>
       <p:sp>
         <p:nvSpPr>
-          <p:cNvPr id="31" name="Rectangle 30"/>
+          <p:cNvPr id="32" name="Rectangle 31"/>
           <p:cNvSpPr/>
           <p:nvPr/>
         </p:nvSpPr>
         <p:spPr>
           <a:xfrm>
-            <a:off x="365750" y="4519421"/>
+            <a:off x="487667" y="4862321"/>
             <a:ext cx="3169840" cy="534924"/>
           </a:xfrm>
           <a:prstGeom prst="rect">
@@ -6187,13 +6257,13 @@
       </p:sp>
       <p:sp>
         <p:nvSpPr>
-          <p:cNvPr id="32" name="TextBox 31"/>
-          <p:cNvSpPr txBox="1"/>
-          <p:nvPr/>
-        </p:nvSpPr>
-        <p:spPr>
-          <a:xfrm>
-            <a:off x="365750" y="4546854"/>
+          <p:cNvPr id="33" name="TextBox 32"/>
+          <p:cNvSpPr txBox="1"/>
+          <p:nvPr/>
+        </p:nvSpPr>
+        <p:spPr>
+          <a:xfrm>
+            <a:off x="487667" y="4889754"/>
             <a:ext cx="3169840" cy="480060"/>
           </a:xfrm>
           <a:prstGeom prst="rect">
@@ -6209,7 +6279,7 @@
           <a:p>
             <a:pPr algn="l"/>
             <a:r>
-              <a:rPr sz="750" b="0">
+              <a:rPr sz="800" b="0">
                 <a:solidFill>
                   <a:srgbClr val="1A1A1A"/>
                 </a:solidFill>
@@ -6222,13 +6292,13 @@
       </p:sp>
       <p:sp>
         <p:nvSpPr>
-          <p:cNvPr id="33" name="Rectangle 32"/>
+          <p:cNvPr id="34" name="Rectangle 33"/>
           <p:cNvSpPr/>
           <p:nvPr/>
         </p:nvSpPr>
         <p:spPr>
           <a:xfrm>
-            <a:off x="3535591" y="4519421"/>
+            <a:off x="3657508" y="4862321"/>
             <a:ext cx="8290352" cy="534924"/>
           </a:xfrm>
           <a:prstGeom prst="rect">
@@ -6268,13 +6338,13 @@
       </p:sp>
       <p:sp>
         <p:nvSpPr>
-          <p:cNvPr id="34" name="TextBox 33"/>
-          <p:cNvSpPr txBox="1"/>
-          <p:nvPr/>
-        </p:nvSpPr>
-        <p:spPr>
-          <a:xfrm>
-            <a:off x="3535591" y="4546854"/>
+          <p:cNvPr id="35" name="TextBox 34"/>
+          <p:cNvSpPr txBox="1"/>
+          <p:nvPr/>
+        </p:nvSpPr>
+        <p:spPr>
+          <a:xfrm>
+            <a:off x="3657508" y="4889754"/>
             <a:ext cx="8290352" cy="480060"/>
           </a:xfrm>
           <a:prstGeom prst="rect">
@@ -6290,7 +6360,7 @@
           <a:p>
             <a:pPr algn="l"/>
             <a:r>
-              <a:rPr sz="750" b="0">
+              <a:rPr sz="800" b="0">
                 <a:solidFill>
                   <a:srgbClr val="1A1A1A"/>
                 </a:solidFill>
@@ -6303,13 +6373,13 @@
       </p:sp>
       <p:sp>
         <p:nvSpPr>
-          <p:cNvPr id="35" name="Rectangle 34"/>
+          <p:cNvPr id="36" name="Rectangle 35"/>
           <p:cNvSpPr/>
           <p:nvPr/>
         </p:nvSpPr>
         <p:spPr>
           <a:xfrm>
-            <a:off x="365750" y="5054345"/>
+            <a:off x="487667" y="5397245"/>
             <a:ext cx="3169840" cy="411480"/>
           </a:xfrm>
           <a:prstGeom prst="rect">
@@ -6349,13 +6419,13 @@
       </p:sp>
       <p:sp>
         <p:nvSpPr>
-          <p:cNvPr id="36" name="TextBox 35"/>
-          <p:cNvSpPr txBox="1"/>
-          <p:nvPr/>
-        </p:nvSpPr>
-        <p:spPr>
-          <a:xfrm>
-            <a:off x="365750" y="5081777"/>
+          <p:cNvPr id="37" name="TextBox 36"/>
+          <p:cNvSpPr txBox="1"/>
+          <p:nvPr/>
+        </p:nvSpPr>
+        <p:spPr>
+          <a:xfrm>
+            <a:off x="487667" y="5424678"/>
             <a:ext cx="3169840" cy="356616"/>
           </a:xfrm>
           <a:prstGeom prst="rect">
@@ -6371,7 +6441,7 @@
           <a:p>
             <a:pPr algn="l"/>
             <a:r>
-              <a:rPr sz="750" b="0">
+              <a:rPr sz="800" b="0">
                 <a:solidFill>
                   <a:srgbClr val="1A1A1A"/>
                 </a:solidFill>
@@ -6384,13 +6454,13 @@
       </p:sp>
       <p:sp>
         <p:nvSpPr>
-          <p:cNvPr id="37" name="Rectangle 36"/>
+          <p:cNvPr id="38" name="Rectangle 37"/>
           <p:cNvSpPr/>
           <p:nvPr/>
         </p:nvSpPr>
         <p:spPr>
           <a:xfrm>
-            <a:off x="3535591" y="5054345"/>
+            <a:off x="3657508" y="5397245"/>
             <a:ext cx="8290352" cy="411480"/>
           </a:xfrm>
           <a:prstGeom prst="rect">
@@ -6430,13 +6500,13 @@
       </p:sp>
       <p:sp>
         <p:nvSpPr>
-          <p:cNvPr id="38" name="TextBox 37"/>
-          <p:cNvSpPr txBox="1"/>
-          <p:nvPr/>
-        </p:nvSpPr>
-        <p:spPr>
-          <a:xfrm>
-            <a:off x="3535591" y="5081777"/>
+          <p:cNvPr id="39" name="TextBox 38"/>
+          <p:cNvSpPr txBox="1"/>
+          <p:nvPr/>
+        </p:nvSpPr>
+        <p:spPr>
+          <a:xfrm>
+            <a:off x="3657508" y="5424678"/>
             <a:ext cx="8290352" cy="356616"/>
           </a:xfrm>
           <a:prstGeom prst="rect">
@@ -6452,7 +6522,7 @@
           <a:p>
             <a:pPr algn="l"/>
             <a:r>
-              <a:rPr sz="750" b="0">
+              <a:rPr sz="800" b="0">
                 <a:solidFill>
                   <a:srgbClr val="1A1A1A"/>
                 </a:solidFill>
@@ -6465,176 +6535,14 @@
       </p:sp>
       <p:sp>
         <p:nvSpPr>
-          <p:cNvPr id="39" name="Rectangle 38"/>
-          <p:cNvSpPr/>
-          <p:nvPr/>
-        </p:nvSpPr>
-        <p:spPr>
-          <a:xfrm>
-            <a:off x="365750" y="5465825"/>
-            <a:ext cx="3169840" cy="534924"/>
-          </a:xfrm>
-          <a:prstGeom prst="rect">
-            <a:avLst/>
-          </a:prstGeom>
-          <a:solidFill>
-            <a:srgbClr val="FFFFFF"/>
-          </a:solidFill>
-          <a:ln w="9525">
-            <a:solidFill>
-              <a:srgbClr val="D8D8D8"/>
-            </a:solidFill>
-          </a:ln>
-          <a:effectLst/>
-        </p:spPr>
-        <p:style>
-          <a:lnRef idx="1">
-            <a:schemeClr val="accent1"/>
-          </a:lnRef>
-          <a:fillRef idx="3">
-            <a:schemeClr val="accent1"/>
-          </a:fillRef>
-          <a:effectRef idx="2">
-            <a:schemeClr val="accent1"/>
-          </a:effectRef>
-          <a:fontRef idx="minor">
-            <a:schemeClr val="lt1"/>
-          </a:fontRef>
-        </p:style>
-        <p:txBody>
-          <a:bodyPr rtlCol="0" anchor="ctr"/>
-          <a:lstStyle/>
-          <a:p>
-            <a:pPr algn="ctr"/>
-          </a:p>
-        </p:txBody>
-      </p:sp>
-      <p:sp>
-        <p:nvSpPr>
           <p:cNvPr id="40" name="TextBox 39"/>
           <p:cNvSpPr txBox="1"/>
           <p:nvPr/>
         </p:nvSpPr>
         <p:spPr>
           <a:xfrm>
-            <a:off x="365750" y="5493258"/>
-            <a:ext cx="3169840" cy="480060"/>
-          </a:xfrm>
-          <a:prstGeom prst="rect">
-            <a:avLst/>
-          </a:prstGeom>
-          <a:noFill/>
-        </p:spPr>
-        <p:txBody>
-          <a:bodyPr wrap="square" lIns="36000" rIns="36000" tIns="18000" bIns="18000">
-            <a:spAutoFit/>
-          </a:bodyPr>
-          <a:lstStyle/>
-          <a:p>
-            <a:pPr algn="l"/>
-            <a:r>
-              <a:rPr sz="750" b="0">
-                <a:solidFill>
-                  <a:srgbClr val="1A1A1A"/>
-                </a:solidFill>
-                <a:latin typeface="Pretendard"/>
-              </a:rPr>
-              <a:t>122(현시스템기초분석) §1</a:t>
-            </a:r>
-          </a:p>
-        </p:txBody>
-      </p:sp>
-      <p:sp>
-        <p:nvSpPr>
-          <p:cNvPr id="41" name="Rectangle 40"/>
-          <p:cNvSpPr/>
-          <p:nvPr/>
-        </p:nvSpPr>
-        <p:spPr>
-          <a:xfrm>
-            <a:off x="3535591" y="5465825"/>
-            <a:ext cx="8290352" cy="534924"/>
-          </a:xfrm>
-          <a:prstGeom prst="rect">
-            <a:avLst/>
-          </a:prstGeom>
-          <a:solidFill>
-            <a:srgbClr val="FFFFFF"/>
-          </a:solidFill>
-          <a:ln w="9525">
-            <a:solidFill>
-              <a:srgbClr val="D8D8D8"/>
-            </a:solidFill>
-          </a:ln>
-          <a:effectLst/>
-        </p:spPr>
-        <p:style>
-          <a:lnRef idx="1">
-            <a:schemeClr val="accent1"/>
-          </a:lnRef>
-          <a:fillRef idx="3">
-            <a:schemeClr val="accent1"/>
-          </a:fillRef>
-          <a:effectRef idx="2">
-            <a:schemeClr val="accent1"/>
-          </a:effectRef>
-          <a:fontRef idx="minor">
-            <a:schemeClr val="lt1"/>
-          </a:fontRef>
-        </p:style>
-        <p:txBody>
-          <a:bodyPr rtlCol="0" anchor="ctr"/>
-          <a:lstStyle/>
-          <a:p>
-            <a:pPr algn="ctr"/>
-          </a:p>
-        </p:txBody>
-      </p:sp>
-      <p:sp>
-        <p:nvSpPr>
-          <p:cNvPr id="42" name="TextBox 41"/>
-          <p:cNvSpPr txBox="1"/>
-          <p:nvPr/>
-        </p:nvSpPr>
-        <p:spPr>
-          <a:xfrm>
-            <a:off x="3535591" y="5493258"/>
-            <a:ext cx="8290352" cy="480060"/>
-          </a:xfrm>
-          <a:prstGeom prst="rect">
-            <a:avLst/>
-          </a:prstGeom>
-          <a:noFill/>
-        </p:spPr>
-        <p:txBody>
-          <a:bodyPr wrap="square" lIns="36000" rIns="36000" tIns="18000" bIns="18000">
-            <a:spAutoFit/>
-          </a:bodyPr>
-          <a:lstStyle/>
-          <a:p>
-            <a:pPr algn="l"/>
-            <a:r>
-              <a:rPr sz="750" b="0">
-                <a:solidFill>
-                  <a:srgbClr val="1A1A1A"/>
-                </a:solidFill>
-                <a:latin typeface="Pretendard"/>
-              </a:rPr>
-              <a:t>명세 행 1,344(설계프로토타입검증) / 고유 화면 1,003 / 본화면 574 — 최대 2.34배 차이</a:t>
-            </a:r>
-          </a:p>
-        </p:txBody>
-      </p:sp>
-      <p:sp>
-        <p:nvSpPr>
-          <p:cNvPr id="43" name="TextBox 42"/>
-          <p:cNvSpPr txBox="1"/>
-          <p:nvPr/>
-        </p:nvSpPr>
-        <p:spPr>
-          <a:xfrm>
-            <a:off x="365750" y="6069329"/>
-            <a:ext cx="10972525" cy="274320"/>
+            <a:off x="487667" y="5877305"/>
+            <a:ext cx="11216359" cy="274320"/>
           </a:xfrm>
           <a:prstGeom prst="rect">
             <a:avLst/>
@@ -6655,14 +6563,14 @@
                 </a:solidFill>
                 <a:latin typeface="Pretendard"/>
               </a:rPr>
-              <a:t>※ 이하 24행은 원장·문서 참조</a:t>
-            </a:r>
-          </a:p>
-        </p:txBody>
-      </p:sp>
-      <p:sp>
-        <p:nvSpPr>
-          <p:cNvPr id="44" name="TextBox 43"/>
+              <a:t>※ 이하 25행은 원장·문서 참조</a:t>
+            </a:r>
+          </a:p>
+        </p:txBody>
+      </p:sp>
+      <p:sp>
+        <p:nvSpPr>
+          <p:cNvPr id="41" name="TextBox 40"/>
           <p:cNvSpPr txBox="1"/>
           <p:nvPr/>
         </p:nvSpPr>
@@ -6697,7 +6605,7 @@
       </p:sp>
       <p:sp>
         <p:nvSpPr>
-          <p:cNvPr id="45" name="TextBox 44"/>
+          <p:cNvPr id="42" name="TextBox 41"/>
           <p:cNvSpPr txBox="1"/>
           <p:nvPr/>
         </p:nvSpPr>
@@ -6756,42 +6664,77 @@
         </p:nvSpPr>
         <p:spPr>
           <a:xfrm>
-            <a:off x="365750" y="274320"/>
-            <a:ext cx="10972525" cy="480060"/>
-          </a:xfrm>
-          <a:prstGeom prst="rect">
-            <a:avLst/>
-          </a:prstGeom>
-          <a:noFill/>
-        </p:spPr>
-        <p:txBody>
-          <a:bodyPr wrap="square" lIns="36000" rIns="36000" tIns="18000" bIns="18000">
-            <a:spAutoFit/>
-          </a:bodyPr>
-          <a:lstStyle/>
-          <a:p>
-            <a:pPr algn="l"/>
-            <a:r>
-              <a:rPr sz="1700" b="1">
+            <a:off x="487667" y="137160"/>
+            <a:ext cx="7315017" cy="274320"/>
+          </a:xfrm>
+          <a:prstGeom prst="rect">
+            <a:avLst/>
+          </a:prstGeom>
+          <a:noFill/>
+        </p:spPr>
+        <p:txBody>
+          <a:bodyPr wrap="square" lIns="36000" rIns="36000" tIns="18000" bIns="18000">
+            <a:spAutoFit/>
+          </a:bodyPr>
+          <a:lstStyle/>
+          <a:p>
+            <a:pPr algn="l"/>
+            <a:r>
+              <a:rPr sz="900" b="0">
+                <a:solidFill>
+                  <a:srgbClr val="767676"/>
+                </a:solidFill>
+                <a:latin typeface="Pretendard"/>
+              </a:rPr>
+              <a:t>기초분석 시사점</a:t>
+            </a:r>
+          </a:p>
+        </p:txBody>
+      </p:sp>
+      <p:sp>
+        <p:nvSpPr>
+          <p:cNvPr id="3" name="TextBox 2"/>
+          <p:cNvSpPr txBox="1"/>
+          <p:nvPr/>
+        </p:nvSpPr>
+        <p:spPr>
+          <a:xfrm>
+            <a:off x="487667" y="548640"/>
+            <a:ext cx="11216359" cy="548640"/>
+          </a:xfrm>
+          <a:prstGeom prst="rect">
+            <a:avLst/>
+          </a:prstGeom>
+          <a:noFill/>
+        </p:spPr>
+        <p:txBody>
+          <a:bodyPr wrap="square" lIns="36000" rIns="36000" tIns="18000" bIns="18000">
+            <a:spAutoFit/>
+          </a:bodyPr>
+          <a:lstStyle/>
+          <a:p>
+            <a:pPr algn="l"/>
+            <a:r>
+              <a:rPr sz="2400" b="1">
                 <a:solidFill>
                   <a:srgbClr val="1A1A1A"/>
                 </a:solidFill>
                 <a:latin typeface="Pretendard"/>
               </a:rPr>
-              <a:t>3. 핵심 이슈 목록</a:t>
-            </a:r>
-          </a:p>
-        </p:txBody>
-      </p:sp>
-      <p:sp>
-        <p:nvSpPr>
-          <p:cNvPr id="3" name="Rectangle 2"/>
+              <a:t>핵심 이슈 목록</a:t>
+            </a:r>
+          </a:p>
+        </p:txBody>
+      </p:sp>
+      <p:sp>
+        <p:nvSpPr>
+          <p:cNvPr id="4" name="Rectangle 3"/>
           <p:cNvSpPr/>
           <p:nvPr/>
         </p:nvSpPr>
         <p:spPr>
           <a:xfrm>
-            <a:off x="365750" y="891540"/>
+            <a:off x="487667" y="1234440"/>
             <a:ext cx="2194505" cy="377190"/>
           </a:xfrm>
           <a:prstGeom prst="rect">
@@ -6831,13 +6774,13 @@
       </p:sp>
       <p:sp>
         <p:nvSpPr>
-          <p:cNvPr id="4" name="TextBox 3"/>
-          <p:cNvSpPr txBox="1"/>
-          <p:nvPr/>
-        </p:nvSpPr>
-        <p:spPr>
-          <a:xfrm>
-            <a:off x="365750" y="946404"/>
+          <p:cNvPr id="5" name="TextBox 4"/>
+          <p:cNvSpPr txBox="1"/>
+          <p:nvPr/>
+        </p:nvSpPr>
+        <p:spPr>
+          <a:xfrm>
+            <a:off x="487667" y="1289304"/>
             <a:ext cx="2194505" cy="301752"/>
           </a:xfrm>
           <a:prstGeom prst="rect">
@@ -6866,13 +6809,13 @@
       </p:sp>
       <p:sp>
         <p:nvSpPr>
-          <p:cNvPr id="5" name="Rectangle 4"/>
+          <p:cNvPr id="6" name="Rectangle 5"/>
           <p:cNvSpPr/>
           <p:nvPr/>
         </p:nvSpPr>
         <p:spPr>
           <a:xfrm>
-            <a:off x="2560255" y="891540"/>
+            <a:off x="2682172" y="1234440"/>
             <a:ext cx="2316422" cy="377190"/>
           </a:xfrm>
           <a:prstGeom prst="rect">
@@ -6912,13 +6855,13 @@
       </p:sp>
       <p:sp>
         <p:nvSpPr>
-          <p:cNvPr id="6" name="TextBox 5"/>
-          <p:cNvSpPr txBox="1"/>
-          <p:nvPr/>
-        </p:nvSpPr>
-        <p:spPr>
-          <a:xfrm>
-            <a:off x="2560255" y="946404"/>
+          <p:cNvPr id="7" name="TextBox 6"/>
+          <p:cNvSpPr txBox="1"/>
+          <p:nvPr/>
+        </p:nvSpPr>
+        <p:spPr>
+          <a:xfrm>
+            <a:off x="2682172" y="1289304"/>
             <a:ext cx="2316422" cy="301752"/>
           </a:xfrm>
           <a:prstGeom prst="rect">
@@ -6947,13 +6890,13 @@
       </p:sp>
       <p:sp>
         <p:nvSpPr>
-          <p:cNvPr id="7" name="Rectangle 6"/>
+          <p:cNvPr id="8" name="Rectangle 7"/>
           <p:cNvSpPr/>
           <p:nvPr/>
         </p:nvSpPr>
         <p:spPr>
           <a:xfrm>
-            <a:off x="4876678" y="891540"/>
+            <a:off x="4998594" y="1234440"/>
             <a:ext cx="2316422" cy="377190"/>
           </a:xfrm>
           <a:prstGeom prst="rect">
@@ -6993,13 +6936,13 @@
       </p:sp>
       <p:sp>
         <p:nvSpPr>
-          <p:cNvPr id="8" name="TextBox 7"/>
-          <p:cNvSpPr txBox="1"/>
-          <p:nvPr/>
-        </p:nvSpPr>
-        <p:spPr>
-          <a:xfrm>
-            <a:off x="4876678" y="946404"/>
+          <p:cNvPr id="9" name="TextBox 8"/>
+          <p:cNvSpPr txBox="1"/>
+          <p:nvPr/>
+        </p:nvSpPr>
+        <p:spPr>
+          <a:xfrm>
+            <a:off x="4998594" y="1289304"/>
             <a:ext cx="2316422" cy="301752"/>
           </a:xfrm>
           <a:prstGeom prst="rect">
@@ -7028,13 +6971,13 @@
       </p:sp>
       <p:sp>
         <p:nvSpPr>
-          <p:cNvPr id="9" name="Rectangle 8"/>
+          <p:cNvPr id="10" name="Rectangle 9"/>
           <p:cNvSpPr/>
           <p:nvPr/>
         </p:nvSpPr>
         <p:spPr>
           <a:xfrm>
-            <a:off x="7193100" y="891540"/>
+            <a:off x="7315017" y="1234440"/>
             <a:ext cx="2316422" cy="377190"/>
           </a:xfrm>
           <a:prstGeom prst="rect">
@@ -7074,13 +7017,13 @@
       </p:sp>
       <p:sp>
         <p:nvSpPr>
-          <p:cNvPr id="10" name="TextBox 9"/>
-          <p:cNvSpPr txBox="1"/>
-          <p:nvPr/>
-        </p:nvSpPr>
-        <p:spPr>
-          <a:xfrm>
-            <a:off x="7193100" y="946404"/>
+          <p:cNvPr id="11" name="TextBox 10"/>
+          <p:cNvSpPr txBox="1"/>
+          <p:nvPr/>
+        </p:nvSpPr>
+        <p:spPr>
+          <a:xfrm>
+            <a:off x="7315017" y="1289304"/>
             <a:ext cx="2316422" cy="301752"/>
           </a:xfrm>
           <a:prstGeom prst="rect">
@@ -7109,13 +7052,13 @@
       </p:sp>
       <p:sp>
         <p:nvSpPr>
-          <p:cNvPr id="11" name="Rectangle 10"/>
+          <p:cNvPr id="12" name="Rectangle 11"/>
           <p:cNvSpPr/>
           <p:nvPr/>
         </p:nvSpPr>
         <p:spPr>
           <a:xfrm>
-            <a:off x="9509522" y="891540"/>
+            <a:off x="9631439" y="1234440"/>
             <a:ext cx="2316422" cy="377190"/>
           </a:xfrm>
           <a:prstGeom prst="rect">
@@ -7155,13 +7098,13 @@
       </p:sp>
       <p:sp>
         <p:nvSpPr>
-          <p:cNvPr id="12" name="TextBox 11"/>
-          <p:cNvSpPr txBox="1"/>
-          <p:nvPr/>
-        </p:nvSpPr>
-        <p:spPr>
-          <a:xfrm>
-            <a:off x="9509522" y="946404"/>
+          <p:cNvPr id="13" name="TextBox 12"/>
+          <p:cNvSpPr txBox="1"/>
+          <p:nvPr/>
+        </p:nvSpPr>
+        <p:spPr>
+          <a:xfrm>
+            <a:off x="9631439" y="1289304"/>
             <a:ext cx="2316422" cy="301752"/>
           </a:xfrm>
           <a:prstGeom prst="rect">
@@ -7190,13 +7133,13 @@
       </p:sp>
       <p:sp>
         <p:nvSpPr>
-          <p:cNvPr id="13" name="Rectangle 12"/>
+          <p:cNvPr id="14" name="Rectangle 13"/>
           <p:cNvSpPr/>
           <p:nvPr/>
         </p:nvSpPr>
         <p:spPr>
           <a:xfrm>
-            <a:off x="365750" y="1268730"/>
+            <a:off x="487667" y="1611630"/>
             <a:ext cx="2194505" cy="411480"/>
           </a:xfrm>
           <a:prstGeom prst="rect">
@@ -7236,13 +7179,13 @@
       </p:sp>
       <p:sp>
         <p:nvSpPr>
-          <p:cNvPr id="14" name="TextBox 13"/>
-          <p:cNvSpPr txBox="1"/>
-          <p:nvPr/>
-        </p:nvSpPr>
-        <p:spPr>
-          <a:xfrm>
-            <a:off x="365750" y="1296161"/>
+          <p:cNvPr id="15" name="TextBox 14"/>
+          <p:cNvSpPr txBox="1"/>
+          <p:nvPr/>
+        </p:nvSpPr>
+        <p:spPr>
+          <a:xfrm>
+            <a:off x="487667" y="1639062"/>
             <a:ext cx="2194505" cy="356616"/>
           </a:xfrm>
           <a:prstGeom prst="rect">
@@ -7258,7 +7201,7 @@
           <a:p>
             <a:pPr algn="l"/>
             <a:r>
-              <a:rPr sz="750" b="0">
+              <a:rPr sz="800" b="0">
                 <a:solidFill>
                   <a:srgbClr val="1A1A1A"/>
                 </a:solidFill>
@@ -7271,13 +7214,13 @@
       </p:sp>
       <p:sp>
         <p:nvSpPr>
-          <p:cNvPr id="15" name="Rectangle 14"/>
+          <p:cNvPr id="16" name="Rectangle 15"/>
           <p:cNvSpPr/>
           <p:nvPr/>
         </p:nvSpPr>
         <p:spPr>
           <a:xfrm>
-            <a:off x="2560255" y="1268730"/>
+            <a:off x="2682172" y="1611630"/>
             <a:ext cx="2316422" cy="411480"/>
           </a:xfrm>
           <a:prstGeom prst="rect">
@@ -7317,13 +7260,13 @@
       </p:sp>
       <p:sp>
         <p:nvSpPr>
-          <p:cNvPr id="16" name="TextBox 15"/>
-          <p:cNvSpPr txBox="1"/>
-          <p:nvPr/>
-        </p:nvSpPr>
-        <p:spPr>
-          <a:xfrm>
-            <a:off x="2560255" y="1296161"/>
+          <p:cNvPr id="17" name="TextBox 16"/>
+          <p:cNvSpPr txBox="1"/>
+          <p:nvPr/>
+        </p:nvSpPr>
+        <p:spPr>
+          <a:xfrm>
+            <a:off x="2682172" y="1639062"/>
             <a:ext cx="2316422" cy="356616"/>
           </a:xfrm>
           <a:prstGeom prst="rect">
@@ -7339,7 +7282,7 @@
           <a:p>
             <a:pPr algn="l"/>
             <a:r>
-              <a:rPr sz="750" b="0">
+              <a:rPr sz="800" b="0">
                 <a:solidFill>
                   <a:srgbClr val="1A1A1A"/>
                 </a:solidFill>
@@ -7352,13 +7295,13 @@
       </p:sp>
       <p:sp>
         <p:nvSpPr>
-          <p:cNvPr id="17" name="Rectangle 16"/>
+          <p:cNvPr id="18" name="Rectangle 17"/>
           <p:cNvSpPr/>
           <p:nvPr/>
         </p:nvSpPr>
         <p:spPr>
           <a:xfrm>
-            <a:off x="4876678" y="1268730"/>
+            <a:off x="4998594" y="1611630"/>
             <a:ext cx="2316422" cy="411480"/>
           </a:xfrm>
           <a:prstGeom prst="rect">
@@ -7398,13 +7341,13 @@
       </p:sp>
       <p:sp>
         <p:nvSpPr>
-          <p:cNvPr id="18" name="TextBox 17"/>
-          <p:cNvSpPr txBox="1"/>
-          <p:nvPr/>
-        </p:nvSpPr>
-        <p:spPr>
-          <a:xfrm>
-            <a:off x="4876678" y="1296161"/>
+          <p:cNvPr id="19" name="TextBox 18"/>
+          <p:cNvSpPr txBox="1"/>
+          <p:nvPr/>
+        </p:nvSpPr>
+        <p:spPr>
+          <a:xfrm>
+            <a:off x="4998594" y="1639062"/>
             <a:ext cx="2316422" cy="356616"/>
           </a:xfrm>
           <a:prstGeom prst="rect">
@@ -7420,7 +7363,7 @@
           <a:p>
             <a:pPr algn="l"/>
             <a:r>
-              <a:rPr sz="750" b="0">
+              <a:rPr sz="800" b="0">
                 <a:solidFill>
                   <a:srgbClr val="1A1A1A"/>
                 </a:solidFill>
@@ -7433,13 +7376,13 @@
       </p:sp>
       <p:sp>
         <p:nvSpPr>
-          <p:cNvPr id="19" name="Rectangle 18"/>
+          <p:cNvPr id="20" name="Rectangle 19"/>
           <p:cNvSpPr/>
           <p:nvPr/>
         </p:nvSpPr>
         <p:spPr>
           <a:xfrm>
-            <a:off x="7193100" y="1268730"/>
+            <a:off x="7315017" y="1611630"/>
             <a:ext cx="2316422" cy="411480"/>
           </a:xfrm>
           <a:prstGeom prst="rect">
@@ -7479,13 +7422,13 @@
       </p:sp>
       <p:sp>
         <p:nvSpPr>
-          <p:cNvPr id="20" name="TextBox 19"/>
-          <p:cNvSpPr txBox="1"/>
-          <p:nvPr/>
-        </p:nvSpPr>
-        <p:spPr>
-          <a:xfrm>
-            <a:off x="7193100" y="1296161"/>
+          <p:cNvPr id="21" name="TextBox 20"/>
+          <p:cNvSpPr txBox="1"/>
+          <p:nvPr/>
+        </p:nvSpPr>
+        <p:spPr>
+          <a:xfrm>
+            <a:off x="7315017" y="1639062"/>
             <a:ext cx="2316422" cy="356616"/>
           </a:xfrm>
           <a:prstGeom prst="rect">
@@ -7501,7 +7444,7 @@
           <a:p>
             <a:pPr algn="l"/>
             <a:r>
-              <a:rPr sz="750" b="0">
+              <a:rPr sz="800" b="0">
                 <a:solidFill>
                   <a:srgbClr val="1A1A1A"/>
                 </a:solidFill>
@@ -7514,13 +7457,13 @@
       </p:sp>
       <p:sp>
         <p:nvSpPr>
-          <p:cNvPr id="21" name="Rectangle 20"/>
+          <p:cNvPr id="22" name="Rectangle 21"/>
           <p:cNvSpPr/>
           <p:nvPr/>
         </p:nvSpPr>
         <p:spPr>
           <a:xfrm>
-            <a:off x="9509522" y="1268730"/>
+            <a:off x="9631439" y="1611630"/>
             <a:ext cx="2316422" cy="411480"/>
           </a:xfrm>
           <a:prstGeom prst="rect">
@@ -7560,13 +7503,13 @@
       </p:sp>
       <p:sp>
         <p:nvSpPr>
-          <p:cNvPr id="22" name="TextBox 21"/>
-          <p:cNvSpPr txBox="1"/>
-          <p:nvPr/>
-        </p:nvSpPr>
-        <p:spPr>
-          <a:xfrm>
-            <a:off x="9509522" y="1296161"/>
+          <p:cNvPr id="23" name="TextBox 22"/>
+          <p:cNvSpPr txBox="1"/>
+          <p:nvPr/>
+        </p:nvSpPr>
+        <p:spPr>
+          <a:xfrm>
+            <a:off x="9631439" y="1639062"/>
             <a:ext cx="2316422" cy="356616"/>
           </a:xfrm>
           <a:prstGeom prst="rect">
@@ -7582,7 +7525,7 @@
           <a:p>
             <a:pPr algn="l"/>
             <a:r>
-              <a:rPr sz="750" b="0">
+              <a:rPr sz="800" b="0">
                 <a:solidFill>
                   <a:srgbClr val="1A1A1A"/>
                 </a:solidFill>
@@ -7595,13 +7538,13 @@
       </p:sp>
       <p:sp>
         <p:nvSpPr>
-          <p:cNvPr id="23" name="Rectangle 22"/>
+          <p:cNvPr id="24" name="Rectangle 23"/>
           <p:cNvSpPr/>
           <p:nvPr/>
         </p:nvSpPr>
         <p:spPr>
           <a:xfrm>
-            <a:off x="365750" y="1680210"/>
+            <a:off x="487667" y="2023110"/>
             <a:ext cx="2194505" cy="411480"/>
           </a:xfrm>
           <a:prstGeom prst="rect">
@@ -7641,13 +7584,13 @@
       </p:sp>
       <p:sp>
         <p:nvSpPr>
-          <p:cNvPr id="24" name="TextBox 23"/>
-          <p:cNvSpPr txBox="1"/>
-          <p:nvPr/>
-        </p:nvSpPr>
-        <p:spPr>
-          <a:xfrm>
-            <a:off x="365750" y="1707642"/>
+          <p:cNvPr id="25" name="TextBox 24"/>
+          <p:cNvSpPr txBox="1"/>
+          <p:nvPr/>
+        </p:nvSpPr>
+        <p:spPr>
+          <a:xfrm>
+            <a:off x="487667" y="2050542"/>
             <a:ext cx="2194505" cy="356616"/>
           </a:xfrm>
           <a:prstGeom prst="rect">
@@ -7663,7 +7606,7 @@
           <a:p>
             <a:pPr algn="l"/>
             <a:r>
-              <a:rPr sz="750" b="0">
+              <a:rPr sz="800" b="0">
                 <a:solidFill>
                   <a:srgbClr val="1A1A1A"/>
                 </a:solidFill>
@@ -7676,13 +7619,13 @@
       </p:sp>
       <p:sp>
         <p:nvSpPr>
-          <p:cNvPr id="25" name="Rectangle 24"/>
+          <p:cNvPr id="26" name="Rectangle 25"/>
           <p:cNvSpPr/>
           <p:nvPr/>
         </p:nvSpPr>
         <p:spPr>
           <a:xfrm>
-            <a:off x="2560255" y="1680210"/>
+            <a:off x="2682172" y="2023110"/>
             <a:ext cx="2316422" cy="411480"/>
           </a:xfrm>
           <a:prstGeom prst="rect">
@@ -7722,13 +7665,13 @@
       </p:sp>
       <p:sp>
         <p:nvSpPr>
-          <p:cNvPr id="26" name="TextBox 25"/>
-          <p:cNvSpPr txBox="1"/>
-          <p:nvPr/>
-        </p:nvSpPr>
-        <p:spPr>
-          <a:xfrm>
-            <a:off x="2560255" y="1707642"/>
+          <p:cNvPr id="27" name="TextBox 26"/>
+          <p:cNvSpPr txBox="1"/>
+          <p:nvPr/>
+        </p:nvSpPr>
+        <p:spPr>
+          <a:xfrm>
+            <a:off x="2682172" y="2050542"/>
             <a:ext cx="2316422" cy="356616"/>
           </a:xfrm>
           <a:prstGeom prst="rect">
@@ -7744,7 +7687,7 @@
           <a:p>
             <a:pPr algn="l"/>
             <a:r>
-              <a:rPr sz="750" b="0">
+              <a:rPr sz="800" b="0">
                 <a:solidFill>
                   <a:srgbClr val="1A1A1A"/>
                 </a:solidFill>
@@ -7757,13 +7700,13 @@
       </p:sp>
       <p:sp>
         <p:nvSpPr>
-          <p:cNvPr id="27" name="Rectangle 26"/>
+          <p:cNvPr id="28" name="Rectangle 27"/>
           <p:cNvSpPr/>
           <p:nvPr/>
         </p:nvSpPr>
         <p:spPr>
           <a:xfrm>
-            <a:off x="4876678" y="1680210"/>
+            <a:off x="4998594" y="2023110"/>
             <a:ext cx="2316422" cy="411480"/>
           </a:xfrm>
           <a:prstGeom prst="rect">
@@ -7803,13 +7746,13 @@
       </p:sp>
       <p:sp>
         <p:nvSpPr>
-          <p:cNvPr id="28" name="TextBox 27"/>
-          <p:cNvSpPr txBox="1"/>
-          <p:nvPr/>
-        </p:nvSpPr>
-        <p:spPr>
-          <a:xfrm>
-            <a:off x="4876678" y="1707642"/>
+          <p:cNvPr id="29" name="TextBox 28"/>
+          <p:cNvSpPr txBox="1"/>
+          <p:nvPr/>
+        </p:nvSpPr>
+        <p:spPr>
+          <a:xfrm>
+            <a:off x="4998594" y="2050542"/>
             <a:ext cx="2316422" cy="356616"/>
           </a:xfrm>
           <a:prstGeom prst="rect">
@@ -7825,7 +7768,7 @@
           <a:p>
             <a:pPr algn="l"/>
             <a:r>
-              <a:rPr sz="750" b="0">
+              <a:rPr sz="800" b="0">
                 <a:solidFill>
                   <a:srgbClr val="1A1A1A"/>
                 </a:solidFill>
@@ -7838,13 +7781,13 @@
       </p:sp>
       <p:sp>
         <p:nvSpPr>
-          <p:cNvPr id="29" name="Rectangle 28"/>
+          <p:cNvPr id="30" name="Rectangle 29"/>
           <p:cNvSpPr/>
           <p:nvPr/>
         </p:nvSpPr>
         <p:spPr>
           <a:xfrm>
-            <a:off x="7193100" y="1680210"/>
+            <a:off x="7315017" y="2023110"/>
             <a:ext cx="2316422" cy="411480"/>
           </a:xfrm>
           <a:prstGeom prst="rect">
@@ -7884,13 +7827,13 @@
       </p:sp>
       <p:sp>
         <p:nvSpPr>
-          <p:cNvPr id="30" name="TextBox 29"/>
-          <p:cNvSpPr txBox="1"/>
-          <p:nvPr/>
-        </p:nvSpPr>
-        <p:spPr>
-          <a:xfrm>
-            <a:off x="7193100" y="1707642"/>
+          <p:cNvPr id="31" name="TextBox 30"/>
+          <p:cNvSpPr txBox="1"/>
+          <p:nvPr/>
+        </p:nvSpPr>
+        <p:spPr>
+          <a:xfrm>
+            <a:off x="7315017" y="2050542"/>
             <a:ext cx="2316422" cy="356616"/>
           </a:xfrm>
           <a:prstGeom prst="rect">
@@ -7906,7 +7849,7 @@
           <a:p>
             <a:pPr algn="l"/>
             <a:r>
-              <a:rPr sz="750" b="0">
+              <a:rPr sz="800" b="0">
                 <a:solidFill>
                   <a:srgbClr val="1A1A1A"/>
                 </a:solidFill>
@@ -7919,13 +7862,13 @@
       </p:sp>
       <p:sp>
         <p:nvSpPr>
-          <p:cNvPr id="31" name="Rectangle 30"/>
+          <p:cNvPr id="32" name="Rectangle 31"/>
           <p:cNvSpPr/>
           <p:nvPr/>
         </p:nvSpPr>
         <p:spPr>
           <a:xfrm>
-            <a:off x="9509522" y="1680210"/>
+            <a:off x="9631439" y="2023110"/>
             <a:ext cx="2316422" cy="411480"/>
           </a:xfrm>
           <a:prstGeom prst="rect">
@@ -7965,13 +7908,13 @@
       </p:sp>
       <p:sp>
         <p:nvSpPr>
-          <p:cNvPr id="32" name="TextBox 31"/>
-          <p:cNvSpPr txBox="1"/>
-          <p:nvPr/>
-        </p:nvSpPr>
-        <p:spPr>
-          <a:xfrm>
-            <a:off x="9509522" y="1707642"/>
+          <p:cNvPr id="33" name="TextBox 32"/>
+          <p:cNvSpPr txBox="1"/>
+          <p:nvPr/>
+        </p:nvSpPr>
+        <p:spPr>
+          <a:xfrm>
+            <a:off x="9631439" y="2050542"/>
             <a:ext cx="2316422" cy="356616"/>
           </a:xfrm>
           <a:prstGeom prst="rect">
@@ -7987,7 +7930,7 @@
           <a:p>
             <a:pPr algn="l"/>
             <a:r>
-              <a:rPr sz="750" b="0">
+              <a:rPr sz="800" b="0">
                 <a:solidFill>
                   <a:srgbClr val="1A1A1A"/>
                 </a:solidFill>
@@ -8000,13 +7943,13 @@
       </p:sp>
       <p:sp>
         <p:nvSpPr>
-          <p:cNvPr id="33" name="Rectangle 32"/>
+          <p:cNvPr id="34" name="Rectangle 33"/>
           <p:cNvSpPr/>
           <p:nvPr/>
         </p:nvSpPr>
         <p:spPr>
           <a:xfrm>
-            <a:off x="365750" y="2091690"/>
+            <a:off x="487667" y="2434590"/>
             <a:ext cx="2194505" cy="534924"/>
           </a:xfrm>
           <a:prstGeom prst="rect">
@@ -8046,13 +7989,13 @@
       </p:sp>
       <p:sp>
         <p:nvSpPr>
-          <p:cNvPr id="34" name="TextBox 33"/>
-          <p:cNvSpPr txBox="1"/>
-          <p:nvPr/>
-        </p:nvSpPr>
-        <p:spPr>
-          <a:xfrm>
-            <a:off x="365750" y="2119122"/>
+          <p:cNvPr id="35" name="TextBox 34"/>
+          <p:cNvSpPr txBox="1"/>
+          <p:nvPr/>
+        </p:nvSpPr>
+        <p:spPr>
+          <a:xfrm>
+            <a:off x="487667" y="2462022"/>
             <a:ext cx="2194505" cy="480060"/>
           </a:xfrm>
           <a:prstGeom prst="rect">
@@ -8068,7 +8011,7 @@
           <a:p>
             <a:pPr algn="l"/>
             <a:r>
-              <a:rPr sz="750" b="0">
+              <a:rPr sz="800" b="0">
                 <a:solidFill>
                   <a:srgbClr val="1A1A1A"/>
                 </a:solidFill>
@@ -8081,13 +8024,13 @@
       </p:sp>
       <p:sp>
         <p:nvSpPr>
-          <p:cNvPr id="35" name="Rectangle 34"/>
+          <p:cNvPr id="36" name="Rectangle 35"/>
           <p:cNvSpPr/>
           <p:nvPr/>
         </p:nvSpPr>
         <p:spPr>
           <a:xfrm>
-            <a:off x="2560255" y="2091690"/>
+            <a:off x="2682172" y="2434590"/>
             <a:ext cx="2316422" cy="534924"/>
           </a:xfrm>
           <a:prstGeom prst="rect">
@@ -8127,13 +8070,13 @@
       </p:sp>
       <p:sp>
         <p:nvSpPr>
-          <p:cNvPr id="36" name="TextBox 35"/>
-          <p:cNvSpPr txBox="1"/>
-          <p:nvPr/>
-        </p:nvSpPr>
-        <p:spPr>
-          <a:xfrm>
-            <a:off x="2560255" y="2119122"/>
+          <p:cNvPr id="37" name="TextBox 36"/>
+          <p:cNvSpPr txBox="1"/>
+          <p:nvPr/>
+        </p:nvSpPr>
+        <p:spPr>
+          <a:xfrm>
+            <a:off x="2682172" y="2462022"/>
             <a:ext cx="2316422" cy="480060"/>
           </a:xfrm>
           <a:prstGeom prst="rect">
@@ -8149,7 +8092,7 @@
           <a:p>
             <a:pPr algn="l"/>
             <a:r>
-              <a:rPr sz="750" b="0">
+              <a:rPr sz="800" b="0">
                 <a:solidFill>
                   <a:srgbClr val="1A1A1A"/>
                 </a:solidFill>
@@ -8162,13 +8105,13 @@
       </p:sp>
       <p:sp>
         <p:nvSpPr>
-          <p:cNvPr id="37" name="Rectangle 36"/>
+          <p:cNvPr id="38" name="Rectangle 37"/>
           <p:cNvSpPr/>
           <p:nvPr/>
         </p:nvSpPr>
         <p:spPr>
           <a:xfrm>
-            <a:off x="4876678" y="2091690"/>
+            <a:off x="4998594" y="2434590"/>
             <a:ext cx="2316422" cy="534924"/>
           </a:xfrm>
           <a:prstGeom prst="rect">
@@ -8208,13 +8151,13 @@
       </p:sp>
       <p:sp>
         <p:nvSpPr>
-          <p:cNvPr id="38" name="TextBox 37"/>
-          <p:cNvSpPr txBox="1"/>
-          <p:nvPr/>
-        </p:nvSpPr>
-        <p:spPr>
-          <a:xfrm>
-            <a:off x="4876678" y="2119122"/>
+          <p:cNvPr id="39" name="TextBox 38"/>
+          <p:cNvSpPr txBox="1"/>
+          <p:nvPr/>
+        </p:nvSpPr>
+        <p:spPr>
+          <a:xfrm>
+            <a:off x="4998594" y="2462022"/>
             <a:ext cx="2316422" cy="480060"/>
           </a:xfrm>
           <a:prstGeom prst="rect">
@@ -8230,7 +8173,7 @@
           <a:p>
             <a:pPr algn="l"/>
             <a:r>
-              <a:rPr sz="750" b="0">
+              <a:rPr sz="800" b="0">
                 <a:solidFill>
                   <a:srgbClr val="1A1A1A"/>
                 </a:solidFill>
@@ -8243,13 +8186,13 @@
       </p:sp>
       <p:sp>
         <p:nvSpPr>
-          <p:cNvPr id="39" name="Rectangle 38"/>
+          <p:cNvPr id="40" name="Rectangle 39"/>
           <p:cNvSpPr/>
           <p:nvPr/>
         </p:nvSpPr>
         <p:spPr>
           <a:xfrm>
-            <a:off x="7193100" y="2091690"/>
+            <a:off x="7315017" y="2434590"/>
             <a:ext cx="2316422" cy="534924"/>
           </a:xfrm>
           <a:prstGeom prst="rect">
@@ -8289,13 +8232,13 @@
       </p:sp>
       <p:sp>
         <p:nvSpPr>
-          <p:cNvPr id="40" name="TextBox 39"/>
-          <p:cNvSpPr txBox="1"/>
-          <p:nvPr/>
-        </p:nvSpPr>
-        <p:spPr>
-          <a:xfrm>
-            <a:off x="7193100" y="2119122"/>
+          <p:cNvPr id="41" name="TextBox 40"/>
+          <p:cNvSpPr txBox="1"/>
+          <p:nvPr/>
+        </p:nvSpPr>
+        <p:spPr>
+          <a:xfrm>
+            <a:off x="7315017" y="2462022"/>
             <a:ext cx="2316422" cy="480060"/>
           </a:xfrm>
           <a:prstGeom prst="rect">
@@ -8311,7 +8254,7 @@
           <a:p>
             <a:pPr algn="l"/>
             <a:r>
-              <a:rPr sz="750" b="0">
+              <a:rPr sz="800" b="0">
                 <a:solidFill>
                   <a:srgbClr val="1A1A1A"/>
                 </a:solidFill>
@@ -8324,13 +8267,13 @@
       </p:sp>
       <p:sp>
         <p:nvSpPr>
-          <p:cNvPr id="41" name="Rectangle 40"/>
+          <p:cNvPr id="42" name="Rectangle 41"/>
           <p:cNvSpPr/>
           <p:nvPr/>
         </p:nvSpPr>
         <p:spPr>
           <a:xfrm>
-            <a:off x="9509522" y="2091690"/>
+            <a:off x="9631439" y="2434590"/>
             <a:ext cx="2316422" cy="534924"/>
           </a:xfrm>
           <a:prstGeom prst="rect">
@@ -8370,13 +8313,13 @@
       </p:sp>
       <p:sp>
         <p:nvSpPr>
-          <p:cNvPr id="42" name="TextBox 41"/>
-          <p:cNvSpPr txBox="1"/>
-          <p:nvPr/>
-        </p:nvSpPr>
-        <p:spPr>
-          <a:xfrm>
-            <a:off x="9509522" y="2119122"/>
+          <p:cNvPr id="43" name="TextBox 42"/>
+          <p:cNvSpPr txBox="1"/>
+          <p:nvPr/>
+        </p:nvSpPr>
+        <p:spPr>
+          <a:xfrm>
+            <a:off x="9631439" y="2462022"/>
             <a:ext cx="2316422" cy="480060"/>
           </a:xfrm>
           <a:prstGeom prst="rect">
@@ -8392,7 +8335,7 @@
           <a:p>
             <a:pPr algn="l"/>
             <a:r>
-              <a:rPr sz="750" b="0">
+              <a:rPr sz="800" b="0">
                 <a:solidFill>
                   <a:srgbClr val="1A1A1A"/>
                 </a:solidFill>
@@ -8405,13 +8348,13 @@
       </p:sp>
       <p:sp>
         <p:nvSpPr>
-          <p:cNvPr id="43" name="Rectangle 42"/>
+          <p:cNvPr id="44" name="Rectangle 43"/>
           <p:cNvSpPr/>
           <p:nvPr/>
         </p:nvSpPr>
         <p:spPr>
           <a:xfrm>
-            <a:off x="365750" y="2626613"/>
+            <a:off x="487667" y="2969514"/>
             <a:ext cx="2194505" cy="411480"/>
           </a:xfrm>
           <a:prstGeom prst="rect">
@@ -8451,13 +8394,13 @@
       </p:sp>
       <p:sp>
         <p:nvSpPr>
-          <p:cNvPr id="44" name="TextBox 43"/>
-          <p:cNvSpPr txBox="1"/>
-          <p:nvPr/>
-        </p:nvSpPr>
-        <p:spPr>
-          <a:xfrm>
-            <a:off x="365750" y="2654045"/>
+          <p:cNvPr id="45" name="TextBox 44"/>
+          <p:cNvSpPr txBox="1"/>
+          <p:nvPr/>
+        </p:nvSpPr>
+        <p:spPr>
+          <a:xfrm>
+            <a:off x="487667" y="2996946"/>
             <a:ext cx="2194505" cy="356616"/>
           </a:xfrm>
           <a:prstGeom prst="rect">
@@ -8473,7 +8416,7 @@
           <a:p>
             <a:pPr algn="l"/>
             <a:r>
-              <a:rPr sz="750" b="0">
+              <a:rPr sz="800" b="0">
                 <a:solidFill>
                   <a:srgbClr val="1A1A1A"/>
                 </a:solidFill>
@@ -8486,13 +8429,13 @@
       </p:sp>
       <p:sp>
         <p:nvSpPr>
-          <p:cNvPr id="45" name="Rectangle 44"/>
+          <p:cNvPr id="46" name="Rectangle 45"/>
           <p:cNvSpPr/>
           <p:nvPr/>
         </p:nvSpPr>
         <p:spPr>
           <a:xfrm>
-            <a:off x="2560255" y="2626613"/>
+            <a:off x="2682172" y="2969514"/>
             <a:ext cx="2316422" cy="411480"/>
           </a:xfrm>
           <a:prstGeom prst="rect">
@@ -8532,13 +8475,13 @@
       </p:sp>
       <p:sp>
         <p:nvSpPr>
-          <p:cNvPr id="46" name="TextBox 45"/>
-          <p:cNvSpPr txBox="1"/>
-          <p:nvPr/>
-        </p:nvSpPr>
-        <p:spPr>
-          <a:xfrm>
-            <a:off x="2560255" y="2654045"/>
+          <p:cNvPr id="47" name="TextBox 46"/>
+          <p:cNvSpPr txBox="1"/>
+          <p:nvPr/>
+        </p:nvSpPr>
+        <p:spPr>
+          <a:xfrm>
+            <a:off x="2682172" y="2996946"/>
             <a:ext cx="2316422" cy="356616"/>
           </a:xfrm>
           <a:prstGeom prst="rect">
@@ -8554,7 +8497,7 @@
           <a:p>
             <a:pPr algn="l"/>
             <a:r>
-              <a:rPr sz="750" b="0">
+              <a:rPr sz="800" b="0">
                 <a:solidFill>
                   <a:srgbClr val="1A1A1A"/>
                 </a:solidFill>
@@ -8567,13 +8510,13 @@
       </p:sp>
       <p:sp>
         <p:nvSpPr>
-          <p:cNvPr id="47" name="Rectangle 46"/>
+          <p:cNvPr id="48" name="Rectangle 47"/>
           <p:cNvSpPr/>
           <p:nvPr/>
         </p:nvSpPr>
         <p:spPr>
           <a:xfrm>
-            <a:off x="4876678" y="2626613"/>
+            <a:off x="4998594" y="2969514"/>
             <a:ext cx="2316422" cy="411480"/>
           </a:xfrm>
           <a:prstGeom prst="rect">
@@ -8613,13 +8556,13 @@
       </p:sp>
       <p:sp>
         <p:nvSpPr>
-          <p:cNvPr id="48" name="TextBox 47"/>
-          <p:cNvSpPr txBox="1"/>
-          <p:nvPr/>
-        </p:nvSpPr>
-        <p:spPr>
-          <a:xfrm>
-            <a:off x="4876678" y="2654045"/>
+          <p:cNvPr id="49" name="TextBox 48"/>
+          <p:cNvSpPr txBox="1"/>
+          <p:nvPr/>
+        </p:nvSpPr>
+        <p:spPr>
+          <a:xfrm>
+            <a:off x="4998594" y="2996946"/>
             <a:ext cx="2316422" cy="356616"/>
           </a:xfrm>
           <a:prstGeom prst="rect">
@@ -8635,7 +8578,7 @@
           <a:p>
             <a:pPr algn="l"/>
             <a:r>
-              <a:rPr sz="750" b="0">
+              <a:rPr sz="800" b="0">
                 <a:solidFill>
                   <a:srgbClr val="1A1A1A"/>
                 </a:solidFill>
@@ -8648,13 +8591,13 @@
       </p:sp>
       <p:sp>
         <p:nvSpPr>
-          <p:cNvPr id="49" name="Rectangle 48"/>
+          <p:cNvPr id="50" name="Rectangle 49"/>
           <p:cNvSpPr/>
           <p:nvPr/>
         </p:nvSpPr>
         <p:spPr>
           <a:xfrm>
-            <a:off x="7193100" y="2626613"/>
+            <a:off x="7315017" y="2969514"/>
             <a:ext cx="2316422" cy="411480"/>
           </a:xfrm>
           <a:prstGeom prst="rect">
@@ -8694,13 +8637,13 @@
       </p:sp>
       <p:sp>
         <p:nvSpPr>
-          <p:cNvPr id="50" name="TextBox 49"/>
-          <p:cNvSpPr txBox="1"/>
-          <p:nvPr/>
-        </p:nvSpPr>
-        <p:spPr>
-          <a:xfrm>
-            <a:off x="7193100" y="2654045"/>
+          <p:cNvPr id="51" name="TextBox 50"/>
+          <p:cNvSpPr txBox="1"/>
+          <p:nvPr/>
+        </p:nvSpPr>
+        <p:spPr>
+          <a:xfrm>
+            <a:off x="7315017" y="2996946"/>
             <a:ext cx="2316422" cy="356616"/>
           </a:xfrm>
           <a:prstGeom prst="rect">
@@ -8716,7 +8659,7 @@
           <a:p>
             <a:pPr algn="l"/>
             <a:r>
-              <a:rPr sz="750" b="0">
+              <a:rPr sz="800" b="0">
                 <a:solidFill>
                   <a:srgbClr val="1A1A1A"/>
                 </a:solidFill>
@@ -8729,13 +8672,13 @@
       </p:sp>
       <p:sp>
         <p:nvSpPr>
-          <p:cNvPr id="51" name="Rectangle 50"/>
+          <p:cNvPr id="52" name="Rectangle 51"/>
           <p:cNvSpPr/>
           <p:nvPr/>
         </p:nvSpPr>
         <p:spPr>
           <a:xfrm>
-            <a:off x="9509522" y="2626613"/>
+            <a:off x="9631439" y="2969514"/>
             <a:ext cx="2316422" cy="411480"/>
           </a:xfrm>
           <a:prstGeom prst="rect">
@@ -8775,13 +8718,13 @@
       </p:sp>
       <p:sp>
         <p:nvSpPr>
-          <p:cNvPr id="52" name="TextBox 51"/>
-          <p:cNvSpPr txBox="1"/>
-          <p:nvPr/>
-        </p:nvSpPr>
-        <p:spPr>
-          <a:xfrm>
-            <a:off x="9509522" y="2654045"/>
+          <p:cNvPr id="53" name="TextBox 52"/>
+          <p:cNvSpPr txBox="1"/>
+          <p:nvPr/>
+        </p:nvSpPr>
+        <p:spPr>
+          <a:xfrm>
+            <a:off x="9631439" y="2996946"/>
             <a:ext cx="2316422" cy="356616"/>
           </a:xfrm>
           <a:prstGeom prst="rect">
@@ -8797,7 +8740,7 @@
           <a:p>
             <a:pPr algn="l"/>
             <a:r>
-              <a:rPr sz="750" b="0">
+              <a:rPr sz="800" b="0">
                 <a:solidFill>
                   <a:srgbClr val="1A1A1A"/>
                 </a:solidFill>
@@ -8810,13 +8753,13 @@
       </p:sp>
       <p:sp>
         <p:nvSpPr>
-          <p:cNvPr id="53" name="Rectangle 52"/>
+          <p:cNvPr id="54" name="Rectangle 53"/>
           <p:cNvSpPr/>
           <p:nvPr/>
         </p:nvSpPr>
         <p:spPr>
           <a:xfrm>
-            <a:off x="365750" y="3038094"/>
+            <a:off x="487667" y="3380994"/>
             <a:ext cx="2194505" cy="534924"/>
           </a:xfrm>
           <a:prstGeom prst="rect">
@@ -8856,13 +8799,13 @@
       </p:sp>
       <p:sp>
         <p:nvSpPr>
-          <p:cNvPr id="54" name="TextBox 53"/>
-          <p:cNvSpPr txBox="1"/>
-          <p:nvPr/>
-        </p:nvSpPr>
-        <p:spPr>
-          <a:xfrm>
-            <a:off x="365750" y="3065526"/>
+          <p:cNvPr id="55" name="TextBox 54"/>
+          <p:cNvSpPr txBox="1"/>
+          <p:nvPr/>
+        </p:nvSpPr>
+        <p:spPr>
+          <a:xfrm>
+            <a:off x="487667" y="3408426"/>
             <a:ext cx="2194505" cy="480060"/>
           </a:xfrm>
           <a:prstGeom prst="rect">
@@ -8878,7 +8821,7 @@
           <a:p>
             <a:pPr algn="l"/>
             <a:r>
-              <a:rPr sz="750" b="0">
+              <a:rPr sz="800" b="0">
                 <a:solidFill>
                   <a:srgbClr val="1A1A1A"/>
                 </a:solidFill>
@@ -8891,13 +8834,13 @@
       </p:sp>
       <p:sp>
         <p:nvSpPr>
-          <p:cNvPr id="55" name="Rectangle 54"/>
+          <p:cNvPr id="56" name="Rectangle 55"/>
           <p:cNvSpPr/>
           <p:nvPr/>
         </p:nvSpPr>
         <p:spPr>
           <a:xfrm>
-            <a:off x="2560255" y="3038094"/>
+            <a:off x="2682172" y="3380994"/>
             <a:ext cx="2316422" cy="534924"/>
           </a:xfrm>
           <a:prstGeom prst="rect">
@@ -8937,13 +8880,13 @@
       </p:sp>
       <p:sp>
         <p:nvSpPr>
-          <p:cNvPr id="56" name="TextBox 55"/>
-          <p:cNvSpPr txBox="1"/>
-          <p:nvPr/>
-        </p:nvSpPr>
-        <p:spPr>
-          <a:xfrm>
-            <a:off x="2560255" y="3065526"/>
+          <p:cNvPr id="57" name="TextBox 56"/>
+          <p:cNvSpPr txBox="1"/>
+          <p:nvPr/>
+        </p:nvSpPr>
+        <p:spPr>
+          <a:xfrm>
+            <a:off x="2682172" y="3408426"/>
             <a:ext cx="2316422" cy="480060"/>
           </a:xfrm>
           <a:prstGeom prst="rect">
@@ -8959,7 +8902,7 @@
           <a:p>
             <a:pPr algn="l"/>
             <a:r>
-              <a:rPr sz="750" b="0">
+              <a:rPr sz="800" b="0">
                 <a:solidFill>
                   <a:srgbClr val="1A1A1A"/>
                 </a:solidFill>
@@ -8972,13 +8915,13 @@
       </p:sp>
       <p:sp>
         <p:nvSpPr>
-          <p:cNvPr id="57" name="Rectangle 56"/>
+          <p:cNvPr id="58" name="Rectangle 57"/>
           <p:cNvSpPr/>
           <p:nvPr/>
         </p:nvSpPr>
         <p:spPr>
           <a:xfrm>
-            <a:off x="4876678" y="3038094"/>
+            <a:off x="4998594" y="3380994"/>
             <a:ext cx="2316422" cy="534924"/>
           </a:xfrm>
           <a:prstGeom prst="rect">
@@ -9018,13 +8961,13 @@
       </p:sp>
       <p:sp>
         <p:nvSpPr>
-          <p:cNvPr id="58" name="TextBox 57"/>
-          <p:cNvSpPr txBox="1"/>
-          <p:nvPr/>
-        </p:nvSpPr>
-        <p:spPr>
-          <a:xfrm>
-            <a:off x="4876678" y="3065526"/>
+          <p:cNvPr id="59" name="TextBox 58"/>
+          <p:cNvSpPr txBox="1"/>
+          <p:nvPr/>
+        </p:nvSpPr>
+        <p:spPr>
+          <a:xfrm>
+            <a:off x="4998594" y="3408426"/>
             <a:ext cx="2316422" cy="480060"/>
           </a:xfrm>
           <a:prstGeom prst="rect">
@@ -9040,7 +8983,7 @@
           <a:p>
             <a:pPr algn="l"/>
             <a:r>
-              <a:rPr sz="750" b="0">
+              <a:rPr sz="800" b="0">
                 <a:solidFill>
                   <a:srgbClr val="1A1A1A"/>
                 </a:solidFill>
@@ -9053,13 +8996,13 @@
       </p:sp>
       <p:sp>
         <p:nvSpPr>
-          <p:cNvPr id="59" name="Rectangle 58"/>
+          <p:cNvPr id="60" name="Rectangle 59"/>
           <p:cNvSpPr/>
           <p:nvPr/>
         </p:nvSpPr>
         <p:spPr>
           <a:xfrm>
-            <a:off x="7193100" y="3038094"/>
+            <a:off x="7315017" y="3380994"/>
             <a:ext cx="2316422" cy="534924"/>
           </a:xfrm>
           <a:prstGeom prst="rect">
@@ -9099,13 +9042,13 @@
       </p:sp>
       <p:sp>
         <p:nvSpPr>
-          <p:cNvPr id="60" name="TextBox 59"/>
-          <p:cNvSpPr txBox="1"/>
-          <p:nvPr/>
-        </p:nvSpPr>
-        <p:spPr>
-          <a:xfrm>
-            <a:off x="7193100" y="3065526"/>
+          <p:cNvPr id="61" name="TextBox 60"/>
+          <p:cNvSpPr txBox="1"/>
+          <p:nvPr/>
+        </p:nvSpPr>
+        <p:spPr>
+          <a:xfrm>
+            <a:off x="7315017" y="3408426"/>
             <a:ext cx="2316422" cy="480060"/>
           </a:xfrm>
           <a:prstGeom prst="rect">
@@ -9121,7 +9064,7 @@
           <a:p>
             <a:pPr algn="l"/>
             <a:r>
-              <a:rPr sz="750" b="0">
+              <a:rPr sz="800" b="0">
                 <a:solidFill>
                   <a:srgbClr val="1A1A1A"/>
                 </a:solidFill>
@@ -9134,13 +9077,13 @@
       </p:sp>
       <p:sp>
         <p:nvSpPr>
-          <p:cNvPr id="61" name="Rectangle 60"/>
+          <p:cNvPr id="62" name="Rectangle 61"/>
           <p:cNvSpPr/>
           <p:nvPr/>
         </p:nvSpPr>
         <p:spPr>
           <a:xfrm>
-            <a:off x="9509522" y="3038094"/>
+            <a:off x="9631439" y="3380994"/>
             <a:ext cx="2316422" cy="534924"/>
           </a:xfrm>
           <a:prstGeom prst="rect">
@@ -9180,13 +9123,13 @@
       </p:sp>
       <p:sp>
         <p:nvSpPr>
-          <p:cNvPr id="62" name="TextBox 61"/>
-          <p:cNvSpPr txBox="1"/>
-          <p:nvPr/>
-        </p:nvSpPr>
-        <p:spPr>
-          <a:xfrm>
-            <a:off x="9509522" y="3065526"/>
+          <p:cNvPr id="63" name="TextBox 62"/>
+          <p:cNvSpPr txBox="1"/>
+          <p:nvPr/>
+        </p:nvSpPr>
+        <p:spPr>
+          <a:xfrm>
+            <a:off x="9631439" y="3408426"/>
             <a:ext cx="2316422" cy="480060"/>
           </a:xfrm>
           <a:prstGeom prst="rect">
@@ -9202,7 +9145,7 @@
           <a:p>
             <a:pPr algn="l"/>
             <a:r>
-              <a:rPr sz="750" b="0">
+              <a:rPr sz="800" b="0">
                 <a:solidFill>
                   <a:srgbClr val="1A1A1A"/>
                 </a:solidFill>
@@ -9215,13 +9158,13 @@
       </p:sp>
       <p:sp>
         <p:nvSpPr>
-          <p:cNvPr id="63" name="Rectangle 62"/>
+          <p:cNvPr id="64" name="Rectangle 63"/>
           <p:cNvSpPr/>
           <p:nvPr/>
         </p:nvSpPr>
         <p:spPr>
           <a:xfrm>
-            <a:off x="365750" y="3573017"/>
+            <a:off x="487667" y="3915917"/>
             <a:ext cx="2194505" cy="411480"/>
           </a:xfrm>
           <a:prstGeom prst="rect">
@@ -9261,13 +9204,13 @@
       </p:sp>
       <p:sp>
         <p:nvSpPr>
-          <p:cNvPr id="64" name="TextBox 63"/>
-          <p:cNvSpPr txBox="1"/>
-          <p:nvPr/>
-        </p:nvSpPr>
-        <p:spPr>
-          <a:xfrm>
-            <a:off x="365750" y="3600449"/>
+          <p:cNvPr id="65" name="TextBox 64"/>
+          <p:cNvSpPr txBox="1"/>
+          <p:nvPr/>
+        </p:nvSpPr>
+        <p:spPr>
+          <a:xfrm>
+            <a:off x="487667" y="3943349"/>
             <a:ext cx="2194505" cy="356616"/>
           </a:xfrm>
           <a:prstGeom prst="rect">
@@ -9283,7 +9226,7 @@
           <a:p>
             <a:pPr algn="l"/>
             <a:r>
-              <a:rPr sz="750" b="0">
+              <a:rPr sz="800" b="0">
                 <a:solidFill>
                   <a:srgbClr val="1A1A1A"/>
                 </a:solidFill>
@@ -9296,13 +9239,13 @@
       </p:sp>
       <p:sp>
         <p:nvSpPr>
-          <p:cNvPr id="65" name="Rectangle 64"/>
+          <p:cNvPr id="66" name="Rectangle 65"/>
           <p:cNvSpPr/>
           <p:nvPr/>
         </p:nvSpPr>
         <p:spPr>
           <a:xfrm>
-            <a:off x="2560255" y="3573017"/>
+            <a:off x="2682172" y="3915917"/>
             <a:ext cx="2316422" cy="411480"/>
           </a:xfrm>
           <a:prstGeom prst="rect">
@@ -9342,13 +9285,13 @@
       </p:sp>
       <p:sp>
         <p:nvSpPr>
-          <p:cNvPr id="66" name="TextBox 65"/>
-          <p:cNvSpPr txBox="1"/>
-          <p:nvPr/>
-        </p:nvSpPr>
-        <p:spPr>
-          <a:xfrm>
-            <a:off x="2560255" y="3600449"/>
+          <p:cNvPr id="67" name="TextBox 66"/>
+          <p:cNvSpPr txBox="1"/>
+          <p:nvPr/>
+        </p:nvSpPr>
+        <p:spPr>
+          <a:xfrm>
+            <a:off x="2682172" y="3943349"/>
             <a:ext cx="2316422" cy="356616"/>
           </a:xfrm>
           <a:prstGeom prst="rect">
@@ -9364,7 +9307,7 @@
           <a:p>
             <a:pPr algn="l"/>
             <a:r>
-              <a:rPr sz="750" b="0">
+              <a:rPr sz="800" b="0">
                 <a:solidFill>
                   <a:srgbClr val="1A1A1A"/>
                 </a:solidFill>
@@ -9377,13 +9320,13 @@
       </p:sp>
       <p:sp>
         <p:nvSpPr>
-          <p:cNvPr id="67" name="Rectangle 66"/>
+          <p:cNvPr id="68" name="Rectangle 67"/>
           <p:cNvSpPr/>
           <p:nvPr/>
         </p:nvSpPr>
         <p:spPr>
           <a:xfrm>
-            <a:off x="4876678" y="3573017"/>
+            <a:off x="4998594" y="3915917"/>
             <a:ext cx="2316422" cy="411480"/>
           </a:xfrm>
           <a:prstGeom prst="rect">
@@ -9423,13 +9366,13 @@
       </p:sp>
       <p:sp>
         <p:nvSpPr>
-          <p:cNvPr id="68" name="TextBox 67"/>
-          <p:cNvSpPr txBox="1"/>
-          <p:nvPr/>
-        </p:nvSpPr>
-        <p:spPr>
-          <a:xfrm>
-            <a:off x="4876678" y="3600449"/>
+          <p:cNvPr id="69" name="TextBox 68"/>
+          <p:cNvSpPr txBox="1"/>
+          <p:nvPr/>
+        </p:nvSpPr>
+        <p:spPr>
+          <a:xfrm>
+            <a:off x="4998594" y="3943349"/>
             <a:ext cx="2316422" cy="356616"/>
           </a:xfrm>
           <a:prstGeom prst="rect">
@@ -9445,7 +9388,7 @@
           <a:p>
             <a:pPr algn="l"/>
             <a:r>
-              <a:rPr sz="750" b="0">
+              <a:rPr sz="800" b="0">
                 <a:solidFill>
                   <a:srgbClr val="1A1A1A"/>
                 </a:solidFill>
@@ -9458,13 +9401,13 @@
       </p:sp>
       <p:sp>
         <p:nvSpPr>
-          <p:cNvPr id="69" name="Rectangle 68"/>
+          <p:cNvPr id="70" name="Rectangle 69"/>
           <p:cNvSpPr/>
           <p:nvPr/>
         </p:nvSpPr>
         <p:spPr>
           <a:xfrm>
-            <a:off x="7193100" y="3573017"/>
+            <a:off x="7315017" y="3915917"/>
             <a:ext cx="2316422" cy="411480"/>
           </a:xfrm>
           <a:prstGeom prst="rect">
@@ -9504,13 +9447,13 @@
       </p:sp>
       <p:sp>
         <p:nvSpPr>
-          <p:cNvPr id="70" name="TextBox 69"/>
-          <p:cNvSpPr txBox="1"/>
-          <p:nvPr/>
-        </p:nvSpPr>
-        <p:spPr>
-          <a:xfrm>
-            <a:off x="7193100" y="3600449"/>
+          <p:cNvPr id="71" name="TextBox 70"/>
+          <p:cNvSpPr txBox="1"/>
+          <p:nvPr/>
+        </p:nvSpPr>
+        <p:spPr>
+          <a:xfrm>
+            <a:off x="7315017" y="3943349"/>
             <a:ext cx="2316422" cy="356616"/>
           </a:xfrm>
           <a:prstGeom prst="rect">
@@ -9526,7 +9469,7 @@
           <a:p>
             <a:pPr algn="l"/>
             <a:r>
-              <a:rPr sz="750" b="0">
+              <a:rPr sz="800" b="0">
                 <a:solidFill>
                   <a:srgbClr val="1A1A1A"/>
                 </a:solidFill>
@@ -9539,13 +9482,13 @@
       </p:sp>
       <p:sp>
         <p:nvSpPr>
-          <p:cNvPr id="71" name="Rectangle 70"/>
+          <p:cNvPr id="72" name="Rectangle 71"/>
           <p:cNvSpPr/>
           <p:nvPr/>
         </p:nvSpPr>
         <p:spPr>
           <a:xfrm>
-            <a:off x="9509522" y="3573017"/>
+            <a:off x="9631439" y="3915917"/>
             <a:ext cx="2316422" cy="411480"/>
           </a:xfrm>
           <a:prstGeom prst="rect">
@@ -9585,13 +9528,13 @@
       </p:sp>
       <p:sp>
         <p:nvSpPr>
-          <p:cNvPr id="72" name="TextBox 71"/>
-          <p:cNvSpPr txBox="1"/>
-          <p:nvPr/>
-        </p:nvSpPr>
-        <p:spPr>
-          <a:xfrm>
-            <a:off x="9509522" y="3600449"/>
+          <p:cNvPr id="73" name="TextBox 72"/>
+          <p:cNvSpPr txBox="1"/>
+          <p:nvPr/>
+        </p:nvSpPr>
+        <p:spPr>
+          <a:xfrm>
+            <a:off x="9631439" y="3943349"/>
             <a:ext cx="2316422" cy="356616"/>
           </a:xfrm>
           <a:prstGeom prst="rect">
@@ -9607,7 +9550,7 @@
           <a:p>
             <a:pPr algn="l"/>
             <a:r>
-              <a:rPr sz="750" b="0">
+              <a:rPr sz="800" b="0">
                 <a:solidFill>
                   <a:srgbClr val="1A1A1A"/>
                 </a:solidFill>
@@ -9620,13 +9563,13 @@
       </p:sp>
       <p:sp>
         <p:nvSpPr>
-          <p:cNvPr id="73" name="Rectangle 72"/>
+          <p:cNvPr id="74" name="Rectangle 73"/>
           <p:cNvSpPr/>
           <p:nvPr/>
         </p:nvSpPr>
         <p:spPr>
           <a:xfrm>
-            <a:off x="365750" y="3984497"/>
+            <a:off x="487667" y="4327397"/>
             <a:ext cx="2194505" cy="411480"/>
           </a:xfrm>
           <a:prstGeom prst="rect">
@@ -9666,13 +9609,13 @@
       </p:sp>
       <p:sp>
         <p:nvSpPr>
-          <p:cNvPr id="74" name="TextBox 73"/>
-          <p:cNvSpPr txBox="1"/>
-          <p:nvPr/>
-        </p:nvSpPr>
-        <p:spPr>
-          <a:xfrm>
-            <a:off x="365750" y="4011929"/>
+          <p:cNvPr id="75" name="TextBox 74"/>
+          <p:cNvSpPr txBox="1"/>
+          <p:nvPr/>
+        </p:nvSpPr>
+        <p:spPr>
+          <a:xfrm>
+            <a:off x="487667" y="4354829"/>
             <a:ext cx="2194505" cy="356616"/>
           </a:xfrm>
           <a:prstGeom prst="rect">
@@ -9688,7 +9631,7 @@
           <a:p>
             <a:pPr algn="l"/>
             <a:r>
-              <a:rPr sz="750" b="0">
+              <a:rPr sz="800" b="0">
                 <a:solidFill>
                   <a:srgbClr val="1A1A1A"/>
                 </a:solidFill>
@@ -9701,13 +9644,13 @@
       </p:sp>
       <p:sp>
         <p:nvSpPr>
-          <p:cNvPr id="75" name="Rectangle 74"/>
+          <p:cNvPr id="76" name="Rectangle 75"/>
           <p:cNvSpPr/>
           <p:nvPr/>
         </p:nvSpPr>
         <p:spPr>
           <a:xfrm>
-            <a:off x="2560255" y="3984497"/>
+            <a:off x="2682172" y="4327397"/>
             <a:ext cx="2316422" cy="411480"/>
           </a:xfrm>
           <a:prstGeom prst="rect">
@@ -9747,13 +9690,13 @@
       </p:sp>
       <p:sp>
         <p:nvSpPr>
-          <p:cNvPr id="76" name="TextBox 75"/>
-          <p:cNvSpPr txBox="1"/>
-          <p:nvPr/>
-        </p:nvSpPr>
-        <p:spPr>
-          <a:xfrm>
-            <a:off x="2560255" y="4011929"/>
+          <p:cNvPr id="77" name="TextBox 76"/>
+          <p:cNvSpPr txBox="1"/>
+          <p:nvPr/>
+        </p:nvSpPr>
+        <p:spPr>
+          <a:xfrm>
+            <a:off x="2682172" y="4354829"/>
             <a:ext cx="2316422" cy="356616"/>
           </a:xfrm>
           <a:prstGeom prst="rect">
@@ -9769,7 +9712,7 @@
           <a:p>
             <a:pPr algn="l"/>
             <a:r>
-              <a:rPr sz="750" b="0">
+              <a:rPr sz="800" b="0">
                 <a:solidFill>
                   <a:srgbClr val="1A1A1A"/>
                 </a:solidFill>
@@ -9782,13 +9725,13 @@
       </p:sp>
       <p:sp>
         <p:nvSpPr>
-          <p:cNvPr id="77" name="Rectangle 76"/>
+          <p:cNvPr id="78" name="Rectangle 77"/>
           <p:cNvSpPr/>
           <p:nvPr/>
         </p:nvSpPr>
         <p:spPr>
           <a:xfrm>
-            <a:off x="4876678" y="3984497"/>
+            <a:off x="4998594" y="4327397"/>
             <a:ext cx="2316422" cy="411480"/>
           </a:xfrm>
           <a:prstGeom prst="rect">
@@ -9828,13 +9771,13 @@
       </p:sp>
       <p:sp>
         <p:nvSpPr>
-          <p:cNvPr id="78" name="TextBox 77"/>
-          <p:cNvSpPr txBox="1"/>
-          <p:nvPr/>
-        </p:nvSpPr>
-        <p:spPr>
-          <a:xfrm>
-            <a:off x="4876678" y="4011929"/>
+          <p:cNvPr id="79" name="TextBox 78"/>
+          <p:cNvSpPr txBox="1"/>
+          <p:nvPr/>
+        </p:nvSpPr>
+        <p:spPr>
+          <a:xfrm>
+            <a:off x="4998594" y="4354829"/>
             <a:ext cx="2316422" cy="356616"/>
           </a:xfrm>
           <a:prstGeom prst="rect">
@@ -9850,7 +9793,7 @@
           <a:p>
             <a:pPr algn="l"/>
             <a:r>
-              <a:rPr sz="750" b="0">
+              <a:rPr sz="800" b="0">
                 <a:solidFill>
                   <a:srgbClr val="1A1A1A"/>
                 </a:solidFill>
@@ -9863,13 +9806,13 @@
       </p:sp>
       <p:sp>
         <p:nvSpPr>
-          <p:cNvPr id="79" name="Rectangle 78"/>
+          <p:cNvPr id="80" name="Rectangle 79"/>
           <p:cNvSpPr/>
           <p:nvPr/>
         </p:nvSpPr>
         <p:spPr>
           <a:xfrm>
-            <a:off x="7193100" y="3984497"/>
+            <a:off x="7315017" y="4327397"/>
             <a:ext cx="2316422" cy="411480"/>
           </a:xfrm>
           <a:prstGeom prst="rect">
@@ -9909,13 +9852,13 @@
       </p:sp>
       <p:sp>
         <p:nvSpPr>
-          <p:cNvPr id="80" name="TextBox 79"/>
-          <p:cNvSpPr txBox="1"/>
-          <p:nvPr/>
-        </p:nvSpPr>
-        <p:spPr>
-          <a:xfrm>
-            <a:off x="7193100" y="4011929"/>
+          <p:cNvPr id="81" name="TextBox 80"/>
+          <p:cNvSpPr txBox="1"/>
+          <p:nvPr/>
+        </p:nvSpPr>
+        <p:spPr>
+          <a:xfrm>
+            <a:off x="7315017" y="4354829"/>
             <a:ext cx="2316422" cy="356616"/>
           </a:xfrm>
           <a:prstGeom prst="rect">
@@ -9931,7 +9874,7 @@
           <a:p>
             <a:pPr algn="l"/>
             <a:r>
-              <a:rPr sz="750" b="0">
+              <a:rPr sz="800" b="0">
                 <a:solidFill>
                   <a:srgbClr val="1A1A1A"/>
                 </a:solidFill>
@@ -9944,13 +9887,13 @@
       </p:sp>
       <p:sp>
         <p:nvSpPr>
-          <p:cNvPr id="81" name="Rectangle 80"/>
+          <p:cNvPr id="82" name="Rectangle 81"/>
           <p:cNvSpPr/>
           <p:nvPr/>
         </p:nvSpPr>
         <p:spPr>
           <a:xfrm>
-            <a:off x="9509522" y="3984497"/>
+            <a:off x="9631439" y="4327397"/>
             <a:ext cx="2316422" cy="411480"/>
           </a:xfrm>
           <a:prstGeom prst="rect">
@@ -9990,13 +9933,13 @@
       </p:sp>
       <p:sp>
         <p:nvSpPr>
-          <p:cNvPr id="82" name="TextBox 81"/>
-          <p:cNvSpPr txBox="1"/>
-          <p:nvPr/>
-        </p:nvSpPr>
-        <p:spPr>
-          <a:xfrm>
-            <a:off x="9509522" y="4011929"/>
+          <p:cNvPr id="83" name="TextBox 82"/>
+          <p:cNvSpPr txBox="1"/>
+          <p:nvPr/>
+        </p:nvSpPr>
+        <p:spPr>
+          <a:xfrm>
+            <a:off x="9631439" y="4354829"/>
             <a:ext cx="2316422" cy="356616"/>
           </a:xfrm>
           <a:prstGeom prst="rect">
@@ -10012,7 +9955,7 @@
           <a:p>
             <a:pPr algn="l"/>
             <a:r>
-              <a:rPr sz="750" b="0">
+              <a:rPr sz="800" b="0">
                 <a:solidFill>
                   <a:srgbClr val="1A1A1A"/>
                 </a:solidFill>
@@ -10025,13 +9968,13 @@
       </p:sp>
       <p:sp>
         <p:nvSpPr>
-          <p:cNvPr id="83" name="Rectangle 82"/>
+          <p:cNvPr id="84" name="Rectangle 83"/>
           <p:cNvSpPr/>
           <p:nvPr/>
         </p:nvSpPr>
         <p:spPr>
           <a:xfrm>
-            <a:off x="365750" y="4395977"/>
+            <a:off x="487667" y="4738877"/>
             <a:ext cx="2194505" cy="411480"/>
           </a:xfrm>
           <a:prstGeom prst="rect">
@@ -10071,13 +10014,13 @@
       </p:sp>
       <p:sp>
         <p:nvSpPr>
-          <p:cNvPr id="84" name="TextBox 83"/>
-          <p:cNvSpPr txBox="1"/>
-          <p:nvPr/>
-        </p:nvSpPr>
-        <p:spPr>
-          <a:xfrm>
-            <a:off x="365750" y="4423410"/>
+          <p:cNvPr id="85" name="TextBox 84"/>
+          <p:cNvSpPr txBox="1"/>
+          <p:nvPr/>
+        </p:nvSpPr>
+        <p:spPr>
+          <a:xfrm>
+            <a:off x="487667" y="4766310"/>
             <a:ext cx="2194505" cy="356616"/>
           </a:xfrm>
           <a:prstGeom prst="rect">
@@ -10093,7 +10036,7 @@
           <a:p>
             <a:pPr algn="l"/>
             <a:r>
-              <a:rPr sz="750" b="0">
+              <a:rPr sz="800" b="0">
                 <a:solidFill>
                   <a:srgbClr val="1A1A1A"/>
                 </a:solidFill>
@@ -10106,13 +10049,13 @@
       </p:sp>
       <p:sp>
         <p:nvSpPr>
-          <p:cNvPr id="85" name="Rectangle 84"/>
+          <p:cNvPr id="86" name="Rectangle 85"/>
           <p:cNvSpPr/>
           <p:nvPr/>
         </p:nvSpPr>
         <p:spPr>
           <a:xfrm>
-            <a:off x="2560255" y="4395977"/>
+            <a:off x="2682172" y="4738877"/>
             <a:ext cx="2316422" cy="411480"/>
           </a:xfrm>
           <a:prstGeom prst="rect">
@@ -10152,13 +10095,13 @@
       </p:sp>
       <p:sp>
         <p:nvSpPr>
-          <p:cNvPr id="86" name="TextBox 85"/>
-          <p:cNvSpPr txBox="1"/>
-          <p:nvPr/>
-        </p:nvSpPr>
-        <p:spPr>
-          <a:xfrm>
-            <a:off x="2560255" y="4423410"/>
+          <p:cNvPr id="87" name="TextBox 86"/>
+          <p:cNvSpPr txBox="1"/>
+          <p:nvPr/>
+        </p:nvSpPr>
+        <p:spPr>
+          <a:xfrm>
+            <a:off x="2682172" y="4766310"/>
             <a:ext cx="2316422" cy="356616"/>
           </a:xfrm>
           <a:prstGeom prst="rect">
@@ -10174,7 +10117,7 @@
           <a:p>
             <a:pPr algn="l"/>
             <a:r>
-              <a:rPr sz="750" b="0">
+              <a:rPr sz="800" b="0">
                 <a:solidFill>
                   <a:srgbClr val="1A1A1A"/>
                 </a:solidFill>
@@ -10187,13 +10130,13 @@
       </p:sp>
       <p:sp>
         <p:nvSpPr>
-          <p:cNvPr id="87" name="Rectangle 86"/>
+          <p:cNvPr id="88" name="Rectangle 87"/>
           <p:cNvSpPr/>
           <p:nvPr/>
         </p:nvSpPr>
         <p:spPr>
           <a:xfrm>
-            <a:off x="4876678" y="4395977"/>
+            <a:off x="4998594" y="4738877"/>
             <a:ext cx="2316422" cy="411480"/>
           </a:xfrm>
           <a:prstGeom prst="rect">
@@ -10233,13 +10176,13 @@
       </p:sp>
       <p:sp>
         <p:nvSpPr>
-          <p:cNvPr id="88" name="TextBox 87"/>
-          <p:cNvSpPr txBox="1"/>
-          <p:nvPr/>
-        </p:nvSpPr>
-        <p:spPr>
-          <a:xfrm>
-            <a:off x="4876678" y="4423410"/>
+          <p:cNvPr id="89" name="TextBox 88"/>
+          <p:cNvSpPr txBox="1"/>
+          <p:nvPr/>
+        </p:nvSpPr>
+        <p:spPr>
+          <a:xfrm>
+            <a:off x="4998594" y="4766310"/>
             <a:ext cx="2316422" cy="356616"/>
           </a:xfrm>
           <a:prstGeom prst="rect">
@@ -10255,7 +10198,7 @@
           <a:p>
             <a:pPr algn="l"/>
             <a:r>
-              <a:rPr sz="750" b="0">
+              <a:rPr sz="800" b="0">
                 <a:solidFill>
                   <a:srgbClr val="1A1A1A"/>
                 </a:solidFill>
@@ -10268,13 +10211,13 @@
       </p:sp>
       <p:sp>
         <p:nvSpPr>
-          <p:cNvPr id="89" name="Rectangle 88"/>
+          <p:cNvPr id="90" name="Rectangle 89"/>
           <p:cNvSpPr/>
           <p:nvPr/>
         </p:nvSpPr>
         <p:spPr>
           <a:xfrm>
-            <a:off x="7193100" y="4395977"/>
+            <a:off x="7315017" y="4738877"/>
             <a:ext cx="2316422" cy="411480"/>
           </a:xfrm>
           <a:prstGeom prst="rect">
@@ -10314,13 +10257,13 @@
       </p:sp>
       <p:sp>
         <p:nvSpPr>
-          <p:cNvPr id="90" name="TextBox 89"/>
-          <p:cNvSpPr txBox="1"/>
-          <p:nvPr/>
-        </p:nvSpPr>
-        <p:spPr>
-          <a:xfrm>
-            <a:off x="7193100" y="4423410"/>
+          <p:cNvPr id="91" name="TextBox 90"/>
+          <p:cNvSpPr txBox="1"/>
+          <p:nvPr/>
+        </p:nvSpPr>
+        <p:spPr>
+          <a:xfrm>
+            <a:off x="7315017" y="4766310"/>
             <a:ext cx="2316422" cy="356616"/>
           </a:xfrm>
           <a:prstGeom prst="rect">
@@ -10336,7 +10279,7 @@
           <a:p>
             <a:pPr algn="l"/>
             <a:r>
-              <a:rPr sz="750" b="0">
+              <a:rPr sz="800" b="0">
                 <a:solidFill>
                   <a:srgbClr val="1A1A1A"/>
                 </a:solidFill>
@@ -10349,13 +10292,13 @@
       </p:sp>
       <p:sp>
         <p:nvSpPr>
-          <p:cNvPr id="91" name="Rectangle 90"/>
+          <p:cNvPr id="92" name="Rectangle 91"/>
           <p:cNvSpPr/>
           <p:nvPr/>
         </p:nvSpPr>
         <p:spPr>
           <a:xfrm>
-            <a:off x="9509522" y="4395977"/>
+            <a:off x="9631439" y="4738877"/>
             <a:ext cx="2316422" cy="411480"/>
           </a:xfrm>
           <a:prstGeom prst="rect">
@@ -10395,13 +10338,13 @@
       </p:sp>
       <p:sp>
         <p:nvSpPr>
-          <p:cNvPr id="92" name="TextBox 91"/>
-          <p:cNvSpPr txBox="1"/>
-          <p:nvPr/>
-        </p:nvSpPr>
-        <p:spPr>
-          <a:xfrm>
-            <a:off x="9509522" y="4423410"/>
+          <p:cNvPr id="93" name="TextBox 92"/>
+          <p:cNvSpPr txBox="1"/>
+          <p:nvPr/>
+        </p:nvSpPr>
+        <p:spPr>
+          <a:xfrm>
+            <a:off x="9631439" y="4766310"/>
             <a:ext cx="2316422" cy="356616"/>
           </a:xfrm>
           <a:prstGeom prst="rect">
@@ -10417,7 +10360,7 @@
           <a:p>
             <a:pPr algn="l"/>
             <a:r>
-              <a:rPr sz="750" b="0">
+              <a:rPr sz="800" b="0">
                 <a:solidFill>
                   <a:srgbClr val="1A1A1A"/>
                 </a:solidFill>
@@ -10430,13 +10373,13 @@
       </p:sp>
       <p:sp>
         <p:nvSpPr>
-          <p:cNvPr id="93" name="Rectangle 92"/>
+          <p:cNvPr id="94" name="Rectangle 93"/>
           <p:cNvSpPr/>
           <p:nvPr/>
         </p:nvSpPr>
         <p:spPr>
           <a:xfrm>
-            <a:off x="365750" y="4807457"/>
+            <a:off x="487667" y="5150357"/>
             <a:ext cx="2194505" cy="411480"/>
           </a:xfrm>
           <a:prstGeom prst="rect">
@@ -10476,13 +10419,13 @@
       </p:sp>
       <p:sp>
         <p:nvSpPr>
-          <p:cNvPr id="94" name="TextBox 93"/>
-          <p:cNvSpPr txBox="1"/>
-          <p:nvPr/>
-        </p:nvSpPr>
-        <p:spPr>
-          <a:xfrm>
-            <a:off x="365750" y="4834890"/>
+          <p:cNvPr id="95" name="TextBox 94"/>
+          <p:cNvSpPr txBox="1"/>
+          <p:nvPr/>
+        </p:nvSpPr>
+        <p:spPr>
+          <a:xfrm>
+            <a:off x="487667" y="5177790"/>
             <a:ext cx="2194505" cy="356616"/>
           </a:xfrm>
           <a:prstGeom prst="rect">
@@ -10498,7 +10441,7 @@
           <a:p>
             <a:pPr algn="l"/>
             <a:r>
-              <a:rPr sz="750" b="0">
+              <a:rPr sz="800" b="0">
                 <a:solidFill>
                   <a:srgbClr val="1A1A1A"/>
                 </a:solidFill>
@@ -10511,13 +10454,13 @@
       </p:sp>
       <p:sp>
         <p:nvSpPr>
-          <p:cNvPr id="95" name="Rectangle 94"/>
+          <p:cNvPr id="96" name="Rectangle 95"/>
           <p:cNvSpPr/>
           <p:nvPr/>
         </p:nvSpPr>
         <p:spPr>
           <a:xfrm>
-            <a:off x="2560255" y="4807457"/>
+            <a:off x="2682172" y="5150357"/>
             <a:ext cx="2316422" cy="411480"/>
           </a:xfrm>
           <a:prstGeom prst="rect">
@@ -10557,13 +10500,13 @@
       </p:sp>
       <p:sp>
         <p:nvSpPr>
-          <p:cNvPr id="96" name="TextBox 95"/>
-          <p:cNvSpPr txBox="1"/>
-          <p:nvPr/>
-        </p:nvSpPr>
-        <p:spPr>
-          <a:xfrm>
-            <a:off x="2560255" y="4834890"/>
+          <p:cNvPr id="97" name="TextBox 96"/>
+          <p:cNvSpPr txBox="1"/>
+          <p:nvPr/>
+        </p:nvSpPr>
+        <p:spPr>
+          <a:xfrm>
+            <a:off x="2682172" y="5177790"/>
             <a:ext cx="2316422" cy="356616"/>
           </a:xfrm>
           <a:prstGeom prst="rect">
@@ -10579,7 +10522,7 @@
           <a:p>
             <a:pPr algn="l"/>
             <a:r>
-              <a:rPr sz="750" b="0">
+              <a:rPr sz="800" b="0">
                 <a:solidFill>
                   <a:srgbClr val="1A1A1A"/>
                 </a:solidFill>
@@ -10592,13 +10535,13 @@
       </p:sp>
       <p:sp>
         <p:nvSpPr>
-          <p:cNvPr id="97" name="Rectangle 96"/>
+          <p:cNvPr id="98" name="Rectangle 97"/>
           <p:cNvSpPr/>
           <p:nvPr/>
         </p:nvSpPr>
         <p:spPr>
           <a:xfrm>
-            <a:off x="4876678" y="4807457"/>
+            <a:off x="4998594" y="5150357"/>
             <a:ext cx="2316422" cy="411480"/>
           </a:xfrm>
           <a:prstGeom prst="rect">
@@ -10638,13 +10581,13 @@
       </p:sp>
       <p:sp>
         <p:nvSpPr>
-          <p:cNvPr id="98" name="TextBox 97"/>
-          <p:cNvSpPr txBox="1"/>
-          <p:nvPr/>
-        </p:nvSpPr>
-        <p:spPr>
-          <a:xfrm>
-            <a:off x="4876678" y="4834890"/>
+          <p:cNvPr id="99" name="TextBox 98"/>
+          <p:cNvSpPr txBox="1"/>
+          <p:nvPr/>
+        </p:nvSpPr>
+        <p:spPr>
+          <a:xfrm>
+            <a:off x="4998594" y="5177790"/>
             <a:ext cx="2316422" cy="356616"/>
           </a:xfrm>
           <a:prstGeom prst="rect">
@@ -10660,7 +10603,7 @@
           <a:p>
             <a:pPr algn="l"/>
             <a:r>
-              <a:rPr sz="750" b="0">
+              <a:rPr sz="800" b="0">
                 <a:solidFill>
                   <a:srgbClr val="1A1A1A"/>
                 </a:solidFill>
@@ -10673,13 +10616,13 @@
       </p:sp>
       <p:sp>
         <p:nvSpPr>
-          <p:cNvPr id="99" name="Rectangle 98"/>
+          <p:cNvPr id="100" name="Rectangle 99"/>
           <p:cNvSpPr/>
           <p:nvPr/>
         </p:nvSpPr>
         <p:spPr>
           <a:xfrm>
-            <a:off x="7193100" y="4807457"/>
+            <a:off x="7315017" y="5150357"/>
             <a:ext cx="2316422" cy="411480"/>
           </a:xfrm>
           <a:prstGeom prst="rect">
@@ -10719,13 +10662,13 @@
       </p:sp>
       <p:sp>
         <p:nvSpPr>
-          <p:cNvPr id="100" name="TextBox 99"/>
-          <p:cNvSpPr txBox="1"/>
-          <p:nvPr/>
-        </p:nvSpPr>
-        <p:spPr>
-          <a:xfrm>
-            <a:off x="7193100" y="4834890"/>
+          <p:cNvPr id="101" name="TextBox 100"/>
+          <p:cNvSpPr txBox="1"/>
+          <p:nvPr/>
+        </p:nvSpPr>
+        <p:spPr>
+          <a:xfrm>
+            <a:off x="7315017" y="5177790"/>
             <a:ext cx="2316422" cy="356616"/>
           </a:xfrm>
           <a:prstGeom prst="rect">
@@ -10741,7 +10684,7 @@
           <a:p>
             <a:pPr algn="l"/>
             <a:r>
-              <a:rPr sz="750" b="0">
+              <a:rPr sz="800" b="0">
                 <a:solidFill>
                   <a:srgbClr val="1A1A1A"/>
                 </a:solidFill>
@@ -10754,13 +10697,13 @@
       </p:sp>
       <p:sp>
         <p:nvSpPr>
-          <p:cNvPr id="101" name="Rectangle 100"/>
+          <p:cNvPr id="102" name="Rectangle 101"/>
           <p:cNvSpPr/>
           <p:nvPr/>
         </p:nvSpPr>
         <p:spPr>
           <a:xfrm>
-            <a:off x="9509522" y="4807457"/>
+            <a:off x="9631439" y="5150357"/>
             <a:ext cx="2316422" cy="411480"/>
           </a:xfrm>
           <a:prstGeom prst="rect">
@@ -10800,13 +10743,13 @@
       </p:sp>
       <p:sp>
         <p:nvSpPr>
-          <p:cNvPr id="102" name="TextBox 101"/>
-          <p:cNvSpPr txBox="1"/>
-          <p:nvPr/>
-        </p:nvSpPr>
-        <p:spPr>
-          <a:xfrm>
-            <a:off x="9509522" y="4834890"/>
+          <p:cNvPr id="103" name="TextBox 102"/>
+          <p:cNvSpPr txBox="1"/>
+          <p:nvPr/>
+        </p:nvSpPr>
+        <p:spPr>
+          <a:xfrm>
+            <a:off x="9631439" y="5177790"/>
             <a:ext cx="2316422" cy="356616"/>
           </a:xfrm>
           <a:prstGeom prst="rect">
@@ -10822,7 +10765,7 @@
           <a:p>
             <a:pPr algn="l"/>
             <a:r>
-              <a:rPr sz="750" b="0">
+              <a:rPr sz="800" b="0">
                 <a:solidFill>
                   <a:srgbClr val="1A1A1A"/>
                 </a:solidFill>
@@ -10835,13 +10778,13 @@
       </p:sp>
       <p:sp>
         <p:nvSpPr>
-          <p:cNvPr id="103" name="Rectangle 102"/>
+          <p:cNvPr id="104" name="Rectangle 103"/>
           <p:cNvSpPr/>
           <p:nvPr/>
         </p:nvSpPr>
         <p:spPr>
           <a:xfrm>
-            <a:off x="365750" y="5218937"/>
+            <a:off x="487667" y="5561838"/>
             <a:ext cx="2194505" cy="411480"/>
           </a:xfrm>
           <a:prstGeom prst="rect">
@@ -10881,13 +10824,13 @@
       </p:sp>
       <p:sp>
         <p:nvSpPr>
-          <p:cNvPr id="104" name="TextBox 103"/>
-          <p:cNvSpPr txBox="1"/>
-          <p:nvPr/>
-        </p:nvSpPr>
-        <p:spPr>
-          <a:xfrm>
-            <a:off x="365750" y="5246370"/>
+          <p:cNvPr id="105" name="TextBox 104"/>
+          <p:cNvSpPr txBox="1"/>
+          <p:nvPr/>
+        </p:nvSpPr>
+        <p:spPr>
+          <a:xfrm>
+            <a:off x="487667" y="5589270"/>
             <a:ext cx="2194505" cy="356616"/>
           </a:xfrm>
           <a:prstGeom prst="rect">
@@ -10903,7 +10846,7 @@
           <a:p>
             <a:pPr algn="l"/>
             <a:r>
-              <a:rPr sz="750" b="0">
+              <a:rPr sz="800" b="0">
                 <a:solidFill>
                   <a:srgbClr val="1A1A1A"/>
                 </a:solidFill>
@@ -10916,13 +10859,13 @@
       </p:sp>
       <p:sp>
         <p:nvSpPr>
-          <p:cNvPr id="105" name="Rectangle 104"/>
+          <p:cNvPr id="106" name="Rectangle 105"/>
           <p:cNvSpPr/>
           <p:nvPr/>
         </p:nvSpPr>
         <p:spPr>
           <a:xfrm>
-            <a:off x="2560255" y="5218937"/>
+            <a:off x="2682172" y="5561838"/>
             <a:ext cx="2316422" cy="411480"/>
           </a:xfrm>
           <a:prstGeom prst="rect">
@@ -10962,13 +10905,13 @@
       </p:sp>
       <p:sp>
         <p:nvSpPr>
-          <p:cNvPr id="106" name="TextBox 105"/>
-          <p:cNvSpPr txBox="1"/>
-          <p:nvPr/>
-        </p:nvSpPr>
-        <p:spPr>
-          <a:xfrm>
-            <a:off x="2560255" y="5246370"/>
+          <p:cNvPr id="107" name="TextBox 106"/>
+          <p:cNvSpPr txBox="1"/>
+          <p:nvPr/>
+        </p:nvSpPr>
+        <p:spPr>
+          <a:xfrm>
+            <a:off x="2682172" y="5589270"/>
             <a:ext cx="2316422" cy="356616"/>
           </a:xfrm>
           <a:prstGeom prst="rect">
@@ -10984,7 +10927,7 @@
           <a:p>
             <a:pPr algn="l"/>
             <a:r>
-              <a:rPr sz="750" b="0">
+              <a:rPr sz="800" b="0">
                 <a:solidFill>
                   <a:srgbClr val="1A1A1A"/>
                 </a:solidFill>
@@ -10997,13 +10940,13 @@
       </p:sp>
       <p:sp>
         <p:nvSpPr>
-          <p:cNvPr id="107" name="Rectangle 106"/>
+          <p:cNvPr id="108" name="Rectangle 107"/>
           <p:cNvSpPr/>
           <p:nvPr/>
         </p:nvSpPr>
         <p:spPr>
           <a:xfrm>
-            <a:off x="4876678" y="5218937"/>
+            <a:off x="4998594" y="5561838"/>
             <a:ext cx="2316422" cy="411480"/>
           </a:xfrm>
           <a:prstGeom prst="rect">
@@ -11043,13 +10986,13 @@
       </p:sp>
       <p:sp>
         <p:nvSpPr>
-          <p:cNvPr id="108" name="TextBox 107"/>
-          <p:cNvSpPr txBox="1"/>
-          <p:nvPr/>
-        </p:nvSpPr>
-        <p:spPr>
-          <a:xfrm>
-            <a:off x="4876678" y="5246370"/>
+          <p:cNvPr id="109" name="TextBox 108"/>
+          <p:cNvSpPr txBox="1"/>
+          <p:nvPr/>
+        </p:nvSpPr>
+        <p:spPr>
+          <a:xfrm>
+            <a:off x="4998594" y="5589270"/>
             <a:ext cx="2316422" cy="356616"/>
           </a:xfrm>
           <a:prstGeom prst="rect">
@@ -11065,7 +11008,7 @@
           <a:p>
             <a:pPr algn="l"/>
             <a:r>
-              <a:rPr sz="750" b="0">
+              <a:rPr sz="800" b="0">
                 <a:solidFill>
                   <a:srgbClr val="1A1A1A"/>
                 </a:solidFill>
@@ -11078,13 +11021,13 @@
       </p:sp>
       <p:sp>
         <p:nvSpPr>
-          <p:cNvPr id="109" name="Rectangle 108"/>
+          <p:cNvPr id="110" name="Rectangle 109"/>
           <p:cNvSpPr/>
           <p:nvPr/>
         </p:nvSpPr>
         <p:spPr>
           <a:xfrm>
-            <a:off x="7193100" y="5218937"/>
+            <a:off x="7315017" y="5561838"/>
             <a:ext cx="2316422" cy="411480"/>
           </a:xfrm>
           <a:prstGeom prst="rect">
@@ -11124,13 +11067,13 @@
       </p:sp>
       <p:sp>
         <p:nvSpPr>
-          <p:cNvPr id="110" name="TextBox 109"/>
-          <p:cNvSpPr txBox="1"/>
-          <p:nvPr/>
-        </p:nvSpPr>
-        <p:spPr>
-          <a:xfrm>
-            <a:off x="7193100" y="5246370"/>
+          <p:cNvPr id="111" name="TextBox 110"/>
+          <p:cNvSpPr txBox="1"/>
+          <p:nvPr/>
+        </p:nvSpPr>
+        <p:spPr>
+          <a:xfrm>
+            <a:off x="7315017" y="5589270"/>
             <a:ext cx="2316422" cy="356616"/>
           </a:xfrm>
           <a:prstGeom prst="rect">
@@ -11146,7 +11089,7 @@
           <a:p>
             <a:pPr algn="l"/>
             <a:r>
-              <a:rPr sz="750" b="0">
+              <a:rPr sz="800" b="0">
                 <a:solidFill>
                   <a:srgbClr val="1A1A1A"/>
                 </a:solidFill>
@@ -11159,13 +11102,13 @@
       </p:sp>
       <p:sp>
         <p:nvSpPr>
-          <p:cNvPr id="111" name="Rectangle 110"/>
+          <p:cNvPr id="112" name="Rectangle 111"/>
           <p:cNvSpPr/>
           <p:nvPr/>
         </p:nvSpPr>
         <p:spPr>
           <a:xfrm>
-            <a:off x="9509522" y="5218937"/>
+            <a:off x="9631439" y="5561838"/>
             <a:ext cx="2316422" cy="411480"/>
           </a:xfrm>
           <a:prstGeom prst="rect">
@@ -11205,13 +11148,13 @@
       </p:sp>
       <p:sp>
         <p:nvSpPr>
-          <p:cNvPr id="112" name="TextBox 111"/>
-          <p:cNvSpPr txBox="1"/>
-          <p:nvPr/>
-        </p:nvSpPr>
-        <p:spPr>
-          <a:xfrm>
-            <a:off x="9509522" y="5246370"/>
+          <p:cNvPr id="113" name="TextBox 112"/>
+          <p:cNvSpPr txBox="1"/>
+          <p:nvPr/>
+        </p:nvSpPr>
+        <p:spPr>
+          <a:xfrm>
+            <a:off x="9631439" y="5589270"/>
             <a:ext cx="2316422" cy="356616"/>
           </a:xfrm>
           <a:prstGeom prst="rect">
@@ -11227,7 +11170,7 @@
           <a:p>
             <a:pPr algn="l"/>
             <a:r>
-              <a:rPr sz="750" b="0">
+              <a:rPr sz="800" b="0">
                 <a:solidFill>
                   <a:srgbClr val="1A1A1A"/>
                 </a:solidFill>
@@ -11240,419 +11183,14 @@
       </p:sp>
       <p:sp>
         <p:nvSpPr>
-          <p:cNvPr id="113" name="Rectangle 112"/>
-          <p:cNvSpPr/>
-          <p:nvPr/>
-        </p:nvSpPr>
-        <p:spPr>
-          <a:xfrm>
-            <a:off x="365750" y="5630418"/>
-            <a:ext cx="2194505" cy="411480"/>
-          </a:xfrm>
-          <a:prstGeom prst="rect">
-            <a:avLst/>
-          </a:prstGeom>
-          <a:solidFill>
-            <a:srgbClr val="FFFFFF"/>
-          </a:solidFill>
-          <a:ln w="9525">
-            <a:solidFill>
-              <a:srgbClr val="D8D8D8"/>
-            </a:solidFill>
-          </a:ln>
-          <a:effectLst/>
-        </p:spPr>
-        <p:style>
-          <a:lnRef idx="1">
-            <a:schemeClr val="accent1"/>
-          </a:lnRef>
-          <a:fillRef idx="3">
-            <a:schemeClr val="accent1"/>
-          </a:fillRef>
-          <a:effectRef idx="2">
-            <a:schemeClr val="accent1"/>
-          </a:effectRef>
-          <a:fontRef idx="minor">
-            <a:schemeClr val="lt1"/>
-          </a:fontRef>
-        </p:style>
-        <p:txBody>
-          <a:bodyPr rtlCol="0" anchor="ctr"/>
-          <a:lstStyle/>
-          <a:p>
-            <a:pPr algn="ctr"/>
-          </a:p>
-        </p:txBody>
-      </p:sp>
-      <p:sp>
-        <p:nvSpPr>
           <p:cNvPr id="114" name="TextBox 113"/>
           <p:cNvSpPr txBox="1"/>
           <p:nvPr/>
         </p:nvSpPr>
         <p:spPr>
           <a:xfrm>
-            <a:off x="365750" y="5657850"/>
-            <a:ext cx="2194505" cy="356616"/>
-          </a:xfrm>
-          <a:prstGeom prst="rect">
-            <a:avLst/>
-          </a:prstGeom>
-          <a:noFill/>
-        </p:spPr>
-        <p:txBody>
-          <a:bodyPr wrap="square" lIns="36000" rIns="36000" tIns="18000" bIns="18000">
-            <a:spAutoFit/>
-          </a:bodyPr>
-          <a:lstStyle/>
-          <a:p>
-            <a:pPr algn="l"/>
-            <a:r>
-              <a:rPr sz="750" b="0">
-                <a:solidFill>
-                  <a:srgbClr val="1A1A1A"/>
-                </a:solidFill>
-                <a:latin typeface="Pretendard"/>
-              </a:rPr>
-              <a:t>I-11</a:t>
-            </a:r>
-          </a:p>
-        </p:txBody>
-      </p:sp>
-      <p:sp>
-        <p:nvSpPr>
-          <p:cNvPr id="115" name="Rectangle 114"/>
-          <p:cNvSpPr/>
-          <p:nvPr/>
-        </p:nvSpPr>
-        <p:spPr>
-          <a:xfrm>
-            <a:off x="2560255" y="5630418"/>
-            <a:ext cx="2316422" cy="411480"/>
-          </a:xfrm>
-          <a:prstGeom prst="rect">
-            <a:avLst/>
-          </a:prstGeom>
-          <a:solidFill>
-            <a:srgbClr val="FFFFFF"/>
-          </a:solidFill>
-          <a:ln w="9525">
-            <a:solidFill>
-              <a:srgbClr val="D8D8D8"/>
-            </a:solidFill>
-          </a:ln>
-          <a:effectLst/>
-        </p:spPr>
-        <p:style>
-          <a:lnRef idx="1">
-            <a:schemeClr val="accent1"/>
-          </a:lnRef>
-          <a:fillRef idx="3">
-            <a:schemeClr val="accent1"/>
-          </a:fillRef>
-          <a:effectRef idx="2">
-            <a:schemeClr val="accent1"/>
-          </a:effectRef>
-          <a:fontRef idx="minor">
-            <a:schemeClr val="lt1"/>
-          </a:fontRef>
-        </p:style>
-        <p:txBody>
-          <a:bodyPr rtlCol="0" anchor="ctr"/>
-          <a:lstStyle/>
-          <a:p>
-            <a:pPr algn="ctr"/>
-          </a:p>
-        </p:txBody>
-      </p:sp>
-      <p:sp>
-        <p:nvSpPr>
-          <p:cNvPr id="116" name="TextBox 115"/>
-          <p:cNvSpPr txBox="1"/>
-          <p:nvPr/>
-        </p:nvSpPr>
-        <p:spPr>
-          <a:xfrm>
-            <a:off x="2560255" y="5657850"/>
-            <a:ext cx="2316422" cy="356616"/>
-          </a:xfrm>
-          <a:prstGeom prst="rect">
-            <a:avLst/>
-          </a:prstGeom>
-          <a:noFill/>
-        </p:spPr>
-        <p:txBody>
-          <a:bodyPr wrap="square" lIns="36000" rIns="36000" tIns="18000" bIns="18000">
-            <a:spAutoFit/>
-          </a:bodyPr>
-          <a:lstStyle/>
-          <a:p>
-            <a:pPr algn="l"/>
-            <a:r>
-              <a:rPr sz="750" b="0">
-                <a:solidFill>
-                  <a:srgbClr val="1A1A1A"/>
-                </a:solidFill>
-                <a:latin typeface="Pretendard"/>
-              </a:rPr>
-              <a:t>H.Point 전환이 PC 전용 + 동의 재획득 공백</a:t>
-            </a:r>
-          </a:p>
-        </p:txBody>
-      </p:sp>
-      <p:sp>
-        <p:nvSpPr>
-          <p:cNvPr id="117" name="Rectangle 116"/>
-          <p:cNvSpPr/>
-          <p:nvPr/>
-        </p:nvSpPr>
-        <p:spPr>
-          <a:xfrm>
-            <a:off x="4876678" y="5630418"/>
-            <a:ext cx="2316422" cy="411480"/>
-          </a:xfrm>
-          <a:prstGeom prst="rect">
-            <a:avLst/>
-          </a:prstGeom>
-          <a:solidFill>
-            <a:srgbClr val="FFFFFF"/>
-          </a:solidFill>
-          <a:ln w="9525">
-            <a:solidFill>
-              <a:srgbClr val="D8D8D8"/>
-            </a:solidFill>
-          </a:ln>
-          <a:effectLst/>
-        </p:spPr>
-        <p:style>
-          <a:lnRef idx="1">
-            <a:schemeClr val="accent1"/>
-          </a:lnRef>
-          <a:fillRef idx="3">
-            <a:schemeClr val="accent1"/>
-          </a:fillRef>
-          <a:effectRef idx="2">
-            <a:schemeClr val="accent1"/>
-          </a:effectRef>
-          <a:fontRef idx="minor">
-            <a:schemeClr val="lt1"/>
-          </a:fontRef>
-        </p:style>
-        <p:txBody>
-          <a:bodyPr rtlCol="0" anchor="ctr"/>
-          <a:lstStyle/>
-          <a:p>
-            <a:pPr algn="ctr"/>
-          </a:p>
-        </p:txBody>
-      </p:sp>
-      <p:sp>
-        <p:nvSpPr>
-          <p:cNvPr id="118" name="TextBox 117"/>
-          <p:cNvSpPr txBox="1"/>
-          <p:nvPr/>
-        </p:nvSpPr>
-        <p:spPr>
-          <a:xfrm>
-            <a:off x="4876678" y="5657850"/>
-            <a:ext cx="2316422" cy="356616"/>
-          </a:xfrm>
-          <a:prstGeom prst="rect">
-            <a:avLst/>
-          </a:prstGeom>
-          <a:noFill/>
-        </p:spPr>
-        <p:txBody>
-          <a:bodyPr wrap="square" lIns="36000" rIns="36000" tIns="18000" bIns="18000">
-            <a:spAutoFit/>
-          </a:bodyPr>
-          <a:lstStyle/>
-          <a:p>
-            <a:pPr algn="l"/>
-            <a:r>
-              <a:rPr sz="750" b="0">
-                <a:solidFill>
-                  <a:srgbClr val="1A1A1A"/>
-                </a:solidFill>
-                <a:latin typeface="Pretendard"/>
-              </a:rPr>
-              <a:t>T-D</a:t>
-            </a:r>
-          </a:p>
-        </p:txBody>
-      </p:sp>
-      <p:sp>
-        <p:nvSpPr>
-          <p:cNvPr id="119" name="Rectangle 118"/>
-          <p:cNvSpPr/>
-          <p:nvPr/>
-        </p:nvSpPr>
-        <p:spPr>
-          <a:xfrm>
-            <a:off x="7193100" y="5630418"/>
-            <a:ext cx="2316422" cy="411480"/>
-          </a:xfrm>
-          <a:prstGeom prst="rect">
-            <a:avLst/>
-          </a:prstGeom>
-          <a:solidFill>
-            <a:srgbClr val="FFFFFF"/>
-          </a:solidFill>
-          <a:ln w="9525">
-            <a:solidFill>
-              <a:srgbClr val="D8D8D8"/>
-            </a:solidFill>
-          </a:ln>
-          <a:effectLst/>
-        </p:spPr>
-        <p:style>
-          <a:lnRef idx="1">
-            <a:schemeClr val="accent1"/>
-          </a:lnRef>
-          <a:fillRef idx="3">
-            <a:schemeClr val="accent1"/>
-          </a:fillRef>
-          <a:effectRef idx="2">
-            <a:schemeClr val="accent1"/>
-          </a:effectRef>
-          <a:fontRef idx="minor">
-            <a:schemeClr val="lt1"/>
-          </a:fontRef>
-        </p:style>
-        <p:txBody>
-          <a:bodyPr rtlCol="0" anchor="ctr"/>
-          <a:lstStyle/>
-          <a:p>
-            <a:pPr algn="ctr"/>
-          </a:p>
-        </p:txBody>
-      </p:sp>
-      <p:sp>
-        <p:nvSpPr>
-          <p:cNvPr id="120" name="TextBox 119"/>
-          <p:cNvSpPr txBox="1"/>
-          <p:nvPr/>
-        </p:nvSpPr>
-        <p:spPr>
-          <a:xfrm>
-            <a:off x="7193100" y="5657850"/>
-            <a:ext cx="2316422" cy="356616"/>
-          </a:xfrm>
-          <a:prstGeom prst="rect">
-            <a:avLst/>
-          </a:prstGeom>
-          <a:noFill/>
-        </p:spPr>
-        <p:txBody>
-          <a:bodyPr wrap="square" lIns="36000" rIns="36000" tIns="18000" bIns="18000">
-            <a:spAutoFit/>
-          </a:bodyPr>
-          <a:lstStyle/>
-          <a:p>
-            <a:pPr algn="l"/>
-            <a:r>
-              <a:rPr sz="750" b="0">
-                <a:solidFill>
-                  <a:srgbClr val="1A1A1A"/>
-                </a:solidFill>
-                <a:latin typeface="Pretendard"/>
-              </a:rPr>
-              <a:t>상</a:t>
-            </a:r>
-          </a:p>
-        </p:txBody>
-      </p:sp>
-      <p:sp>
-        <p:nvSpPr>
-          <p:cNvPr id="121" name="Rectangle 120"/>
-          <p:cNvSpPr/>
-          <p:nvPr/>
-        </p:nvSpPr>
-        <p:spPr>
-          <a:xfrm>
-            <a:off x="9509522" y="5630418"/>
-            <a:ext cx="2316422" cy="411480"/>
-          </a:xfrm>
-          <a:prstGeom prst="rect">
-            <a:avLst/>
-          </a:prstGeom>
-          <a:solidFill>
-            <a:srgbClr val="FFFFFF"/>
-          </a:solidFill>
-          <a:ln w="9525">
-            <a:solidFill>
-              <a:srgbClr val="D8D8D8"/>
-            </a:solidFill>
-          </a:ln>
-          <a:effectLst/>
-        </p:spPr>
-        <p:style>
-          <a:lnRef idx="1">
-            <a:schemeClr val="accent1"/>
-          </a:lnRef>
-          <a:fillRef idx="3">
-            <a:schemeClr val="accent1"/>
-          </a:fillRef>
-          <a:effectRef idx="2">
-            <a:schemeClr val="accent1"/>
-          </a:effectRef>
-          <a:fontRef idx="minor">
-            <a:schemeClr val="lt1"/>
-          </a:fontRef>
-        </p:style>
-        <p:txBody>
-          <a:bodyPr rtlCol="0" anchor="ctr"/>
-          <a:lstStyle/>
-          <a:p>
-            <a:pPr algn="ctr"/>
-          </a:p>
-        </p:txBody>
-      </p:sp>
-      <p:sp>
-        <p:nvSpPr>
-          <p:cNvPr id="122" name="TextBox 121"/>
-          <p:cNvSpPr txBox="1"/>
-          <p:nvPr/>
-        </p:nvSpPr>
-        <p:spPr>
-          <a:xfrm>
-            <a:off x="9509522" y="5657850"/>
-            <a:ext cx="2316422" cy="356616"/>
-          </a:xfrm>
-          <a:prstGeom prst="rect">
-            <a:avLst/>
-          </a:prstGeom>
-          <a:noFill/>
-        </p:spPr>
-        <p:txBody>
-          <a:bodyPr wrap="square" lIns="36000" rIns="36000" tIns="18000" bIns="18000">
-            <a:spAutoFit/>
-          </a:bodyPr>
-          <a:lstStyle/>
-          <a:p>
-            <a:pPr algn="l"/>
-            <a:r>
-              <a:rPr sz="750" b="0">
-                <a:solidFill>
-                  <a:srgbClr val="1A1A1A"/>
-                </a:solidFill>
-                <a:latin typeface="Pretendard"/>
-              </a:rPr>
-              <a:t>212(정책요건분석) · 341(화면명세서작성)</a:t>
-            </a:r>
-          </a:p>
-        </p:txBody>
-      </p:sp>
-      <p:sp>
-        <p:nvSpPr>
-          <p:cNvPr id="123" name="TextBox 122"/>
-          <p:cNvSpPr txBox="1"/>
-          <p:nvPr/>
-        </p:nvSpPr>
-        <p:spPr>
-          <a:xfrm>
-            <a:off x="365750" y="6110478"/>
-            <a:ext cx="10972525" cy="274320"/>
+            <a:off x="487667" y="6041898"/>
+            <a:ext cx="11216359" cy="274320"/>
           </a:xfrm>
           <a:prstGeom prst="rect">
             <a:avLst/>
@@ -11673,14 +11211,14 @@
                 </a:solidFill>
                 <a:latin typeface="Pretendard"/>
               </a:rPr>
-              <a:t>※ 이하 3행은 원장·문서 참조</a:t>
-            </a:r>
-          </a:p>
-        </p:txBody>
-      </p:sp>
-      <p:sp>
-        <p:nvSpPr>
-          <p:cNvPr id="124" name="TextBox 123"/>
+              <a:t>※ 이하 4행은 원장·문서 참조</a:t>
+            </a:r>
+          </a:p>
+        </p:txBody>
+      </p:sp>
+      <p:sp>
+        <p:nvSpPr>
+          <p:cNvPr id="115" name="TextBox 114"/>
           <p:cNvSpPr txBox="1"/>
           <p:nvPr/>
         </p:nvSpPr>
@@ -11715,7 +11253,7 @@
       </p:sp>
       <p:sp>
         <p:nvSpPr>
-          <p:cNvPr id="125" name="TextBox 124"/>
+          <p:cNvPr id="116" name="TextBox 115"/>
           <p:cNvSpPr txBox="1"/>
           <p:nvPr/>
         </p:nvSpPr>
@@ -11774,42 +11312,77 @@
         </p:nvSpPr>
         <p:spPr>
           <a:xfrm>
-            <a:off x="365750" y="274320"/>
-            <a:ext cx="10972525" cy="480060"/>
-          </a:xfrm>
-          <a:prstGeom prst="rect">
-            <a:avLst/>
-          </a:prstGeom>
-          <a:noFill/>
-        </p:spPr>
-        <p:txBody>
-          <a:bodyPr wrap="square" lIns="36000" rIns="36000" tIns="18000" bIns="18000">
-            <a:spAutoFit/>
-          </a:bodyPr>
-          <a:lstStyle/>
-          <a:p>
-            <a:pPr algn="l"/>
-            <a:r>
-              <a:rPr sz="1700" b="1">
+            <a:off x="487667" y="137160"/>
+            <a:ext cx="7315017" cy="274320"/>
+          </a:xfrm>
+          <a:prstGeom prst="rect">
+            <a:avLst/>
+          </a:prstGeom>
+          <a:noFill/>
+        </p:spPr>
+        <p:txBody>
+          <a:bodyPr wrap="square" lIns="36000" rIns="36000" tIns="18000" bIns="18000">
+            <a:spAutoFit/>
+          </a:bodyPr>
+          <a:lstStyle/>
+          <a:p>
+            <a:pPr algn="l"/>
+            <a:r>
+              <a:rPr sz="900" b="0">
+                <a:solidFill>
+                  <a:srgbClr val="767676"/>
+                </a:solidFill>
+                <a:latin typeface="Pretendard"/>
+              </a:rPr>
+              <a:t>기초분석 시사점</a:t>
+            </a:r>
+          </a:p>
+        </p:txBody>
+      </p:sp>
+      <p:sp>
+        <p:nvSpPr>
+          <p:cNvPr id="3" name="TextBox 2"/>
+          <p:cNvSpPr txBox="1"/>
+          <p:nvPr/>
+        </p:nvSpPr>
+        <p:spPr>
+          <a:xfrm>
+            <a:off x="487667" y="548640"/>
+            <a:ext cx="11216359" cy="548640"/>
+          </a:xfrm>
+          <a:prstGeom prst="rect">
+            <a:avLst/>
+          </a:prstGeom>
+          <a:noFill/>
+        </p:spPr>
+        <p:txBody>
+          <a:bodyPr wrap="square" lIns="36000" rIns="36000" tIns="18000" bIns="18000">
+            <a:spAutoFit/>
+          </a:bodyPr>
+          <a:lstStyle/>
+          <a:p>
+            <a:pPr algn="l"/>
+            <a:r>
+              <a:rPr sz="2400" b="1">
                 <a:solidFill>
                   <a:srgbClr val="1A1A1A"/>
                 </a:solidFill>
                 <a:latin typeface="Pretendard"/>
               </a:rPr>
-              <a:t>4. 상충 · 미결 (봉합하지 않음)</a:t>
-            </a:r>
-          </a:p>
-        </p:txBody>
-      </p:sp>
-      <p:sp>
-        <p:nvSpPr>
-          <p:cNvPr id="3" name="Rectangle 2"/>
+              <a:t>상충 · 미결 (봉합하지 않음)</a:t>
+            </a:r>
+          </a:p>
+        </p:txBody>
+      </p:sp>
+      <p:sp>
+        <p:nvSpPr>
+          <p:cNvPr id="4" name="Rectangle 3"/>
           <p:cNvSpPr/>
           <p:nvPr/>
         </p:nvSpPr>
         <p:spPr>
           <a:xfrm>
-            <a:off x="365750" y="891540"/>
+            <a:off x="487667" y="1234440"/>
             <a:ext cx="3169840" cy="377190"/>
           </a:xfrm>
           <a:prstGeom prst="rect">
@@ -11849,13 +11422,13 @@
       </p:sp>
       <p:sp>
         <p:nvSpPr>
-          <p:cNvPr id="4" name="TextBox 3"/>
-          <p:cNvSpPr txBox="1"/>
-          <p:nvPr/>
-        </p:nvSpPr>
-        <p:spPr>
-          <a:xfrm>
-            <a:off x="365750" y="946404"/>
+          <p:cNvPr id="5" name="TextBox 4"/>
+          <p:cNvSpPr txBox="1"/>
+          <p:nvPr/>
+        </p:nvSpPr>
+        <p:spPr>
+          <a:xfrm>
+            <a:off x="487667" y="1289304"/>
             <a:ext cx="3169840" cy="301752"/>
           </a:xfrm>
           <a:prstGeom prst="rect">
@@ -11884,13 +11457,13 @@
       </p:sp>
       <p:sp>
         <p:nvSpPr>
-          <p:cNvPr id="5" name="Rectangle 4"/>
+          <p:cNvPr id="6" name="Rectangle 5"/>
           <p:cNvSpPr/>
           <p:nvPr/>
         </p:nvSpPr>
         <p:spPr>
           <a:xfrm>
-            <a:off x="3535591" y="891540"/>
+            <a:off x="3657508" y="1234440"/>
             <a:ext cx="4145176" cy="377190"/>
           </a:xfrm>
           <a:prstGeom prst="rect">
@@ -11930,13 +11503,13 @@
       </p:sp>
       <p:sp>
         <p:nvSpPr>
-          <p:cNvPr id="6" name="TextBox 5"/>
-          <p:cNvSpPr txBox="1"/>
-          <p:nvPr/>
-        </p:nvSpPr>
-        <p:spPr>
-          <a:xfrm>
-            <a:off x="3535591" y="946404"/>
+          <p:cNvPr id="7" name="TextBox 6"/>
+          <p:cNvSpPr txBox="1"/>
+          <p:nvPr/>
+        </p:nvSpPr>
+        <p:spPr>
+          <a:xfrm>
+            <a:off x="3657508" y="1289304"/>
             <a:ext cx="4145176" cy="301752"/>
           </a:xfrm>
           <a:prstGeom prst="rect">
@@ -11965,13 +11538,13 @@
       </p:sp>
       <p:sp>
         <p:nvSpPr>
-          <p:cNvPr id="7" name="Rectangle 6"/>
+          <p:cNvPr id="8" name="Rectangle 7"/>
           <p:cNvSpPr/>
           <p:nvPr/>
         </p:nvSpPr>
         <p:spPr>
           <a:xfrm>
-            <a:off x="7680767" y="891540"/>
+            <a:off x="7802684" y="1234440"/>
             <a:ext cx="4145176" cy="377190"/>
           </a:xfrm>
           <a:prstGeom prst="rect">
@@ -12011,13 +11584,13 @@
       </p:sp>
       <p:sp>
         <p:nvSpPr>
-          <p:cNvPr id="8" name="TextBox 7"/>
-          <p:cNvSpPr txBox="1"/>
-          <p:nvPr/>
-        </p:nvSpPr>
-        <p:spPr>
-          <a:xfrm>
-            <a:off x="7680767" y="946404"/>
+          <p:cNvPr id="9" name="TextBox 8"/>
+          <p:cNvSpPr txBox="1"/>
+          <p:nvPr/>
+        </p:nvSpPr>
+        <p:spPr>
+          <a:xfrm>
+            <a:off x="7802684" y="1289304"/>
             <a:ext cx="4145176" cy="301752"/>
           </a:xfrm>
           <a:prstGeom prst="rect">
@@ -12046,13 +11619,13 @@
       </p:sp>
       <p:sp>
         <p:nvSpPr>
-          <p:cNvPr id="9" name="Rectangle 8"/>
+          <p:cNvPr id="10" name="Rectangle 9"/>
           <p:cNvSpPr/>
           <p:nvPr/>
         </p:nvSpPr>
         <p:spPr>
           <a:xfrm>
-            <a:off x="365750" y="1268730"/>
+            <a:off x="487667" y="1611630"/>
             <a:ext cx="3169840" cy="411480"/>
           </a:xfrm>
           <a:prstGeom prst="rect">
@@ -12092,13 +11665,13 @@
       </p:sp>
       <p:sp>
         <p:nvSpPr>
-          <p:cNvPr id="10" name="TextBox 9"/>
-          <p:cNvSpPr txBox="1"/>
-          <p:nvPr/>
-        </p:nvSpPr>
-        <p:spPr>
-          <a:xfrm>
-            <a:off x="365750" y="1296161"/>
+          <p:cNvPr id="11" name="TextBox 10"/>
+          <p:cNvSpPr txBox="1"/>
+          <p:nvPr/>
+        </p:nvSpPr>
+        <p:spPr>
+          <a:xfrm>
+            <a:off x="487667" y="1639062"/>
             <a:ext cx="3169840" cy="356616"/>
           </a:xfrm>
           <a:prstGeom prst="rect">
@@ -12114,7 +11687,7 @@
           <a:p>
             <a:pPr algn="l"/>
             <a:r>
-              <a:rPr sz="750" b="0">
+              <a:rPr sz="800" b="0">
                 <a:solidFill>
                   <a:srgbClr val="1A1A1A"/>
                 </a:solidFill>
@@ -12127,13 +11700,13 @@
       </p:sp>
       <p:sp>
         <p:nvSpPr>
-          <p:cNvPr id="11" name="Rectangle 10"/>
+          <p:cNvPr id="12" name="Rectangle 11"/>
           <p:cNvSpPr/>
           <p:nvPr/>
         </p:nvSpPr>
         <p:spPr>
           <a:xfrm>
-            <a:off x="3535591" y="1268730"/>
+            <a:off x="3657508" y="1611630"/>
             <a:ext cx="4145176" cy="411480"/>
           </a:xfrm>
           <a:prstGeom prst="rect">
@@ -12173,13 +11746,13 @@
       </p:sp>
       <p:sp>
         <p:nvSpPr>
-          <p:cNvPr id="12" name="TextBox 11"/>
-          <p:cNvSpPr txBox="1"/>
-          <p:nvPr/>
-        </p:nvSpPr>
-        <p:spPr>
-          <a:xfrm>
-            <a:off x="3535591" y="1296161"/>
+          <p:cNvPr id="13" name="TextBox 12"/>
+          <p:cNvSpPr txBox="1"/>
+          <p:nvPr/>
+        </p:nvSpPr>
+        <p:spPr>
+          <a:xfrm>
+            <a:off x="3657508" y="1639062"/>
             <a:ext cx="4145176" cy="356616"/>
           </a:xfrm>
           <a:prstGeom prst="rect">
@@ -12195,7 +11768,7 @@
           <a:p>
             <a:pPr algn="l"/>
             <a:r>
-              <a:rPr sz="750" b="0">
+              <a:rPr sz="800" b="0">
                 <a:solidFill>
                   <a:srgbClr val="1A1A1A"/>
                 </a:solidFill>
@@ -12208,13 +11781,13 @@
       </p:sp>
       <p:sp>
         <p:nvSpPr>
-          <p:cNvPr id="13" name="Rectangle 12"/>
+          <p:cNvPr id="14" name="Rectangle 13"/>
           <p:cNvSpPr/>
           <p:nvPr/>
         </p:nvSpPr>
         <p:spPr>
           <a:xfrm>
-            <a:off x="7680767" y="1268730"/>
+            <a:off x="7802684" y="1611630"/>
             <a:ext cx="4145176" cy="411480"/>
           </a:xfrm>
           <a:prstGeom prst="rect">
@@ -12254,13 +11827,13 @@
       </p:sp>
       <p:sp>
         <p:nvSpPr>
-          <p:cNvPr id="14" name="TextBox 13"/>
-          <p:cNvSpPr txBox="1"/>
-          <p:nvPr/>
-        </p:nvSpPr>
-        <p:spPr>
-          <a:xfrm>
-            <a:off x="7680767" y="1296161"/>
+          <p:cNvPr id="15" name="TextBox 14"/>
+          <p:cNvSpPr txBox="1"/>
+          <p:nvPr/>
+        </p:nvSpPr>
+        <p:spPr>
+          <a:xfrm>
+            <a:off x="7802684" y="1639062"/>
             <a:ext cx="4145176" cy="356616"/>
           </a:xfrm>
           <a:prstGeom prst="rect">
@@ -12276,7 +11849,7 @@
           <a:p>
             <a:pPr algn="l"/>
             <a:r>
-              <a:rPr sz="750" b="0">
+              <a:rPr sz="800" b="0">
                 <a:solidFill>
                   <a:srgbClr val="1A1A1A"/>
                 </a:solidFill>
@@ -12289,13 +11862,13 @@
       </p:sp>
       <p:sp>
         <p:nvSpPr>
-          <p:cNvPr id="15" name="Rectangle 14"/>
+          <p:cNvPr id="16" name="Rectangle 15"/>
           <p:cNvSpPr/>
           <p:nvPr/>
         </p:nvSpPr>
         <p:spPr>
           <a:xfrm>
-            <a:off x="365750" y="1680210"/>
+            <a:off x="487667" y="2023110"/>
             <a:ext cx="3169840" cy="699516"/>
           </a:xfrm>
           <a:prstGeom prst="rect">
@@ -12335,13 +11908,13 @@
       </p:sp>
       <p:sp>
         <p:nvSpPr>
-          <p:cNvPr id="16" name="TextBox 15"/>
-          <p:cNvSpPr txBox="1"/>
-          <p:nvPr/>
-        </p:nvSpPr>
-        <p:spPr>
-          <a:xfrm>
-            <a:off x="365750" y="1707642"/>
+          <p:cNvPr id="17" name="TextBox 16"/>
+          <p:cNvSpPr txBox="1"/>
+          <p:nvPr/>
+        </p:nvSpPr>
+        <p:spPr>
+          <a:xfrm>
+            <a:off x="487667" y="2050542"/>
             <a:ext cx="3169840" cy="644651"/>
           </a:xfrm>
           <a:prstGeom prst="rect">
@@ -12357,7 +11930,7 @@
           <a:p>
             <a:pPr algn="l"/>
             <a:r>
-              <a:rPr sz="750" b="0">
+              <a:rPr sz="800" b="0">
                 <a:solidFill>
                   <a:srgbClr val="1A1A1A"/>
                 </a:solidFill>
@@ -12370,13 +11943,13 @@
       </p:sp>
       <p:sp>
         <p:nvSpPr>
-          <p:cNvPr id="17" name="Rectangle 16"/>
+          <p:cNvPr id="18" name="Rectangle 17"/>
           <p:cNvSpPr/>
           <p:nvPr/>
         </p:nvSpPr>
         <p:spPr>
           <a:xfrm>
-            <a:off x="3535591" y="1680210"/>
+            <a:off x="3657508" y="2023110"/>
             <a:ext cx="4145176" cy="699516"/>
           </a:xfrm>
           <a:prstGeom prst="rect">
@@ -12416,13 +11989,13 @@
       </p:sp>
       <p:sp>
         <p:nvSpPr>
-          <p:cNvPr id="18" name="TextBox 17"/>
-          <p:cNvSpPr txBox="1"/>
-          <p:nvPr/>
-        </p:nvSpPr>
-        <p:spPr>
-          <a:xfrm>
-            <a:off x="3535591" y="1707642"/>
+          <p:cNvPr id="19" name="TextBox 18"/>
+          <p:cNvSpPr txBox="1"/>
+          <p:nvPr/>
+        </p:nvSpPr>
+        <p:spPr>
+          <a:xfrm>
+            <a:off x="3657508" y="2050542"/>
             <a:ext cx="4145176" cy="644651"/>
           </a:xfrm>
           <a:prstGeom prst="rect">
@@ -12438,7 +12011,7 @@
           <a:p>
             <a:pPr algn="l"/>
             <a:r>
-              <a:rPr sz="750" b="0">
+              <a:rPr sz="800" b="0">
                 <a:solidFill>
                   <a:srgbClr val="1A1A1A"/>
                 </a:solidFill>
@@ -12451,13 +12024,13 @@
       </p:sp>
       <p:sp>
         <p:nvSpPr>
-          <p:cNvPr id="19" name="Rectangle 18"/>
+          <p:cNvPr id="20" name="Rectangle 19"/>
           <p:cNvSpPr/>
           <p:nvPr/>
         </p:nvSpPr>
         <p:spPr>
           <a:xfrm>
-            <a:off x="7680767" y="1680210"/>
+            <a:off x="7802684" y="2023110"/>
             <a:ext cx="4145176" cy="699516"/>
           </a:xfrm>
           <a:prstGeom prst="rect">
@@ -12497,13 +12070,13 @@
       </p:sp>
       <p:sp>
         <p:nvSpPr>
-          <p:cNvPr id="20" name="TextBox 19"/>
-          <p:cNvSpPr txBox="1"/>
-          <p:nvPr/>
-        </p:nvSpPr>
-        <p:spPr>
-          <a:xfrm>
-            <a:off x="7680767" y="1707642"/>
+          <p:cNvPr id="21" name="TextBox 20"/>
+          <p:cNvSpPr txBox="1"/>
+          <p:nvPr/>
+        </p:nvSpPr>
+        <p:spPr>
+          <a:xfrm>
+            <a:off x="7802684" y="2050542"/>
             <a:ext cx="4145176" cy="644651"/>
           </a:xfrm>
           <a:prstGeom prst="rect">
@@ -12519,7 +12092,7 @@
           <a:p>
             <a:pPr algn="l"/>
             <a:r>
-              <a:rPr sz="750" b="0">
+              <a:rPr sz="800" b="0">
                 <a:solidFill>
                   <a:srgbClr val="1A1A1A"/>
                 </a:solidFill>
@@ -12532,13 +12105,13 @@
       </p:sp>
       <p:sp>
         <p:nvSpPr>
-          <p:cNvPr id="21" name="Rectangle 20"/>
+          <p:cNvPr id="22" name="Rectangle 21"/>
           <p:cNvSpPr/>
           <p:nvPr/>
         </p:nvSpPr>
         <p:spPr>
           <a:xfrm>
-            <a:off x="365750" y="2379726"/>
+            <a:off x="487667" y="2722626"/>
             <a:ext cx="3169840" cy="411480"/>
           </a:xfrm>
           <a:prstGeom prst="rect">
@@ -12578,13 +12151,13 @@
       </p:sp>
       <p:sp>
         <p:nvSpPr>
-          <p:cNvPr id="22" name="TextBox 21"/>
-          <p:cNvSpPr txBox="1"/>
-          <p:nvPr/>
-        </p:nvSpPr>
-        <p:spPr>
-          <a:xfrm>
-            <a:off x="365750" y="2407158"/>
+          <p:cNvPr id="23" name="TextBox 22"/>
+          <p:cNvSpPr txBox="1"/>
+          <p:nvPr/>
+        </p:nvSpPr>
+        <p:spPr>
+          <a:xfrm>
+            <a:off x="487667" y="2750058"/>
             <a:ext cx="3169840" cy="356616"/>
           </a:xfrm>
           <a:prstGeom prst="rect">
@@ -12600,7 +12173,7 @@
           <a:p>
             <a:pPr algn="l"/>
             <a:r>
-              <a:rPr sz="750" b="0">
+              <a:rPr sz="800" b="0">
                 <a:solidFill>
                   <a:srgbClr val="1A1A1A"/>
                 </a:solidFill>
@@ -12613,13 +12186,13 @@
       </p:sp>
       <p:sp>
         <p:nvSpPr>
-          <p:cNvPr id="23" name="Rectangle 22"/>
+          <p:cNvPr id="24" name="Rectangle 23"/>
           <p:cNvSpPr/>
           <p:nvPr/>
         </p:nvSpPr>
         <p:spPr>
           <a:xfrm>
-            <a:off x="3535591" y="2379726"/>
+            <a:off x="3657508" y="2722626"/>
             <a:ext cx="4145176" cy="411480"/>
           </a:xfrm>
           <a:prstGeom prst="rect">
@@ -12659,13 +12232,13 @@
       </p:sp>
       <p:sp>
         <p:nvSpPr>
-          <p:cNvPr id="24" name="TextBox 23"/>
-          <p:cNvSpPr txBox="1"/>
-          <p:nvPr/>
-        </p:nvSpPr>
-        <p:spPr>
-          <a:xfrm>
-            <a:off x="3535591" y="2407158"/>
+          <p:cNvPr id="25" name="TextBox 24"/>
+          <p:cNvSpPr txBox="1"/>
+          <p:nvPr/>
+        </p:nvSpPr>
+        <p:spPr>
+          <a:xfrm>
+            <a:off x="3657508" y="2750058"/>
             <a:ext cx="4145176" cy="356616"/>
           </a:xfrm>
           <a:prstGeom prst="rect">
@@ -12681,7 +12254,7 @@
           <a:p>
             <a:pPr algn="l"/>
             <a:r>
-              <a:rPr sz="750" b="0">
+              <a:rPr sz="800" b="0">
                 <a:solidFill>
                   <a:srgbClr val="1A1A1A"/>
                 </a:solidFill>
@@ -12694,13 +12267,13 @@
       </p:sp>
       <p:sp>
         <p:nvSpPr>
-          <p:cNvPr id="25" name="Rectangle 24"/>
+          <p:cNvPr id="26" name="Rectangle 25"/>
           <p:cNvSpPr/>
           <p:nvPr/>
         </p:nvSpPr>
         <p:spPr>
           <a:xfrm>
-            <a:off x="7680767" y="2379726"/>
+            <a:off x="7802684" y="2722626"/>
             <a:ext cx="4145176" cy="411480"/>
           </a:xfrm>
           <a:prstGeom prst="rect">
@@ -12740,13 +12313,13 @@
       </p:sp>
       <p:sp>
         <p:nvSpPr>
-          <p:cNvPr id="26" name="TextBox 25"/>
-          <p:cNvSpPr txBox="1"/>
-          <p:nvPr/>
-        </p:nvSpPr>
-        <p:spPr>
-          <a:xfrm>
-            <a:off x="7680767" y="2407158"/>
+          <p:cNvPr id="27" name="TextBox 26"/>
+          <p:cNvSpPr txBox="1"/>
+          <p:nvPr/>
+        </p:nvSpPr>
+        <p:spPr>
+          <a:xfrm>
+            <a:off x="7802684" y="2750058"/>
             <a:ext cx="4145176" cy="356616"/>
           </a:xfrm>
           <a:prstGeom prst="rect">
@@ -12762,7 +12335,7 @@
           <a:p>
             <a:pPr algn="l"/>
             <a:r>
-              <a:rPr sz="750" b="0">
+              <a:rPr sz="800" b="0">
                 <a:solidFill>
                   <a:srgbClr val="1A1A1A"/>
                 </a:solidFill>
@@ -12775,13 +12348,13 @@
       </p:sp>
       <p:sp>
         <p:nvSpPr>
-          <p:cNvPr id="27" name="Rectangle 26"/>
+          <p:cNvPr id="28" name="Rectangle 27"/>
           <p:cNvSpPr/>
           <p:nvPr/>
         </p:nvSpPr>
         <p:spPr>
           <a:xfrm>
-            <a:off x="365750" y="2791206"/>
+            <a:off x="487667" y="3134106"/>
             <a:ext cx="3169840" cy="411480"/>
           </a:xfrm>
           <a:prstGeom prst="rect">
@@ -12821,13 +12394,13 @@
       </p:sp>
       <p:sp>
         <p:nvSpPr>
-          <p:cNvPr id="28" name="TextBox 27"/>
-          <p:cNvSpPr txBox="1"/>
-          <p:nvPr/>
-        </p:nvSpPr>
-        <p:spPr>
-          <a:xfrm>
-            <a:off x="365750" y="2818638"/>
+          <p:cNvPr id="29" name="TextBox 28"/>
+          <p:cNvSpPr txBox="1"/>
+          <p:nvPr/>
+        </p:nvSpPr>
+        <p:spPr>
+          <a:xfrm>
+            <a:off x="487667" y="3161538"/>
             <a:ext cx="3169840" cy="356616"/>
           </a:xfrm>
           <a:prstGeom prst="rect">
@@ -12843,7 +12416,7 @@
           <a:p>
             <a:pPr algn="l"/>
             <a:r>
-              <a:rPr sz="750" b="0">
+              <a:rPr sz="800" b="0">
                 <a:solidFill>
                   <a:srgbClr val="1A1A1A"/>
                 </a:solidFill>
@@ -12856,13 +12429,13 @@
       </p:sp>
       <p:sp>
         <p:nvSpPr>
-          <p:cNvPr id="29" name="Rectangle 28"/>
+          <p:cNvPr id="30" name="Rectangle 29"/>
           <p:cNvSpPr/>
           <p:nvPr/>
         </p:nvSpPr>
         <p:spPr>
           <a:xfrm>
-            <a:off x="3535591" y="2791206"/>
+            <a:off x="3657508" y="3134106"/>
             <a:ext cx="4145176" cy="411480"/>
           </a:xfrm>
           <a:prstGeom prst="rect">
@@ -12902,13 +12475,13 @@
       </p:sp>
       <p:sp>
         <p:nvSpPr>
-          <p:cNvPr id="30" name="TextBox 29"/>
-          <p:cNvSpPr txBox="1"/>
-          <p:nvPr/>
-        </p:nvSpPr>
-        <p:spPr>
-          <a:xfrm>
-            <a:off x="3535591" y="2818638"/>
+          <p:cNvPr id="31" name="TextBox 30"/>
+          <p:cNvSpPr txBox="1"/>
+          <p:nvPr/>
+        </p:nvSpPr>
+        <p:spPr>
+          <a:xfrm>
+            <a:off x="3657508" y="3161538"/>
             <a:ext cx="4145176" cy="356616"/>
           </a:xfrm>
           <a:prstGeom prst="rect">
@@ -12924,7 +12497,7 @@
           <a:p>
             <a:pPr algn="l"/>
             <a:r>
-              <a:rPr sz="750" b="0">
+              <a:rPr sz="800" b="0">
                 <a:solidFill>
                   <a:srgbClr val="1A1A1A"/>
                 </a:solidFill>
@@ -12937,13 +12510,13 @@
       </p:sp>
       <p:sp>
         <p:nvSpPr>
-          <p:cNvPr id="31" name="Rectangle 30"/>
+          <p:cNvPr id="32" name="Rectangle 31"/>
           <p:cNvSpPr/>
           <p:nvPr/>
         </p:nvSpPr>
         <p:spPr>
           <a:xfrm>
-            <a:off x="7680767" y="2791206"/>
+            <a:off x="7802684" y="3134106"/>
             <a:ext cx="4145176" cy="411480"/>
           </a:xfrm>
           <a:prstGeom prst="rect">
@@ -12983,13 +12556,13 @@
       </p:sp>
       <p:sp>
         <p:nvSpPr>
-          <p:cNvPr id="32" name="TextBox 31"/>
-          <p:cNvSpPr txBox="1"/>
-          <p:nvPr/>
-        </p:nvSpPr>
-        <p:spPr>
-          <a:xfrm>
-            <a:off x="7680767" y="2818638"/>
+          <p:cNvPr id="33" name="TextBox 32"/>
+          <p:cNvSpPr txBox="1"/>
+          <p:nvPr/>
+        </p:nvSpPr>
+        <p:spPr>
+          <a:xfrm>
+            <a:off x="7802684" y="3161538"/>
             <a:ext cx="4145176" cy="356616"/>
           </a:xfrm>
           <a:prstGeom prst="rect">
@@ -13005,7 +12578,7 @@
           <a:p>
             <a:pPr algn="l"/>
             <a:r>
-              <a:rPr sz="750" b="0">
+              <a:rPr sz="800" b="0">
                 <a:solidFill>
                   <a:srgbClr val="1A1A1A"/>
                 </a:solidFill>
@@ -13018,13 +12591,13 @@
       </p:sp>
       <p:sp>
         <p:nvSpPr>
-          <p:cNvPr id="33" name="Rectangle 32"/>
+          <p:cNvPr id="34" name="Rectangle 33"/>
           <p:cNvSpPr/>
           <p:nvPr/>
         </p:nvSpPr>
         <p:spPr>
           <a:xfrm>
-            <a:off x="365750" y="3202686"/>
+            <a:off x="487667" y="3545586"/>
             <a:ext cx="3169840" cy="411480"/>
           </a:xfrm>
           <a:prstGeom prst="rect">
@@ -13064,13 +12637,13 @@
       </p:sp>
       <p:sp>
         <p:nvSpPr>
-          <p:cNvPr id="34" name="TextBox 33"/>
-          <p:cNvSpPr txBox="1"/>
-          <p:nvPr/>
-        </p:nvSpPr>
-        <p:spPr>
-          <a:xfrm>
-            <a:off x="365750" y="3230118"/>
+          <p:cNvPr id="35" name="TextBox 34"/>
+          <p:cNvSpPr txBox="1"/>
+          <p:nvPr/>
+        </p:nvSpPr>
+        <p:spPr>
+          <a:xfrm>
+            <a:off x="487667" y="3573018"/>
             <a:ext cx="3169840" cy="356616"/>
           </a:xfrm>
           <a:prstGeom prst="rect">
@@ -13086,7 +12659,7 @@
           <a:p>
             <a:pPr algn="l"/>
             <a:r>
-              <a:rPr sz="750" b="0">
+              <a:rPr sz="800" b="0">
                 <a:solidFill>
                   <a:srgbClr val="1A1A1A"/>
                 </a:solidFill>
@@ -13099,13 +12672,13 @@
       </p:sp>
       <p:sp>
         <p:nvSpPr>
-          <p:cNvPr id="35" name="Rectangle 34"/>
+          <p:cNvPr id="36" name="Rectangle 35"/>
           <p:cNvSpPr/>
           <p:nvPr/>
         </p:nvSpPr>
         <p:spPr>
           <a:xfrm>
-            <a:off x="3535591" y="3202686"/>
+            <a:off x="3657508" y="3545586"/>
             <a:ext cx="4145176" cy="411480"/>
           </a:xfrm>
           <a:prstGeom prst="rect">
@@ -13145,13 +12718,13 @@
       </p:sp>
       <p:sp>
         <p:nvSpPr>
-          <p:cNvPr id="36" name="TextBox 35"/>
-          <p:cNvSpPr txBox="1"/>
-          <p:nvPr/>
-        </p:nvSpPr>
-        <p:spPr>
-          <a:xfrm>
-            <a:off x="3535591" y="3230118"/>
+          <p:cNvPr id="37" name="TextBox 36"/>
+          <p:cNvSpPr txBox="1"/>
+          <p:nvPr/>
+        </p:nvSpPr>
+        <p:spPr>
+          <a:xfrm>
+            <a:off x="3657508" y="3573018"/>
             <a:ext cx="4145176" cy="356616"/>
           </a:xfrm>
           <a:prstGeom prst="rect">
@@ -13167,7 +12740,7 @@
           <a:p>
             <a:pPr algn="l"/>
             <a:r>
-              <a:rPr sz="750" b="0">
+              <a:rPr sz="800" b="0">
                 <a:solidFill>
                   <a:srgbClr val="1A1A1A"/>
                 </a:solidFill>
@@ -13180,13 +12753,13 @@
       </p:sp>
       <p:sp>
         <p:nvSpPr>
-          <p:cNvPr id="37" name="Rectangle 36"/>
+          <p:cNvPr id="38" name="Rectangle 37"/>
           <p:cNvSpPr/>
           <p:nvPr/>
         </p:nvSpPr>
         <p:spPr>
           <a:xfrm>
-            <a:off x="7680767" y="3202686"/>
+            <a:off x="7802684" y="3545586"/>
             <a:ext cx="4145176" cy="411480"/>
           </a:xfrm>
           <a:prstGeom prst="rect">
@@ -13226,13 +12799,13 @@
       </p:sp>
       <p:sp>
         <p:nvSpPr>
-          <p:cNvPr id="38" name="TextBox 37"/>
-          <p:cNvSpPr txBox="1"/>
-          <p:nvPr/>
-        </p:nvSpPr>
-        <p:spPr>
-          <a:xfrm>
-            <a:off x="7680767" y="3230118"/>
+          <p:cNvPr id="39" name="TextBox 38"/>
+          <p:cNvSpPr txBox="1"/>
+          <p:nvPr/>
+        </p:nvSpPr>
+        <p:spPr>
+          <a:xfrm>
+            <a:off x="7802684" y="3573018"/>
             <a:ext cx="4145176" cy="356616"/>
           </a:xfrm>
           <a:prstGeom prst="rect">
@@ -13248,7 +12821,7 @@
           <a:p>
             <a:pPr algn="l"/>
             <a:r>
-              <a:rPr sz="750" b="0">
+              <a:rPr sz="800" b="0">
                 <a:solidFill>
                   <a:srgbClr val="1A1A1A"/>
                 </a:solidFill>
@@ -13261,13 +12834,13 @@
       </p:sp>
       <p:sp>
         <p:nvSpPr>
-          <p:cNvPr id="39" name="Rectangle 38"/>
+          <p:cNvPr id="40" name="Rectangle 39"/>
           <p:cNvSpPr/>
           <p:nvPr/>
         </p:nvSpPr>
         <p:spPr>
           <a:xfrm>
-            <a:off x="365750" y="3614166"/>
+            <a:off x="487667" y="3957066"/>
             <a:ext cx="3169840" cy="411480"/>
           </a:xfrm>
           <a:prstGeom prst="rect">
@@ -13307,13 +12880,13 @@
       </p:sp>
       <p:sp>
         <p:nvSpPr>
-          <p:cNvPr id="40" name="TextBox 39"/>
-          <p:cNvSpPr txBox="1"/>
-          <p:nvPr/>
-        </p:nvSpPr>
-        <p:spPr>
-          <a:xfrm>
-            <a:off x="365750" y="3641598"/>
+          <p:cNvPr id="41" name="TextBox 40"/>
+          <p:cNvSpPr txBox="1"/>
+          <p:nvPr/>
+        </p:nvSpPr>
+        <p:spPr>
+          <a:xfrm>
+            <a:off x="487667" y="3984498"/>
             <a:ext cx="3169840" cy="356616"/>
           </a:xfrm>
           <a:prstGeom prst="rect">
@@ -13329,7 +12902,7 @@
           <a:p>
             <a:pPr algn="l"/>
             <a:r>
-              <a:rPr sz="750" b="0">
+              <a:rPr sz="800" b="0">
                 <a:solidFill>
                   <a:srgbClr val="1A1A1A"/>
                 </a:solidFill>
@@ -13342,13 +12915,13 @@
       </p:sp>
       <p:sp>
         <p:nvSpPr>
-          <p:cNvPr id="41" name="Rectangle 40"/>
+          <p:cNvPr id="42" name="Rectangle 41"/>
           <p:cNvSpPr/>
           <p:nvPr/>
         </p:nvSpPr>
         <p:spPr>
           <a:xfrm>
-            <a:off x="3535591" y="3614166"/>
+            <a:off x="3657508" y="3957066"/>
             <a:ext cx="4145176" cy="411480"/>
           </a:xfrm>
           <a:prstGeom prst="rect">
@@ -13388,13 +12961,13 @@
       </p:sp>
       <p:sp>
         <p:nvSpPr>
-          <p:cNvPr id="42" name="TextBox 41"/>
-          <p:cNvSpPr txBox="1"/>
-          <p:nvPr/>
-        </p:nvSpPr>
-        <p:spPr>
-          <a:xfrm>
-            <a:off x="3535591" y="3641598"/>
+          <p:cNvPr id="43" name="TextBox 42"/>
+          <p:cNvSpPr txBox="1"/>
+          <p:nvPr/>
+        </p:nvSpPr>
+        <p:spPr>
+          <a:xfrm>
+            <a:off x="3657508" y="3984498"/>
             <a:ext cx="4145176" cy="356616"/>
           </a:xfrm>
           <a:prstGeom prst="rect">
@@ -13410,7 +12983,7 @@
           <a:p>
             <a:pPr algn="l"/>
             <a:r>
-              <a:rPr sz="750" b="0">
+              <a:rPr sz="800" b="0">
                 <a:solidFill>
                   <a:srgbClr val="1A1A1A"/>
                 </a:solidFill>
@@ -13423,13 +12996,13 @@
       </p:sp>
       <p:sp>
         <p:nvSpPr>
-          <p:cNvPr id="43" name="Rectangle 42"/>
+          <p:cNvPr id="44" name="Rectangle 43"/>
           <p:cNvSpPr/>
           <p:nvPr/>
         </p:nvSpPr>
         <p:spPr>
           <a:xfrm>
-            <a:off x="7680767" y="3614166"/>
+            <a:off x="7802684" y="3957066"/>
             <a:ext cx="4145176" cy="411480"/>
           </a:xfrm>
           <a:prstGeom prst="rect">
@@ -13469,13 +13042,13 @@
       </p:sp>
       <p:sp>
         <p:nvSpPr>
-          <p:cNvPr id="44" name="TextBox 43"/>
-          <p:cNvSpPr txBox="1"/>
-          <p:nvPr/>
-        </p:nvSpPr>
-        <p:spPr>
-          <a:xfrm>
-            <a:off x="7680767" y="3641598"/>
+          <p:cNvPr id="45" name="TextBox 44"/>
+          <p:cNvSpPr txBox="1"/>
+          <p:nvPr/>
+        </p:nvSpPr>
+        <p:spPr>
+          <a:xfrm>
+            <a:off x="7802684" y="3984498"/>
             <a:ext cx="4145176" cy="356616"/>
           </a:xfrm>
           <a:prstGeom prst="rect">
@@ -13491,7 +13064,7 @@
           <a:p>
             <a:pPr algn="l"/>
             <a:r>
-              <a:rPr sz="750" b="0">
+              <a:rPr sz="800" b="0">
                 <a:solidFill>
                   <a:srgbClr val="1A1A1A"/>
                 </a:solidFill>
@@ -13504,13 +13077,13 @@
       </p:sp>
       <p:sp>
         <p:nvSpPr>
-          <p:cNvPr id="45" name="Rectangle 44"/>
+          <p:cNvPr id="46" name="Rectangle 45"/>
           <p:cNvSpPr/>
           <p:nvPr/>
         </p:nvSpPr>
         <p:spPr>
           <a:xfrm>
-            <a:off x="365750" y="4025646"/>
+            <a:off x="487667" y="4368546"/>
             <a:ext cx="3169840" cy="411480"/>
           </a:xfrm>
           <a:prstGeom prst="rect">
@@ -13550,13 +13123,13 @@
       </p:sp>
       <p:sp>
         <p:nvSpPr>
-          <p:cNvPr id="46" name="TextBox 45"/>
-          <p:cNvSpPr txBox="1"/>
-          <p:nvPr/>
-        </p:nvSpPr>
-        <p:spPr>
-          <a:xfrm>
-            <a:off x="365750" y="4053078"/>
+          <p:cNvPr id="47" name="TextBox 46"/>
+          <p:cNvSpPr txBox="1"/>
+          <p:nvPr/>
+        </p:nvSpPr>
+        <p:spPr>
+          <a:xfrm>
+            <a:off x="487667" y="4395978"/>
             <a:ext cx="3169840" cy="356616"/>
           </a:xfrm>
           <a:prstGeom prst="rect">
@@ -13572,7 +13145,7 @@
           <a:p>
             <a:pPr algn="l"/>
             <a:r>
-              <a:rPr sz="750" b="0">
+              <a:rPr sz="800" b="0">
                 <a:solidFill>
                   <a:srgbClr val="1A1A1A"/>
                 </a:solidFill>
@@ -13585,13 +13158,13 @@
       </p:sp>
       <p:sp>
         <p:nvSpPr>
-          <p:cNvPr id="47" name="Rectangle 46"/>
+          <p:cNvPr id="48" name="Rectangle 47"/>
           <p:cNvSpPr/>
           <p:nvPr/>
         </p:nvSpPr>
         <p:spPr>
           <a:xfrm>
-            <a:off x="3535591" y="4025646"/>
+            <a:off x="3657508" y="4368546"/>
             <a:ext cx="4145176" cy="411480"/>
           </a:xfrm>
           <a:prstGeom prst="rect">
@@ -13631,13 +13204,13 @@
       </p:sp>
       <p:sp>
         <p:nvSpPr>
-          <p:cNvPr id="48" name="TextBox 47"/>
-          <p:cNvSpPr txBox="1"/>
-          <p:nvPr/>
-        </p:nvSpPr>
-        <p:spPr>
-          <a:xfrm>
-            <a:off x="3535591" y="4053078"/>
+          <p:cNvPr id="49" name="TextBox 48"/>
+          <p:cNvSpPr txBox="1"/>
+          <p:nvPr/>
+        </p:nvSpPr>
+        <p:spPr>
+          <a:xfrm>
+            <a:off x="3657508" y="4395978"/>
             <a:ext cx="4145176" cy="356616"/>
           </a:xfrm>
           <a:prstGeom prst="rect">
@@ -13653,7 +13226,7 @@
           <a:p>
             <a:pPr algn="l"/>
             <a:r>
-              <a:rPr sz="750" b="0">
+              <a:rPr sz="800" b="0">
                 <a:solidFill>
                   <a:srgbClr val="1A1A1A"/>
                 </a:solidFill>
@@ -13666,13 +13239,13 @@
       </p:sp>
       <p:sp>
         <p:nvSpPr>
-          <p:cNvPr id="49" name="Rectangle 48"/>
+          <p:cNvPr id="50" name="Rectangle 49"/>
           <p:cNvSpPr/>
           <p:nvPr/>
         </p:nvSpPr>
         <p:spPr>
           <a:xfrm>
-            <a:off x="7680767" y="4025646"/>
+            <a:off x="7802684" y="4368546"/>
             <a:ext cx="4145176" cy="411480"/>
           </a:xfrm>
           <a:prstGeom prst="rect">
@@ -13712,13 +13285,13 @@
       </p:sp>
       <p:sp>
         <p:nvSpPr>
-          <p:cNvPr id="50" name="TextBox 49"/>
-          <p:cNvSpPr txBox="1"/>
-          <p:nvPr/>
-        </p:nvSpPr>
-        <p:spPr>
-          <a:xfrm>
-            <a:off x="7680767" y="4053078"/>
+          <p:cNvPr id="51" name="TextBox 50"/>
+          <p:cNvSpPr txBox="1"/>
+          <p:nvPr/>
+        </p:nvSpPr>
+        <p:spPr>
+          <a:xfrm>
+            <a:off x="7802684" y="4395978"/>
             <a:ext cx="4145176" cy="356616"/>
           </a:xfrm>
           <a:prstGeom prst="rect">
@@ -13734,7 +13307,7 @@
           <a:p>
             <a:pPr algn="l"/>
             <a:r>
-              <a:rPr sz="750" b="0">
+              <a:rPr sz="800" b="0">
                 <a:solidFill>
                   <a:srgbClr val="1A1A1A"/>
                 </a:solidFill>
@@ -13747,13 +13320,13 @@
       </p:sp>
       <p:sp>
         <p:nvSpPr>
-          <p:cNvPr id="51" name="Rectangle 50"/>
+          <p:cNvPr id="52" name="Rectangle 51"/>
           <p:cNvSpPr/>
           <p:nvPr/>
         </p:nvSpPr>
         <p:spPr>
           <a:xfrm>
-            <a:off x="365750" y="4437126"/>
+            <a:off x="487667" y="4780026"/>
             <a:ext cx="3169840" cy="411480"/>
           </a:xfrm>
           <a:prstGeom prst="rect">
@@ -13793,13 +13366,13 @@
       </p:sp>
       <p:sp>
         <p:nvSpPr>
-          <p:cNvPr id="52" name="TextBox 51"/>
-          <p:cNvSpPr txBox="1"/>
-          <p:nvPr/>
-        </p:nvSpPr>
-        <p:spPr>
-          <a:xfrm>
-            <a:off x="365750" y="4464558"/>
+          <p:cNvPr id="53" name="TextBox 52"/>
+          <p:cNvSpPr txBox="1"/>
+          <p:nvPr/>
+        </p:nvSpPr>
+        <p:spPr>
+          <a:xfrm>
+            <a:off x="487667" y="4807458"/>
             <a:ext cx="3169840" cy="356616"/>
           </a:xfrm>
           <a:prstGeom prst="rect">
@@ -13815,7 +13388,7 @@
           <a:p>
             <a:pPr algn="l"/>
             <a:r>
-              <a:rPr sz="750" b="0">
+              <a:rPr sz="800" b="0">
                 <a:solidFill>
                   <a:srgbClr val="1A1A1A"/>
                 </a:solidFill>
@@ -13828,13 +13401,13 @@
       </p:sp>
       <p:sp>
         <p:nvSpPr>
-          <p:cNvPr id="53" name="Rectangle 52"/>
+          <p:cNvPr id="54" name="Rectangle 53"/>
           <p:cNvSpPr/>
           <p:nvPr/>
         </p:nvSpPr>
         <p:spPr>
           <a:xfrm>
-            <a:off x="3535591" y="4437126"/>
+            <a:off x="3657508" y="4780026"/>
             <a:ext cx="4145176" cy="411480"/>
           </a:xfrm>
           <a:prstGeom prst="rect">
@@ -13874,13 +13447,13 @@
       </p:sp>
       <p:sp>
         <p:nvSpPr>
-          <p:cNvPr id="54" name="TextBox 53"/>
-          <p:cNvSpPr txBox="1"/>
-          <p:nvPr/>
-        </p:nvSpPr>
-        <p:spPr>
-          <a:xfrm>
-            <a:off x="3535591" y="4464558"/>
+          <p:cNvPr id="55" name="TextBox 54"/>
+          <p:cNvSpPr txBox="1"/>
+          <p:nvPr/>
+        </p:nvSpPr>
+        <p:spPr>
+          <a:xfrm>
+            <a:off x="3657508" y="4807458"/>
             <a:ext cx="4145176" cy="356616"/>
           </a:xfrm>
           <a:prstGeom prst="rect">
@@ -13896,7 +13469,7 @@
           <a:p>
             <a:pPr algn="l"/>
             <a:r>
-              <a:rPr sz="750" b="0">
+              <a:rPr sz="800" b="0">
                 <a:solidFill>
                   <a:srgbClr val="1A1A1A"/>
                 </a:solidFill>
@@ -13909,13 +13482,13 @@
       </p:sp>
       <p:sp>
         <p:nvSpPr>
-          <p:cNvPr id="55" name="Rectangle 54"/>
+          <p:cNvPr id="56" name="Rectangle 55"/>
           <p:cNvSpPr/>
           <p:nvPr/>
         </p:nvSpPr>
         <p:spPr>
           <a:xfrm>
-            <a:off x="7680767" y="4437126"/>
+            <a:off x="7802684" y="4780026"/>
             <a:ext cx="4145176" cy="411480"/>
           </a:xfrm>
           <a:prstGeom prst="rect">
@@ -13955,13 +13528,13 @@
       </p:sp>
       <p:sp>
         <p:nvSpPr>
-          <p:cNvPr id="56" name="TextBox 55"/>
-          <p:cNvSpPr txBox="1"/>
-          <p:nvPr/>
-        </p:nvSpPr>
-        <p:spPr>
-          <a:xfrm>
-            <a:off x="7680767" y="4464558"/>
+          <p:cNvPr id="57" name="TextBox 56"/>
+          <p:cNvSpPr txBox="1"/>
+          <p:nvPr/>
+        </p:nvSpPr>
+        <p:spPr>
+          <a:xfrm>
+            <a:off x="7802684" y="4807458"/>
             <a:ext cx="4145176" cy="356616"/>
           </a:xfrm>
           <a:prstGeom prst="rect">
@@ -13977,7 +13550,7 @@
           <a:p>
             <a:pPr algn="l"/>
             <a:r>
-              <a:rPr sz="750" b="0">
+              <a:rPr sz="800" b="0">
                 <a:solidFill>
                   <a:srgbClr val="1A1A1A"/>
                 </a:solidFill>
@@ -13990,13 +13563,13 @@
       </p:sp>
       <p:sp>
         <p:nvSpPr>
-          <p:cNvPr id="57" name="Rectangle 56"/>
+          <p:cNvPr id="58" name="Rectangle 57"/>
           <p:cNvSpPr/>
           <p:nvPr/>
         </p:nvSpPr>
         <p:spPr>
           <a:xfrm>
-            <a:off x="365750" y="4848606"/>
+            <a:off x="487667" y="5191506"/>
             <a:ext cx="3169840" cy="411480"/>
           </a:xfrm>
           <a:prstGeom prst="rect">
@@ -14036,13 +13609,13 @@
       </p:sp>
       <p:sp>
         <p:nvSpPr>
-          <p:cNvPr id="58" name="TextBox 57"/>
-          <p:cNvSpPr txBox="1"/>
-          <p:nvPr/>
-        </p:nvSpPr>
-        <p:spPr>
-          <a:xfrm>
-            <a:off x="365750" y="4876038"/>
+          <p:cNvPr id="59" name="TextBox 58"/>
+          <p:cNvSpPr txBox="1"/>
+          <p:nvPr/>
+        </p:nvSpPr>
+        <p:spPr>
+          <a:xfrm>
+            <a:off x="487667" y="5218938"/>
             <a:ext cx="3169840" cy="356616"/>
           </a:xfrm>
           <a:prstGeom prst="rect">
@@ -14058,7 +13631,7 @@
           <a:p>
             <a:pPr algn="l"/>
             <a:r>
-              <a:rPr sz="750" b="0">
+              <a:rPr sz="800" b="0">
                 <a:solidFill>
                   <a:srgbClr val="1A1A1A"/>
                 </a:solidFill>
@@ -14071,13 +13644,13 @@
       </p:sp>
       <p:sp>
         <p:nvSpPr>
-          <p:cNvPr id="59" name="Rectangle 58"/>
+          <p:cNvPr id="60" name="Rectangle 59"/>
           <p:cNvSpPr/>
           <p:nvPr/>
         </p:nvSpPr>
         <p:spPr>
           <a:xfrm>
-            <a:off x="3535591" y="4848606"/>
+            <a:off x="3657508" y="5191506"/>
             <a:ext cx="4145176" cy="411480"/>
           </a:xfrm>
           <a:prstGeom prst="rect">
@@ -14117,13 +13690,13 @@
       </p:sp>
       <p:sp>
         <p:nvSpPr>
-          <p:cNvPr id="60" name="TextBox 59"/>
-          <p:cNvSpPr txBox="1"/>
-          <p:nvPr/>
-        </p:nvSpPr>
-        <p:spPr>
-          <a:xfrm>
-            <a:off x="3535591" y="4876038"/>
+          <p:cNvPr id="61" name="TextBox 60"/>
+          <p:cNvSpPr txBox="1"/>
+          <p:nvPr/>
+        </p:nvSpPr>
+        <p:spPr>
+          <a:xfrm>
+            <a:off x="3657508" y="5218938"/>
             <a:ext cx="4145176" cy="356616"/>
           </a:xfrm>
           <a:prstGeom prst="rect">
@@ -14139,7 +13712,7 @@
           <a:p>
             <a:pPr algn="l"/>
             <a:r>
-              <a:rPr sz="750" b="0">
+              <a:rPr sz="800" b="0">
                 <a:solidFill>
                   <a:srgbClr val="1A1A1A"/>
                 </a:solidFill>
@@ -14152,13 +13725,13 @@
       </p:sp>
       <p:sp>
         <p:nvSpPr>
-          <p:cNvPr id="61" name="Rectangle 60"/>
+          <p:cNvPr id="62" name="Rectangle 61"/>
           <p:cNvSpPr/>
           <p:nvPr/>
         </p:nvSpPr>
         <p:spPr>
           <a:xfrm>
-            <a:off x="7680767" y="4848606"/>
+            <a:off x="7802684" y="5191506"/>
             <a:ext cx="4145176" cy="411480"/>
           </a:xfrm>
           <a:prstGeom prst="rect">
@@ -14198,13 +13771,13 @@
       </p:sp>
       <p:sp>
         <p:nvSpPr>
-          <p:cNvPr id="62" name="TextBox 61"/>
-          <p:cNvSpPr txBox="1"/>
-          <p:nvPr/>
-        </p:nvSpPr>
-        <p:spPr>
-          <a:xfrm>
-            <a:off x="7680767" y="4876038"/>
+          <p:cNvPr id="63" name="TextBox 62"/>
+          <p:cNvSpPr txBox="1"/>
+          <p:nvPr/>
+        </p:nvSpPr>
+        <p:spPr>
+          <a:xfrm>
+            <a:off x="7802684" y="5218938"/>
             <a:ext cx="4145176" cy="356616"/>
           </a:xfrm>
           <a:prstGeom prst="rect">
@@ -14220,7 +13793,7 @@
           <a:p>
             <a:pPr algn="l"/>
             <a:r>
-              <a:rPr sz="750" b="0">
+              <a:rPr sz="800" b="0">
                 <a:solidFill>
                   <a:srgbClr val="1A1A1A"/>
                 </a:solidFill>
@@ -14233,13 +13806,13 @@
       </p:sp>
       <p:sp>
         <p:nvSpPr>
-          <p:cNvPr id="63" name="Rectangle 62"/>
+          <p:cNvPr id="64" name="Rectangle 63"/>
           <p:cNvSpPr/>
           <p:nvPr/>
         </p:nvSpPr>
         <p:spPr>
           <a:xfrm>
-            <a:off x="365750" y="5260086"/>
+            <a:off x="487667" y="5602986"/>
             <a:ext cx="3169840" cy="411480"/>
           </a:xfrm>
           <a:prstGeom prst="rect">
@@ -14279,13 +13852,13 @@
       </p:sp>
       <p:sp>
         <p:nvSpPr>
-          <p:cNvPr id="64" name="TextBox 63"/>
-          <p:cNvSpPr txBox="1"/>
-          <p:nvPr/>
-        </p:nvSpPr>
-        <p:spPr>
-          <a:xfrm>
-            <a:off x="365750" y="5287518"/>
+          <p:cNvPr id="65" name="TextBox 64"/>
+          <p:cNvSpPr txBox="1"/>
+          <p:nvPr/>
+        </p:nvSpPr>
+        <p:spPr>
+          <a:xfrm>
+            <a:off x="487667" y="5630418"/>
             <a:ext cx="3169840" cy="356616"/>
           </a:xfrm>
           <a:prstGeom prst="rect">
@@ -14301,7 +13874,7 @@
           <a:p>
             <a:pPr algn="l"/>
             <a:r>
-              <a:rPr sz="750" b="0">
+              <a:rPr sz="800" b="0">
                 <a:solidFill>
                   <a:srgbClr val="1A1A1A"/>
                 </a:solidFill>
@@ -14314,13 +13887,13 @@
       </p:sp>
       <p:sp>
         <p:nvSpPr>
-          <p:cNvPr id="65" name="Rectangle 64"/>
+          <p:cNvPr id="66" name="Rectangle 65"/>
           <p:cNvSpPr/>
           <p:nvPr/>
         </p:nvSpPr>
         <p:spPr>
           <a:xfrm>
-            <a:off x="3535591" y="5260086"/>
+            <a:off x="3657508" y="5602986"/>
             <a:ext cx="4145176" cy="411480"/>
           </a:xfrm>
           <a:prstGeom prst="rect">
@@ -14360,13 +13933,13 @@
       </p:sp>
       <p:sp>
         <p:nvSpPr>
-          <p:cNvPr id="66" name="TextBox 65"/>
-          <p:cNvSpPr txBox="1"/>
-          <p:nvPr/>
-        </p:nvSpPr>
-        <p:spPr>
-          <a:xfrm>
-            <a:off x="3535591" y="5287518"/>
+          <p:cNvPr id="67" name="TextBox 66"/>
+          <p:cNvSpPr txBox="1"/>
+          <p:nvPr/>
+        </p:nvSpPr>
+        <p:spPr>
+          <a:xfrm>
+            <a:off x="3657508" y="5630418"/>
             <a:ext cx="4145176" cy="356616"/>
           </a:xfrm>
           <a:prstGeom prst="rect">
@@ -14382,7 +13955,7 @@
           <a:p>
             <a:pPr algn="l"/>
             <a:r>
-              <a:rPr sz="750" b="0">
+              <a:rPr sz="800" b="0">
                 <a:solidFill>
                   <a:srgbClr val="1A1A1A"/>
                 </a:solidFill>
@@ -14395,13 +13968,13 @@
       </p:sp>
       <p:sp>
         <p:nvSpPr>
-          <p:cNvPr id="67" name="Rectangle 66"/>
+          <p:cNvPr id="68" name="Rectangle 67"/>
           <p:cNvSpPr/>
           <p:nvPr/>
         </p:nvSpPr>
         <p:spPr>
           <a:xfrm>
-            <a:off x="7680767" y="5260086"/>
+            <a:off x="7802684" y="5602986"/>
             <a:ext cx="4145176" cy="411480"/>
           </a:xfrm>
           <a:prstGeom prst="rect">
@@ -14441,13 +14014,13 @@
       </p:sp>
       <p:sp>
         <p:nvSpPr>
-          <p:cNvPr id="68" name="TextBox 67"/>
-          <p:cNvSpPr txBox="1"/>
-          <p:nvPr/>
-        </p:nvSpPr>
-        <p:spPr>
-          <a:xfrm>
-            <a:off x="7680767" y="5287518"/>
+          <p:cNvPr id="69" name="TextBox 68"/>
+          <p:cNvSpPr txBox="1"/>
+          <p:nvPr/>
+        </p:nvSpPr>
+        <p:spPr>
+          <a:xfrm>
+            <a:off x="7802684" y="5630418"/>
             <a:ext cx="4145176" cy="356616"/>
           </a:xfrm>
           <a:prstGeom prst="rect">
@@ -14463,7 +14036,7 @@
           <a:p>
             <a:pPr algn="l"/>
             <a:r>
-              <a:rPr sz="750" b="0">
+              <a:rPr sz="800" b="0">
                 <a:solidFill>
                   <a:srgbClr val="1A1A1A"/>
                 </a:solidFill>
@@ -14476,7 +14049,7 @@
       </p:sp>
       <p:sp>
         <p:nvSpPr>
-          <p:cNvPr id="69" name="TextBox 68"/>
+          <p:cNvPr id="70" name="TextBox 69"/>
           <p:cNvSpPr txBox="1"/>
           <p:nvPr/>
         </p:nvSpPr>
@@ -14511,7 +14084,7 @@
       </p:sp>
       <p:sp>
         <p:nvSpPr>
-          <p:cNvPr id="70" name="TextBox 69"/>
+          <p:cNvPr id="71" name="TextBox 70"/>
           <p:cNvSpPr txBox="1"/>
           <p:nvPr/>
         </p:nvSpPr>
@@ -14570,42 +14143,77 @@
         </p:nvSpPr>
         <p:spPr>
           <a:xfrm>
-            <a:off x="365750" y="274320"/>
-            <a:ext cx="10972525" cy="480060"/>
-          </a:xfrm>
-          <a:prstGeom prst="rect">
-            <a:avLst/>
-          </a:prstGeom>
-          <a:noFill/>
-        </p:spPr>
-        <p:txBody>
-          <a:bodyPr wrap="square" lIns="36000" rIns="36000" tIns="18000" bIns="18000">
-            <a:spAutoFit/>
-          </a:bodyPr>
-          <a:lstStyle/>
-          <a:p>
-            <a:pPr algn="l"/>
-            <a:r>
-              <a:rPr sz="1700" b="1">
+            <a:off x="487667" y="137160"/>
+            <a:ext cx="7315017" cy="274320"/>
+          </a:xfrm>
+          <a:prstGeom prst="rect">
+            <a:avLst/>
+          </a:prstGeom>
+          <a:noFill/>
+        </p:spPr>
+        <p:txBody>
+          <a:bodyPr wrap="square" lIns="36000" rIns="36000" tIns="18000" bIns="18000">
+            <a:spAutoFit/>
+          </a:bodyPr>
+          <a:lstStyle/>
+          <a:p>
+            <a:pPr algn="l"/>
+            <a:r>
+              <a:rPr sz="900" b="0">
+                <a:solidFill>
+                  <a:srgbClr val="767676"/>
+                </a:solidFill>
+                <a:latin typeface="Pretendard"/>
+              </a:rPr>
+              <a:t>기초분석 시사점</a:t>
+            </a:r>
+          </a:p>
+        </p:txBody>
+      </p:sp>
+      <p:sp>
+        <p:nvSpPr>
+          <p:cNvPr id="3" name="TextBox 2"/>
+          <p:cNvSpPr txBox="1"/>
+          <p:nvPr/>
+        </p:nvSpPr>
+        <p:spPr>
+          <a:xfrm>
+            <a:off x="487667" y="548640"/>
+            <a:ext cx="11216359" cy="548640"/>
+          </a:xfrm>
+          <a:prstGeom prst="rect">
+            <a:avLst/>
+          </a:prstGeom>
+          <a:noFill/>
+        </p:spPr>
+        <p:txBody>
+          <a:bodyPr wrap="square" lIns="36000" rIns="36000" tIns="18000" bIns="18000">
+            <a:spAutoFit/>
+          </a:bodyPr>
+          <a:lstStyle/>
+          <a:p>
+            <a:pPr algn="l"/>
+            <a:r>
+              <a:rPr sz="2400" b="1">
                 <a:solidFill>
                   <a:srgbClr val="1A1A1A"/>
                 </a:solidFill>
                 <a:latin typeface="Pretendard"/>
               </a:rPr>
-              <a:t>5. 다음 단계 (242(UX전략및컨셉수립) 입력)</a:t>
-            </a:r>
-          </a:p>
-        </p:txBody>
-      </p:sp>
-      <p:sp>
-        <p:nvSpPr>
-          <p:cNvPr id="3" name="Rectangle 2"/>
+              <a:t>다음 단계 (242(UX전략및컨셉수립) 입력)</a:t>
+            </a:r>
+          </a:p>
+        </p:txBody>
+      </p:sp>
+      <p:sp>
+        <p:nvSpPr>
+          <p:cNvPr id="4" name="Rectangle 3"/>
           <p:cNvSpPr/>
           <p:nvPr/>
         </p:nvSpPr>
         <p:spPr>
           <a:xfrm>
-            <a:off x="365750" y="891540"/>
+            <a:off x="487667" y="1234440"/>
             <a:ext cx="3169840" cy="377190"/>
           </a:xfrm>
           <a:prstGeom prst="rect">
@@ -14645,13 +14253,13 @@
       </p:sp>
       <p:sp>
         <p:nvSpPr>
-          <p:cNvPr id="4" name="TextBox 3"/>
-          <p:cNvSpPr txBox="1"/>
-          <p:nvPr/>
-        </p:nvSpPr>
-        <p:spPr>
-          <a:xfrm>
-            <a:off x="365750" y="946404"/>
+          <p:cNvPr id="5" name="TextBox 4"/>
+          <p:cNvSpPr txBox="1"/>
+          <p:nvPr/>
+        </p:nvSpPr>
+        <p:spPr>
+          <a:xfrm>
+            <a:off x="487667" y="1289304"/>
             <a:ext cx="3169840" cy="301752"/>
           </a:xfrm>
           <a:prstGeom prst="rect">
@@ -14680,13 +14288,13 @@
       </p:sp>
       <p:sp>
         <p:nvSpPr>
-          <p:cNvPr id="5" name="Rectangle 4"/>
+          <p:cNvPr id="6" name="Rectangle 5"/>
           <p:cNvSpPr/>
           <p:nvPr/>
         </p:nvSpPr>
         <p:spPr>
           <a:xfrm>
-            <a:off x="3535591" y="891540"/>
+            <a:off x="3657508" y="1234440"/>
             <a:ext cx="8290352" cy="377190"/>
           </a:xfrm>
           <a:prstGeom prst="rect">
@@ -14726,13 +14334,13 @@
       </p:sp>
       <p:sp>
         <p:nvSpPr>
-          <p:cNvPr id="6" name="TextBox 5"/>
-          <p:cNvSpPr txBox="1"/>
-          <p:nvPr/>
-        </p:nvSpPr>
-        <p:spPr>
-          <a:xfrm>
-            <a:off x="3535591" y="946404"/>
+          <p:cNvPr id="7" name="TextBox 6"/>
+          <p:cNvSpPr txBox="1"/>
+          <p:nvPr/>
+        </p:nvSpPr>
+        <p:spPr>
+          <a:xfrm>
+            <a:off x="3657508" y="1289304"/>
             <a:ext cx="8290352" cy="301752"/>
           </a:xfrm>
           <a:prstGeom prst="rect">
@@ -14761,13 +14369,13 @@
       </p:sp>
       <p:sp>
         <p:nvSpPr>
-          <p:cNvPr id="7" name="Rectangle 6"/>
+          <p:cNvPr id="8" name="Rectangle 7"/>
           <p:cNvSpPr/>
           <p:nvPr/>
         </p:nvSpPr>
         <p:spPr>
           <a:xfrm>
-            <a:off x="365750" y="1268730"/>
+            <a:off x="487667" y="1611630"/>
             <a:ext cx="3169840" cy="534924"/>
           </a:xfrm>
           <a:prstGeom prst="rect">
@@ -14807,13 +14415,13 @@
       </p:sp>
       <p:sp>
         <p:nvSpPr>
-          <p:cNvPr id="8" name="TextBox 7"/>
-          <p:cNvSpPr txBox="1"/>
-          <p:nvPr/>
-        </p:nvSpPr>
-        <p:spPr>
-          <a:xfrm>
-            <a:off x="365750" y="1296161"/>
+          <p:cNvPr id="9" name="TextBox 8"/>
+          <p:cNvSpPr txBox="1"/>
+          <p:nvPr/>
+        </p:nvSpPr>
+        <p:spPr>
+          <a:xfrm>
+            <a:off x="487667" y="1639062"/>
             <a:ext cx="3169840" cy="480060"/>
           </a:xfrm>
           <a:prstGeom prst="rect">
@@ -14829,7 +14437,7 @@
           <a:p>
             <a:pPr algn="l"/>
             <a:r>
-              <a:rPr sz="750" b="0">
+              <a:rPr sz="800" b="0">
                 <a:solidFill>
                   <a:srgbClr val="1A1A1A"/>
                 </a:solidFill>
@@ -14842,13 +14450,13 @@
       </p:sp>
       <p:sp>
         <p:nvSpPr>
-          <p:cNvPr id="9" name="Rectangle 8"/>
+          <p:cNvPr id="10" name="Rectangle 9"/>
           <p:cNvSpPr/>
           <p:nvPr/>
         </p:nvSpPr>
         <p:spPr>
           <a:xfrm>
-            <a:off x="3535591" y="1268730"/>
+            <a:off x="3657508" y="1611630"/>
             <a:ext cx="8290352" cy="534924"/>
           </a:xfrm>
           <a:prstGeom prst="rect">
@@ -14888,13 +14496,13 @@
       </p:sp>
       <p:sp>
         <p:nvSpPr>
-          <p:cNvPr id="10" name="TextBox 9"/>
-          <p:cNvSpPr txBox="1"/>
-          <p:nvPr/>
-        </p:nvSpPr>
-        <p:spPr>
-          <a:xfrm>
-            <a:off x="3535591" y="1296161"/>
+          <p:cNvPr id="11" name="TextBox 10"/>
+          <p:cNvSpPr txBox="1"/>
+          <p:nvPr/>
+        </p:nvSpPr>
+        <p:spPr>
+          <a:xfrm>
+            <a:off x="3657508" y="1639062"/>
             <a:ext cx="8290352" cy="480060"/>
           </a:xfrm>
           <a:prstGeom prst="rect">
@@ -14910,7 +14518,7 @@
           <a:p>
             <a:pPr algn="l"/>
             <a:r>
-              <a:rPr sz="750" b="0">
+              <a:rPr sz="800" b="0">
                 <a:solidFill>
                   <a:srgbClr val="1A1A1A"/>
                 </a:solidFill>
@@ -14923,13 +14531,13 @@
       </p:sp>
       <p:sp>
         <p:nvSpPr>
-          <p:cNvPr id="11" name="Rectangle 10"/>
+          <p:cNvPr id="12" name="Rectangle 11"/>
           <p:cNvSpPr/>
           <p:nvPr/>
         </p:nvSpPr>
         <p:spPr>
           <a:xfrm>
-            <a:off x="365750" y="1803654"/>
+            <a:off x="487667" y="2146554"/>
             <a:ext cx="3169840" cy="534924"/>
           </a:xfrm>
           <a:prstGeom prst="rect">
@@ -14969,13 +14577,13 @@
       </p:sp>
       <p:sp>
         <p:nvSpPr>
-          <p:cNvPr id="12" name="TextBox 11"/>
-          <p:cNvSpPr txBox="1"/>
-          <p:nvPr/>
-        </p:nvSpPr>
-        <p:spPr>
-          <a:xfrm>
-            <a:off x="365750" y="1831086"/>
+          <p:cNvPr id="13" name="TextBox 12"/>
+          <p:cNvSpPr txBox="1"/>
+          <p:nvPr/>
+        </p:nvSpPr>
+        <p:spPr>
+          <a:xfrm>
+            <a:off x="487667" y="2173986"/>
             <a:ext cx="3169840" cy="480060"/>
           </a:xfrm>
           <a:prstGeom prst="rect">
@@ -14991,7 +14599,7 @@
           <a:p>
             <a:pPr algn="l"/>
             <a:r>
-              <a:rPr sz="750" b="0">
+              <a:rPr sz="800" b="0">
                 <a:solidFill>
                   <a:srgbClr val="1A1A1A"/>
                 </a:solidFill>
@@ -15004,13 +14612,13 @@
       </p:sp>
       <p:sp>
         <p:nvSpPr>
-          <p:cNvPr id="13" name="Rectangle 12"/>
+          <p:cNvPr id="14" name="Rectangle 13"/>
           <p:cNvSpPr/>
           <p:nvPr/>
         </p:nvSpPr>
         <p:spPr>
           <a:xfrm>
-            <a:off x="3535591" y="1803654"/>
+            <a:off x="3657508" y="2146554"/>
             <a:ext cx="8290352" cy="534924"/>
           </a:xfrm>
           <a:prstGeom prst="rect">
@@ -15050,13 +14658,13 @@
       </p:sp>
       <p:sp>
         <p:nvSpPr>
-          <p:cNvPr id="14" name="TextBox 13"/>
-          <p:cNvSpPr txBox="1"/>
-          <p:nvPr/>
-        </p:nvSpPr>
-        <p:spPr>
-          <a:xfrm>
-            <a:off x="3535591" y="1831086"/>
+          <p:cNvPr id="15" name="TextBox 14"/>
+          <p:cNvSpPr txBox="1"/>
+          <p:nvPr/>
+        </p:nvSpPr>
+        <p:spPr>
+          <a:xfrm>
+            <a:off x="3657508" y="2173986"/>
             <a:ext cx="8290352" cy="480060"/>
           </a:xfrm>
           <a:prstGeom prst="rect">
@@ -15072,7 +14680,7 @@
           <a:p>
             <a:pPr algn="l"/>
             <a:r>
-              <a:rPr sz="750" b="0">
+              <a:rPr sz="800" b="0">
                 <a:solidFill>
                   <a:srgbClr val="1A1A1A"/>
                 </a:solidFill>
@@ -15085,13 +14693,13 @@
       </p:sp>
       <p:sp>
         <p:nvSpPr>
-          <p:cNvPr id="15" name="Rectangle 14"/>
+          <p:cNvPr id="16" name="Rectangle 15"/>
           <p:cNvSpPr/>
           <p:nvPr/>
         </p:nvSpPr>
         <p:spPr>
           <a:xfrm>
-            <a:off x="365750" y="2338578"/>
+            <a:off x="487667" y="2681478"/>
             <a:ext cx="3169840" cy="411480"/>
           </a:xfrm>
           <a:prstGeom prst="rect">
@@ -15131,13 +14739,13 @@
       </p:sp>
       <p:sp>
         <p:nvSpPr>
-          <p:cNvPr id="16" name="TextBox 15"/>
-          <p:cNvSpPr txBox="1"/>
-          <p:nvPr/>
-        </p:nvSpPr>
-        <p:spPr>
-          <a:xfrm>
-            <a:off x="365750" y="2366010"/>
+          <p:cNvPr id="17" name="TextBox 16"/>
+          <p:cNvSpPr txBox="1"/>
+          <p:nvPr/>
+        </p:nvSpPr>
+        <p:spPr>
+          <a:xfrm>
+            <a:off x="487667" y="2708910"/>
             <a:ext cx="3169840" cy="356616"/>
           </a:xfrm>
           <a:prstGeom prst="rect">
@@ -15153,7 +14761,7 @@
           <a:p>
             <a:pPr algn="l"/>
             <a:r>
-              <a:rPr sz="750" b="0">
+              <a:rPr sz="800" b="0">
                 <a:solidFill>
                   <a:srgbClr val="1A1A1A"/>
                 </a:solidFill>
@@ -15166,13 +14774,13 @@
       </p:sp>
       <p:sp>
         <p:nvSpPr>
-          <p:cNvPr id="17" name="Rectangle 16"/>
+          <p:cNvPr id="18" name="Rectangle 17"/>
           <p:cNvSpPr/>
           <p:nvPr/>
         </p:nvSpPr>
         <p:spPr>
           <a:xfrm>
-            <a:off x="3535591" y="2338578"/>
+            <a:off x="3657508" y="2681478"/>
             <a:ext cx="8290352" cy="411480"/>
           </a:xfrm>
           <a:prstGeom prst="rect">
@@ -15212,13 +14820,13 @@
       </p:sp>
       <p:sp>
         <p:nvSpPr>
-          <p:cNvPr id="18" name="TextBox 17"/>
-          <p:cNvSpPr txBox="1"/>
-          <p:nvPr/>
-        </p:nvSpPr>
-        <p:spPr>
-          <a:xfrm>
-            <a:off x="3535591" y="2366010"/>
+          <p:cNvPr id="19" name="TextBox 18"/>
+          <p:cNvSpPr txBox="1"/>
+          <p:nvPr/>
+        </p:nvSpPr>
+        <p:spPr>
+          <a:xfrm>
+            <a:off x="3657508" y="2708910"/>
             <a:ext cx="8290352" cy="356616"/>
           </a:xfrm>
           <a:prstGeom prst="rect">
@@ -15234,7 +14842,7 @@
           <a:p>
             <a:pPr algn="l"/>
             <a:r>
-              <a:rPr sz="750" b="0">
+              <a:rPr sz="800" b="0">
                 <a:solidFill>
                   <a:srgbClr val="1A1A1A"/>
                 </a:solidFill>
@@ -15247,13 +14855,13 @@
       </p:sp>
       <p:sp>
         <p:nvSpPr>
-          <p:cNvPr id="19" name="Rectangle 18"/>
+          <p:cNvPr id="20" name="Rectangle 19"/>
           <p:cNvSpPr/>
           <p:nvPr/>
         </p:nvSpPr>
         <p:spPr>
           <a:xfrm>
-            <a:off x="365750" y="2750058"/>
+            <a:off x="487667" y="3092958"/>
             <a:ext cx="3169840" cy="411480"/>
           </a:xfrm>
           <a:prstGeom prst="rect">
@@ -15293,13 +14901,13 @@
       </p:sp>
       <p:sp>
         <p:nvSpPr>
-          <p:cNvPr id="20" name="TextBox 19"/>
-          <p:cNvSpPr txBox="1"/>
-          <p:nvPr/>
-        </p:nvSpPr>
-        <p:spPr>
-          <a:xfrm>
-            <a:off x="365750" y="2777490"/>
+          <p:cNvPr id="21" name="TextBox 20"/>
+          <p:cNvSpPr txBox="1"/>
+          <p:nvPr/>
+        </p:nvSpPr>
+        <p:spPr>
+          <a:xfrm>
+            <a:off x="487667" y="3120390"/>
             <a:ext cx="3169840" cy="356616"/>
           </a:xfrm>
           <a:prstGeom prst="rect">
@@ -15315,7 +14923,7 @@
           <a:p>
             <a:pPr algn="l"/>
             <a:r>
-              <a:rPr sz="750" b="0">
+              <a:rPr sz="800" b="0">
                 <a:solidFill>
                   <a:srgbClr val="1A1A1A"/>
                 </a:solidFill>
@@ -15328,13 +14936,13 @@
       </p:sp>
       <p:sp>
         <p:nvSpPr>
-          <p:cNvPr id="21" name="Rectangle 20"/>
+          <p:cNvPr id="22" name="Rectangle 21"/>
           <p:cNvSpPr/>
           <p:nvPr/>
         </p:nvSpPr>
         <p:spPr>
           <a:xfrm>
-            <a:off x="3535591" y="2750058"/>
+            <a:off x="3657508" y="3092958"/>
             <a:ext cx="8290352" cy="411480"/>
           </a:xfrm>
           <a:prstGeom prst="rect">
@@ -15374,13 +14982,13 @@
       </p:sp>
       <p:sp>
         <p:nvSpPr>
-          <p:cNvPr id="22" name="TextBox 21"/>
-          <p:cNvSpPr txBox="1"/>
-          <p:nvPr/>
-        </p:nvSpPr>
-        <p:spPr>
-          <a:xfrm>
-            <a:off x="3535591" y="2777490"/>
+          <p:cNvPr id="23" name="TextBox 22"/>
+          <p:cNvSpPr txBox="1"/>
+          <p:nvPr/>
+        </p:nvSpPr>
+        <p:spPr>
+          <a:xfrm>
+            <a:off x="3657508" y="3120390"/>
             <a:ext cx="8290352" cy="356616"/>
           </a:xfrm>
           <a:prstGeom prst="rect">
@@ -15396,7 +15004,7 @@
           <a:p>
             <a:pPr algn="l"/>
             <a:r>
-              <a:rPr sz="750" b="0">
+              <a:rPr sz="800" b="0">
                 <a:solidFill>
                   <a:srgbClr val="1A1A1A"/>
                 </a:solidFill>
@@ -15409,13 +15017,13 @@
       </p:sp>
       <p:sp>
         <p:nvSpPr>
-          <p:cNvPr id="23" name="Rectangle 22"/>
+          <p:cNvPr id="24" name="Rectangle 23"/>
           <p:cNvSpPr/>
           <p:nvPr/>
         </p:nvSpPr>
         <p:spPr>
           <a:xfrm>
-            <a:off x="365750" y="3161538"/>
+            <a:off x="487667" y="3504438"/>
             <a:ext cx="3169840" cy="534924"/>
           </a:xfrm>
           <a:prstGeom prst="rect">
@@ -15455,13 +15063,13 @@
       </p:sp>
       <p:sp>
         <p:nvSpPr>
-          <p:cNvPr id="24" name="TextBox 23"/>
-          <p:cNvSpPr txBox="1"/>
-          <p:nvPr/>
-        </p:nvSpPr>
-        <p:spPr>
-          <a:xfrm>
-            <a:off x="365750" y="3188970"/>
+          <p:cNvPr id="25" name="TextBox 24"/>
+          <p:cNvSpPr txBox="1"/>
+          <p:nvPr/>
+        </p:nvSpPr>
+        <p:spPr>
+          <a:xfrm>
+            <a:off x="487667" y="3531870"/>
             <a:ext cx="3169840" cy="480060"/>
           </a:xfrm>
           <a:prstGeom prst="rect">
@@ -15477,7 +15085,7 @@
           <a:p>
             <a:pPr algn="l"/>
             <a:r>
-              <a:rPr sz="750" b="0">
+              <a:rPr sz="800" b="0">
                 <a:solidFill>
                   <a:srgbClr val="1A1A1A"/>
                 </a:solidFill>
@@ -15490,13 +15098,13 @@
       </p:sp>
       <p:sp>
         <p:nvSpPr>
-          <p:cNvPr id="25" name="Rectangle 24"/>
+          <p:cNvPr id="26" name="Rectangle 25"/>
           <p:cNvSpPr/>
           <p:nvPr/>
         </p:nvSpPr>
         <p:spPr>
           <a:xfrm>
-            <a:off x="3535591" y="3161538"/>
+            <a:off x="3657508" y="3504438"/>
             <a:ext cx="8290352" cy="534924"/>
           </a:xfrm>
           <a:prstGeom prst="rect">
@@ -15536,13 +15144,13 @@
       </p:sp>
       <p:sp>
         <p:nvSpPr>
-          <p:cNvPr id="26" name="TextBox 25"/>
-          <p:cNvSpPr txBox="1"/>
-          <p:nvPr/>
-        </p:nvSpPr>
-        <p:spPr>
-          <a:xfrm>
-            <a:off x="3535591" y="3188970"/>
+          <p:cNvPr id="27" name="TextBox 26"/>
+          <p:cNvSpPr txBox="1"/>
+          <p:nvPr/>
+        </p:nvSpPr>
+        <p:spPr>
+          <a:xfrm>
+            <a:off x="3657508" y="3531870"/>
             <a:ext cx="8290352" cy="480060"/>
           </a:xfrm>
           <a:prstGeom prst="rect">
@@ -15558,7 +15166,7 @@
           <a:p>
             <a:pPr algn="l"/>
             <a:r>
-              <a:rPr sz="750" b="0">
+              <a:rPr sz="800" b="0">
                 <a:solidFill>
                   <a:srgbClr val="1A1A1A"/>
                 </a:solidFill>
@@ -15571,7 +15179,7 @@
       </p:sp>
       <p:sp>
         <p:nvSpPr>
-          <p:cNvPr id="27" name="TextBox 26"/>
+          <p:cNvPr id="28" name="TextBox 27"/>
           <p:cNvSpPr txBox="1"/>
           <p:nvPr/>
         </p:nvSpPr>
@@ -15606,7 +15214,7 @@
       </p:sp>
       <p:sp>
         <p:nvSpPr>
-          <p:cNvPr id="28" name="TextBox 27"/>
+          <p:cNvPr id="29" name="TextBox 28"/>
           <p:cNvSpPr txBox="1"/>
           <p:nvPr/>
         </p:nvSpPr>
